--- a/assets/circles-smartplan-deck.pptx
+++ b/assets/circles-smartplan-deck.pptx
@@ -1507,13 +1507,13 @@
         <p:spPr>
           <a:xfrm rot="1800000">
             <a:off x="-457200" y="0"/>
-            <a:ext cx="3657600" cy="6858000"/>
+            <a:ext cx="3200400" cy="5143500"/>
           </a:xfrm>
           <a:prstGeom prst="line">
             <a:avLst/>
           </a:prstGeom>
           <a:noFill/>
-          <a:ln w="6350">
+          <a:ln w="5080">
             <a:solidFill>
               <a:srgbClr val="00C6FF"/>
             </a:solidFill>
@@ -1529,14 +1529,14 @@
         </p:nvSpPr>
         <p:spPr>
           <a:xfrm rot="1800000">
-            <a:off x="1371600" y="0"/>
-            <a:ext cx="3657600" cy="6858000"/>
+            <a:off x="1554480" y="0"/>
+            <a:ext cx="3200400" cy="5143500"/>
           </a:xfrm>
           <a:prstGeom prst="line">
             <a:avLst/>
           </a:prstGeom>
           <a:noFill/>
-          <a:ln w="6350">
+          <a:ln w="5080">
             <a:solidFill>
               <a:srgbClr val="00C6FF"/>
             </a:solidFill>
@@ -1552,14 +1552,14 @@
         </p:nvSpPr>
         <p:spPr>
           <a:xfrm rot="1800000">
-            <a:off x="3200400" y="0"/>
-            <a:ext cx="3657600" cy="6858000"/>
+            <a:off x="3566160" y="0"/>
+            <a:ext cx="3200400" cy="5143500"/>
           </a:xfrm>
           <a:prstGeom prst="line">
             <a:avLst/>
           </a:prstGeom>
           <a:noFill/>
-          <a:ln w="6350">
+          <a:ln w="5080">
             <a:solidFill>
               <a:srgbClr val="00C6FF"/>
             </a:solidFill>
@@ -1575,14 +1575,14 @@
         </p:nvSpPr>
         <p:spPr>
           <a:xfrm rot="1800000">
-            <a:off x="5029200" y="0"/>
-            <a:ext cx="3657600" cy="6858000"/>
+            <a:off x="5577840" y="0"/>
+            <a:ext cx="3200400" cy="5143500"/>
           </a:xfrm>
           <a:prstGeom prst="line">
             <a:avLst/>
           </a:prstGeom>
           <a:noFill/>
-          <a:ln w="6350">
+          <a:ln w="5080">
             <a:solidFill>
               <a:srgbClr val="00C6FF"/>
             </a:solidFill>
@@ -1598,14 +1598,14 @@
         </p:nvSpPr>
         <p:spPr>
           <a:xfrm rot="1800000">
-            <a:off x="6858000" y="0"/>
-            <a:ext cx="3657600" cy="6858000"/>
+            <a:off x="7589520" y="0"/>
+            <a:ext cx="1417320" cy="5143500"/>
           </a:xfrm>
           <a:prstGeom prst="line">
             <a:avLst/>
           </a:prstGeom>
           <a:noFill/>
-          <a:ln w="6350">
+          <a:ln w="5080">
             <a:solidFill>
               <a:srgbClr val="00C6FF"/>
             </a:solidFill>
@@ -1620,36 +1620,13 @@
           <p:nvPr/>
         </p:nvSpPr>
         <p:spPr>
-          <a:xfrm rot="1800000">
-            <a:off x="8686800" y="0"/>
-            <a:ext cx="3657600" cy="6858000"/>
-          </a:xfrm>
-          <a:prstGeom prst="line">
-            <a:avLst/>
-          </a:prstGeom>
-          <a:noFill/>
-          <a:ln w="6350">
-            <a:solidFill>
-              <a:srgbClr val="00C6FF"/>
-            </a:solidFill>
-            <a:prstDash val="solid"/>
-          </a:ln>
-        </p:spPr>
-      </p:sp>
-      <p:sp>
-        <p:nvSpPr>
-          <p:cNvPr id="8" name="Shape 6"/>
-          <p:cNvSpPr/>
-          <p:nvPr/>
-        </p:nvSpPr>
-        <p:spPr>
-          <a:xfrm>
-            <a:off x="457200" y="320040"/>
-            <a:ext cx="2926080" cy="292608"/>
+          <a:xfrm>
+            <a:off x="457200" y="237744"/>
+            <a:ext cx="2743200" cy="237744"/>
           </a:xfrm>
           <a:prstGeom prst="roundRect">
             <a:avLst>
-              <a:gd name="adj" fmla="val 15625"/>
+              <a:gd name="adj" fmla="val 19231"/>
             </a:avLst>
           </a:prstGeom>
           <a:solidFill>
@@ -1669,66 +1646,66 @@
       </p:sp>
       <p:sp>
         <p:nvSpPr>
+          <p:cNvPr id="8" name="Text 6"/>
+          <p:cNvSpPr/>
+          <p:nvPr/>
+        </p:nvSpPr>
+        <p:spPr>
+          <a:xfrm>
+            <a:off x="457200" y="237744"/>
+            <a:ext cx="2743200" cy="237744"/>
+          </a:xfrm>
+          <a:prstGeom prst="rect">
+            <a:avLst/>
+          </a:prstGeom>
+          <a:noFill/>
+          <a:ln/>
+        </p:spPr>
+        <p:txBody>
+          <a:bodyPr wrap="square" rtlCol="0" anchor="ctr"/>
+          <a:lstStyle/>
+          <a:p>
+            <a:pPr algn="ctr" indent="0" marL="0">
+              <a:buNone/>
+            </a:pPr>
+            <a:r>
+              <a:rPr lang="en-US" sz="700" b="1" dirty="0">
+                <a:solidFill>
+                  <a:srgbClr val="00C6FF"/>
+                </a:solidFill>
+              </a:rPr>
+              <a:t>CIRCLES — MENA DIGITAL BRAND</a:t>
+            </a:r>
+            <a:endParaRPr lang="en-US" sz="700" dirty="0"/>
+          </a:p>
+        </p:txBody>
+      </p:sp>
+      <p:sp>
+        <p:nvSpPr>
           <p:cNvPr id="9" name="Text 7"/>
           <p:cNvSpPr/>
           <p:nvPr/>
         </p:nvSpPr>
         <p:spPr>
           <a:xfrm>
-            <a:off x="457200" y="320040"/>
-            <a:ext cx="2926080" cy="292608"/>
-          </a:xfrm>
-          <a:prstGeom prst="rect">
-            <a:avLst/>
-          </a:prstGeom>
-          <a:noFill/>
-          <a:ln/>
-        </p:spPr>
-        <p:txBody>
-          <a:bodyPr wrap="square" rtlCol="0" anchor="ctr"/>
-          <a:lstStyle/>
-          <a:p>
-            <a:pPr algn="ctr" indent="0" marL="0">
-              <a:buNone/>
-            </a:pPr>
-            <a:r>
-              <a:rPr lang="en-US" sz="800" b="1" dirty="0">
-                <a:solidFill>
-                  <a:srgbClr val="00C6FF"/>
-                </a:solidFill>
-              </a:rPr>
-              <a:t>CIRCLES — MENA DIGITAL BRAND</a:t>
-            </a:r>
-            <a:endParaRPr lang="en-US" sz="800" dirty="0"/>
-          </a:p>
-        </p:txBody>
-      </p:sp>
-      <p:sp>
-        <p:nvSpPr>
-          <p:cNvPr id="10" name="Text 8"/>
-          <p:cNvSpPr/>
-          <p:nvPr/>
-        </p:nvSpPr>
-        <p:spPr>
-          <a:xfrm>
-            <a:off x="457200" y="1005840"/>
-            <a:ext cx="5486400" cy="1280160"/>
-          </a:xfrm>
-          <a:prstGeom prst="rect">
-            <a:avLst/>
-          </a:prstGeom>
-          <a:noFill/>
-          <a:ln/>
-        </p:spPr>
-        <p:txBody>
-          <a:bodyPr wrap="square" rtlCol="0" anchor="ctr"/>
-          <a:lstStyle/>
-          <a:p>
-            <a:pPr indent="0" marL="0">
-              <a:buNone/>
-            </a:pPr>
-            <a:r>
-              <a:rPr lang="en-US" sz="7200" b="1" dirty="0">
+            <a:off x="457200" y="658368"/>
+            <a:ext cx="5486400" cy="1005840"/>
+          </a:xfrm>
+          <a:prstGeom prst="rect">
+            <a:avLst/>
+          </a:prstGeom>
+          <a:noFill/>
+          <a:ln/>
+        </p:spPr>
+        <p:txBody>
+          <a:bodyPr wrap="square" rtlCol="0" anchor="ctr"/>
+          <a:lstStyle/>
+          <a:p>
+            <a:pPr indent="0" marL="0">
+              <a:buNone/>
+            </a:pPr>
+            <a:r>
+              <a:rPr lang="en-US" sz="6000" b="1" dirty="0">
                 <a:solidFill>
                   <a:srgbClr val="FFFFFF"/>
                 </a:solidFill>
@@ -1738,20 +1715,20 @@
               </a:rPr>
               <a:t>SmartPlan</a:t>
             </a:r>
-            <a:endParaRPr lang="en-US" sz="7200" dirty="0"/>
-          </a:p>
-        </p:txBody>
-      </p:sp>
-      <p:sp>
-        <p:nvSpPr>
-          <p:cNvPr id="11" name="Shape 9"/>
-          <p:cNvSpPr/>
-          <p:nvPr/>
-        </p:nvSpPr>
-        <p:spPr>
-          <a:xfrm>
-            <a:off x="457200" y="2148840"/>
-            <a:ext cx="2011680" cy="54864"/>
+            <a:endParaRPr lang="en-US" sz="6000" dirty="0"/>
+          </a:p>
+        </p:txBody>
+      </p:sp>
+      <p:sp>
+        <p:nvSpPr>
+          <p:cNvPr id="10" name="Shape 8"/>
+          <p:cNvSpPr/>
+          <p:nvPr/>
+        </p:nvSpPr>
+        <p:spPr>
+          <a:xfrm>
+            <a:off x="457200" y="1572768"/>
+            <a:ext cx="1828800" cy="45720"/>
           </a:xfrm>
           <a:prstGeom prst="rect">
             <a:avLst/>
@@ -1764,69 +1741,69 @@
       </p:sp>
       <p:sp>
         <p:nvSpPr>
+          <p:cNvPr id="11" name="Text 9"/>
+          <p:cNvSpPr/>
+          <p:nvPr/>
+        </p:nvSpPr>
+        <p:spPr>
+          <a:xfrm>
+            <a:off x="457200" y="1719072"/>
+            <a:ext cx="6583680" cy="347472"/>
+          </a:xfrm>
+          <a:prstGeom prst="rect">
+            <a:avLst/>
+          </a:prstGeom>
+          <a:noFill/>
+          <a:ln/>
+        </p:spPr>
+        <p:txBody>
+          <a:bodyPr wrap="square" rtlCol="0" anchor="ctr"/>
+          <a:lstStyle/>
+          <a:p>
+            <a:pPr indent="0" marL="0">
+              <a:buNone/>
+            </a:pPr>
+            <a:r>
+              <a:rPr lang="en-US" sz="1300" dirty="0">
+                <a:solidFill>
+                  <a:srgbClr val="A0C8E0"/>
+                </a:solidFill>
+                <a:latin typeface="Arial" pitchFamily="34" charset="0"/>
+                <a:ea typeface="Arial" pitchFamily="34" charset="-122"/>
+                <a:cs typeface="Arial" pitchFamily="34" charset="-120"/>
+              </a:rPr>
+              <a:t>AI-Powered Plan Personalisation for Digital Telco Subscribers</a:t>
+            </a:r>
+            <a:endParaRPr lang="en-US" sz="1300" dirty="0"/>
+          </a:p>
+        </p:txBody>
+      </p:sp>
+      <p:sp>
+        <p:nvSpPr>
           <p:cNvPr id="12" name="Text 10"/>
           <p:cNvSpPr/>
           <p:nvPr/>
         </p:nvSpPr>
         <p:spPr>
           <a:xfrm>
-            <a:off x="457200" y="2377440"/>
-            <a:ext cx="6400800" cy="457200"/>
-          </a:xfrm>
-          <a:prstGeom prst="rect">
-            <a:avLst/>
-          </a:prstGeom>
-          <a:noFill/>
-          <a:ln/>
-        </p:spPr>
-        <p:txBody>
-          <a:bodyPr wrap="square" rtlCol="0" anchor="ctr"/>
-          <a:lstStyle/>
-          <a:p>
-            <a:pPr indent="0" marL="0">
-              <a:buNone/>
-            </a:pPr>
-            <a:r>
-              <a:rPr lang="en-US" sz="1600" dirty="0">
-                <a:solidFill>
-                  <a:srgbClr val="A0C8E0"/>
-                </a:solidFill>
-                <a:latin typeface="Arial" pitchFamily="34" charset="0"/>
-                <a:ea typeface="Arial" pitchFamily="34" charset="-122"/>
-                <a:cs typeface="Arial" pitchFamily="34" charset="-120"/>
-              </a:rPr>
-              <a:t>AI-Powered Plan Personalisation for Digital Telco Subscribers</a:t>
-            </a:r>
-            <a:endParaRPr lang="en-US" sz="1600" dirty="0"/>
-          </a:p>
-        </p:txBody>
-      </p:sp>
-      <p:sp>
-        <p:nvSpPr>
-          <p:cNvPr id="13" name="Text 11"/>
-          <p:cNvSpPr/>
-          <p:nvPr/>
-        </p:nvSpPr>
-        <p:spPr>
-          <a:xfrm>
-            <a:off x="457200" y="2926080"/>
-            <a:ext cx="6400800" cy="274320"/>
-          </a:xfrm>
-          <a:prstGeom prst="rect">
-            <a:avLst/>
-          </a:prstGeom>
-          <a:noFill/>
-          <a:ln/>
-        </p:spPr>
-        <p:txBody>
-          <a:bodyPr wrap="square" rtlCol="0" anchor="ctr"/>
-          <a:lstStyle/>
-          <a:p>
-            <a:pPr indent="0" marL="0">
-              <a:buNone/>
-            </a:pPr>
-            <a:r>
-              <a:rPr lang="en-US" sz="1100" dirty="0">
+            <a:off x="457200" y="2157984"/>
+            <a:ext cx="6400800" cy="237744"/>
+          </a:xfrm>
+          <a:prstGeom prst="rect">
+            <a:avLst/>
+          </a:prstGeom>
+          <a:noFill/>
+          <a:ln/>
+        </p:spPr>
+        <p:txBody>
+          <a:bodyPr wrap="square" rtlCol="0" anchor="ctr"/>
+          <a:lstStyle/>
+          <a:p>
+            <a:pPr indent="0" marL="0">
+              <a:buNone/>
+            </a:pPr>
+            <a:r>
+              <a:rPr lang="en-US" sz="950" dirty="0">
                 <a:solidFill>
                   <a:srgbClr val="5A7A8A"/>
                 </a:solidFill>
@@ -1836,24 +1813,24 @@
               </a:rPr>
               <a:t>Presented by Ajay Avaghade  ·  Product Manager — AI/ML &amp; Consumer Growth</a:t>
             </a:r>
-            <a:endParaRPr lang="en-US" sz="1100" dirty="0"/>
-          </a:p>
-        </p:txBody>
-      </p:sp>
-      <p:sp>
-        <p:nvSpPr>
-          <p:cNvPr id="14" name="Shape 12"/>
-          <p:cNvSpPr/>
-          <p:nvPr/>
-        </p:nvSpPr>
-        <p:spPr>
-          <a:xfrm>
-            <a:off x="6217920" y="5303520"/>
-            <a:ext cx="2560320" cy="1280160"/>
+            <a:endParaRPr lang="en-US" sz="950" dirty="0"/>
+          </a:p>
+        </p:txBody>
+      </p:sp>
+      <p:sp>
+        <p:nvSpPr>
+          <p:cNvPr id="13" name="Shape 11"/>
+          <p:cNvSpPr/>
+          <p:nvPr/>
+        </p:nvSpPr>
+        <p:spPr>
+          <a:xfrm>
+            <a:off x="6492240" y="3474720"/>
+            <a:ext cx="2423160" cy="1417320"/>
           </a:xfrm>
           <a:prstGeom prst="roundRect">
             <a:avLst>
-              <a:gd name="adj" fmla="val 7143"/>
+              <a:gd name="adj" fmla="val 6452"/>
             </a:avLst>
           </a:prstGeom>
           <a:solidFill>
@@ -1862,7 +1839,7 @@
           <a:ln w="12700">
             <a:solidFill>
               <a:srgbClr val="00C6FF">
-                <a:alpha val="50000"/>
+                <a:alpha val="55000"/>
               </a:srgbClr>
             </a:solidFill>
             <a:prstDash val="solid"/>
@@ -1871,14 +1848,14 @@
       </p:sp>
       <p:sp>
         <p:nvSpPr>
-          <p:cNvPr id="15" name="Text 13"/>
-          <p:cNvSpPr/>
-          <p:nvPr/>
-        </p:nvSpPr>
-        <p:spPr>
-          <a:xfrm>
-            <a:off x="6217920" y="5349240"/>
-            <a:ext cx="2560320" cy="640080"/>
+          <p:cNvPr id="14" name="Text 12"/>
+          <p:cNvSpPr/>
+          <p:nvPr/>
+        </p:nvSpPr>
+        <p:spPr>
+          <a:xfrm>
+            <a:off x="6492240" y="3547872"/>
+            <a:ext cx="2423160" cy="685800"/>
           </a:xfrm>
           <a:prstGeom prst="rect">
             <a:avLst/>
@@ -1894,7 +1871,7 @@
               <a:buNone/>
             </a:pPr>
             <a:r>
-              <a:rPr lang="en-US" sz="4000" b="1" dirty="0">
+              <a:rPr lang="en-US" sz="4200" b="1" dirty="0">
                 <a:solidFill>
                   <a:srgbClr val="F97316"/>
                 </a:solidFill>
@@ -1904,20 +1881,20 @@
               </a:rPr>
               <a:t>34%</a:t>
             </a:r>
-            <a:endParaRPr lang="en-US" sz="4000" dirty="0"/>
-          </a:p>
-        </p:txBody>
-      </p:sp>
-      <p:sp>
-        <p:nvSpPr>
-          <p:cNvPr id="16" name="Text 14"/>
-          <p:cNvSpPr/>
-          <p:nvPr/>
-        </p:nvSpPr>
-        <p:spPr>
-          <a:xfrm>
-            <a:off x="6217920" y="5989320"/>
-            <a:ext cx="2560320" cy="457200"/>
+            <a:endParaRPr lang="en-US" sz="4200" dirty="0"/>
+          </a:p>
+        </p:txBody>
+      </p:sp>
+      <p:sp>
+        <p:nvSpPr>
+          <p:cNvPr id="15" name="Text 13"/>
+          <p:cNvSpPr/>
+          <p:nvPr/>
+        </p:nvSpPr>
+        <p:spPr>
+          <a:xfrm>
+            <a:off x="6492240" y="4224528"/>
+            <a:ext cx="2423160" cy="502920"/>
           </a:xfrm>
           <a:prstGeom prst="rect">
             <a:avLst/>
@@ -1933,7 +1910,7 @@
               <a:buNone/>
             </a:pPr>
             <a:r>
-              <a:rPr lang="en-US" sz="900" dirty="0">
+              <a:rPr lang="en-US" sz="850" dirty="0">
                 <a:solidFill>
                   <a:srgbClr val="7090A0"/>
                 </a:solidFill>
@@ -1941,9 +1918,26 @@
                 <a:ea typeface="Arial" pitchFamily="34" charset="-122"/>
                 <a:cs typeface="Arial" pitchFamily="34" charset="-120"/>
               </a:rPr>
-              <a:t>of subscribers on the wrong plan</a:t>
-            </a:r>
-            <a:endParaRPr lang="en-US" sz="900" dirty="0"/>
+              <a:t>of subscribers on the</a:t>
+            </a:r>
+            <a:endParaRPr lang="en-US" sz="850" dirty="0"/>
+          </a:p>
+          <a:p>
+            <a:pPr algn="ctr" indent="0" marL="0">
+              <a:buNone/>
+            </a:pPr>
+            <a:r>
+              <a:rPr lang="en-US" sz="850" dirty="0">
+                <a:solidFill>
+                  <a:srgbClr val="7090A0"/>
+                </a:solidFill>
+                <a:latin typeface="Arial" pitchFamily="34" charset="0"/>
+                <a:ea typeface="Arial" pitchFamily="34" charset="-122"/>
+                <a:cs typeface="Arial" pitchFamily="34" charset="-120"/>
+              </a:rPr>
+              <a:t>wrong plan</a:t>
+            </a:r>
+            <a:endParaRPr lang="en-US" sz="850" dirty="0"/>
           </a:p>
         </p:txBody>
       </p:sp>
@@ -1987,31 +1981,31 @@
         </p:nvSpPr>
         <p:spPr>
           <a:xfrm>
-            <a:off x="457200" y="320040"/>
-            <a:ext cx="8229600" cy="228600"/>
-          </a:xfrm>
-          <a:prstGeom prst="rect">
-            <a:avLst/>
-          </a:prstGeom>
-          <a:noFill/>
-          <a:ln/>
-        </p:spPr>
-        <p:txBody>
-          <a:bodyPr wrap="square" rtlCol="0" anchor="ctr"/>
-          <a:lstStyle/>
-          <a:p>
-            <a:pPr indent="0" marL="0">
-              <a:buNone/>
-            </a:pPr>
-            <a:r>
-              <a:rPr lang="en-US" sz="900" b="1" dirty="0">
+            <a:off x="457200" y="201168"/>
+            <a:ext cx="8229600" cy="201168"/>
+          </a:xfrm>
+          <a:prstGeom prst="rect">
+            <a:avLst/>
+          </a:prstGeom>
+          <a:noFill/>
+          <a:ln/>
+        </p:spPr>
+        <p:txBody>
+          <a:bodyPr wrap="square" rtlCol="0" anchor="ctr"/>
+          <a:lstStyle/>
+          <a:p>
+            <a:pPr indent="0" marL="0">
+              <a:buNone/>
+            </a:pPr>
+            <a:r>
+              <a:rPr lang="en-US" sz="800" b="1" dirty="0">
                 <a:solidFill>
                   <a:srgbClr val="00C6FF"/>
                 </a:solidFill>
               </a:rPr>
               <a:t>THE PROBLEM</a:t>
             </a:r>
-            <a:endParaRPr lang="en-US" sz="900" dirty="0"/>
+            <a:endParaRPr lang="en-US" sz="800" dirty="0"/>
           </a:p>
         </p:txBody>
       </p:sp>
@@ -2023,24 +2017,24 @@
         </p:nvSpPr>
         <p:spPr>
           <a:xfrm>
-            <a:off x="457200" y="594360"/>
-            <a:ext cx="8229600" cy="640080"/>
-          </a:xfrm>
-          <a:prstGeom prst="rect">
-            <a:avLst/>
-          </a:prstGeom>
-          <a:noFill/>
-          <a:ln/>
-        </p:spPr>
-        <p:txBody>
-          <a:bodyPr wrap="square" rtlCol="0" anchor="ctr"/>
-          <a:lstStyle/>
-          <a:p>
-            <a:pPr indent="0" marL="0">
-              <a:buNone/>
-            </a:pPr>
-            <a:r>
-              <a:rPr lang="en-US" sz="2800" b="1" dirty="0">
+            <a:off x="457200" y="420624"/>
+            <a:ext cx="8229600" cy="493776"/>
+          </a:xfrm>
+          <a:prstGeom prst="rect">
+            <a:avLst/>
+          </a:prstGeom>
+          <a:noFill/>
+          <a:ln/>
+        </p:spPr>
+        <p:txBody>
+          <a:bodyPr wrap="square" rtlCol="0" anchor="ctr"/>
+          <a:lstStyle/>
+          <a:p>
+            <a:pPr indent="0" marL="0">
+              <a:buNone/>
+            </a:pPr>
+            <a:r>
+              <a:rPr lang="en-US" sz="2200" b="1" dirty="0">
                 <a:solidFill>
                   <a:srgbClr val="FFFFFF"/>
                 </a:solidFill>
@@ -2050,7 +2044,7 @@
               </a:rPr>
               <a:t>One-Size Plans Drive Churn Before You Can See It Coming</a:t>
             </a:r>
-            <a:endParaRPr lang="en-US" sz="2800" dirty="0"/>
+            <a:endParaRPr lang="en-US" sz="2200" dirty="0"/>
           </a:p>
         </p:txBody>
       </p:sp>
@@ -2062,12 +2056,12 @@
         </p:nvSpPr>
         <p:spPr>
           <a:xfrm>
-            <a:off x="457200" y="1463040"/>
-            <a:ext cx="2651760" cy="3108960"/>
+            <a:off x="457200" y="1051560"/>
+            <a:ext cx="2651760" cy="2560320"/>
           </a:xfrm>
           <a:prstGeom prst="roundRect">
             <a:avLst>
-              <a:gd name="adj" fmla="val 4138"/>
+              <a:gd name="adj" fmla="val 4286"/>
             </a:avLst>
           </a:prstGeom>
           <a:solidFill>
@@ -2091,8 +2085,8 @@
         </p:nvSpPr>
         <p:spPr>
           <a:xfrm>
-            <a:off x="457200" y="1600200"/>
-            <a:ext cx="2651760" cy="457200"/>
+            <a:off x="457200" y="1170432"/>
+            <a:ext cx="2651760" cy="384048"/>
           </a:xfrm>
           <a:prstGeom prst="rect">
             <a:avLst/>
@@ -2108,14 +2102,14 @@
               <a:buNone/>
             </a:pPr>
             <a:r>
-              <a:rPr lang="en-US" sz="2400" dirty="0">
+              <a:rPr lang="en-US" sz="2000" dirty="0">
                 <a:solidFill>
                   <a:srgbClr val="000000"/>
                 </a:solidFill>
               </a:rPr>
               <a:t>📊</a:t>
             </a:r>
-            <a:endParaRPr lang="en-US" sz="2400" dirty="0"/>
+            <a:endParaRPr lang="en-US" sz="2000" dirty="0"/>
           </a:p>
         </p:txBody>
       </p:sp>
@@ -2127,8 +2121,8 @@
         </p:nvSpPr>
         <p:spPr>
           <a:xfrm>
-            <a:off x="457200" y="2148840"/>
-            <a:ext cx="2651760" cy="731520"/>
+            <a:off x="457200" y="1572768"/>
+            <a:ext cx="2651760" cy="621792"/>
           </a:xfrm>
           <a:prstGeom prst="rect">
             <a:avLst/>
@@ -2144,7 +2138,7 @@
               <a:buNone/>
             </a:pPr>
             <a:r>
-              <a:rPr lang="en-US" sz="4400" b="1" dirty="0">
+              <a:rPr lang="en-US" sz="3800" b="1" dirty="0">
                 <a:solidFill>
                   <a:srgbClr val="00C6FF"/>
                 </a:solidFill>
@@ -2154,7 +2148,7 @@
               </a:rPr>
               <a:t>34%</a:t>
             </a:r>
-            <a:endParaRPr lang="en-US" sz="4400" dirty="0"/>
+            <a:endParaRPr lang="en-US" sz="3800" dirty="0"/>
           </a:p>
         </p:txBody>
       </p:sp>
@@ -2166,8 +2160,8 @@
         </p:nvSpPr>
         <p:spPr>
           <a:xfrm>
-            <a:off x="457200" y="2880360"/>
-            <a:ext cx="2651760" cy="320040"/>
+            <a:off x="457200" y="2194560"/>
+            <a:ext cx="2651760" cy="274320"/>
           </a:xfrm>
           <a:prstGeom prst="rect">
             <a:avLst/>
@@ -2183,7 +2177,7 @@
               <a:buNone/>
             </a:pPr>
             <a:r>
-              <a:rPr lang="en-US" sz="1200" b="1" dirty="0">
+              <a:rPr lang="en-US" sz="1100" b="1" dirty="0">
                 <a:solidFill>
                   <a:srgbClr val="FFFFFF"/>
                 </a:solidFill>
@@ -2193,7 +2187,7 @@
               </a:rPr>
               <a:t>Plan Mismatch Rate</a:t>
             </a:r>
-            <a:endParaRPr lang="en-US" sz="1200" dirty="0"/>
+            <a:endParaRPr lang="en-US" sz="1100" dirty="0"/>
           </a:p>
         </p:txBody>
       </p:sp>
@@ -2205,8 +2199,8 @@
         </p:nvSpPr>
         <p:spPr>
           <a:xfrm>
-            <a:off x="594360" y="3246120"/>
-            <a:ext cx="2377440" cy="822960"/>
+            <a:off x="594360" y="2487168"/>
+            <a:ext cx="2377440" cy="640080"/>
           </a:xfrm>
           <a:prstGeom prst="rect">
             <a:avLst/>
@@ -2222,7 +2216,7 @@
               <a:buNone/>
             </a:pPr>
             <a:r>
-              <a:rPr lang="en-US" sz="950" dirty="0">
+              <a:rPr lang="en-US" sz="850" dirty="0">
                 <a:solidFill>
                   <a:srgbClr val="7090A0"/>
                 </a:solidFill>
@@ -2232,7 +2226,7 @@
               </a:rPr>
               <a:t>Subscribers on the wrong plan in mature digital telco markets</a:t>
             </a:r>
-            <a:endParaRPr lang="en-US" sz="950" dirty="0"/>
+            <a:endParaRPr lang="en-US" sz="850" dirty="0"/>
           </a:p>
         </p:txBody>
       </p:sp>
@@ -2244,12 +2238,12 @@
         </p:nvSpPr>
         <p:spPr>
           <a:xfrm>
-            <a:off x="3291840" y="1463040"/>
-            <a:ext cx="2651760" cy="3108960"/>
+            <a:off x="3291840" y="1051560"/>
+            <a:ext cx="2651760" cy="2560320"/>
           </a:xfrm>
           <a:prstGeom prst="roundRect">
             <a:avLst>
-              <a:gd name="adj" fmla="val 4138"/>
+              <a:gd name="adj" fmla="val 4286"/>
             </a:avLst>
           </a:prstGeom>
           <a:solidFill>
@@ -2273,8 +2267,8 @@
         </p:nvSpPr>
         <p:spPr>
           <a:xfrm>
-            <a:off x="3291840" y="1600200"/>
-            <a:ext cx="2651760" cy="457200"/>
+            <a:off x="3291840" y="1170432"/>
+            <a:ext cx="2651760" cy="384048"/>
           </a:xfrm>
           <a:prstGeom prst="rect">
             <a:avLst/>
@@ -2290,14 +2284,14 @@
               <a:buNone/>
             </a:pPr>
             <a:r>
-              <a:rPr lang="en-US" sz="2400" dirty="0">
+              <a:rPr lang="en-US" sz="2000" dirty="0">
                 <a:solidFill>
                   <a:srgbClr val="000000"/>
                 </a:solidFill>
               </a:rPr>
               <a:t>📉</a:t>
             </a:r>
-            <a:endParaRPr lang="en-US" sz="2400" dirty="0"/>
+            <a:endParaRPr lang="en-US" sz="2000" dirty="0"/>
           </a:p>
         </p:txBody>
       </p:sp>
@@ -2309,8 +2303,8 @@
         </p:nvSpPr>
         <p:spPr>
           <a:xfrm>
-            <a:off x="3291840" y="2148840"/>
-            <a:ext cx="2651760" cy="731520"/>
+            <a:off x="3291840" y="1572768"/>
+            <a:ext cx="2651760" cy="621792"/>
           </a:xfrm>
           <a:prstGeom prst="rect">
             <a:avLst/>
@@ -2326,7 +2320,7 @@
               <a:buNone/>
             </a:pPr>
             <a:r>
-              <a:rPr lang="en-US" sz="4400" b="1" dirty="0">
+              <a:rPr lang="en-US" sz="3800" b="1" dirty="0">
                 <a:solidFill>
                   <a:srgbClr val="00C6FF"/>
                 </a:solidFill>
@@ -2336,7 +2330,7 @@
               </a:rPr>
               <a:t>3.2×</a:t>
             </a:r>
-            <a:endParaRPr lang="en-US" sz="4400" dirty="0"/>
+            <a:endParaRPr lang="en-US" sz="3800" dirty="0"/>
           </a:p>
         </p:txBody>
       </p:sp>
@@ -2348,8 +2342,8 @@
         </p:nvSpPr>
         <p:spPr>
           <a:xfrm>
-            <a:off x="3291840" y="2880360"/>
-            <a:ext cx="2651760" cy="320040"/>
+            <a:off x="3291840" y="2194560"/>
+            <a:ext cx="2651760" cy="274320"/>
           </a:xfrm>
           <a:prstGeom prst="rect">
             <a:avLst/>
@@ -2365,7 +2359,7 @@
               <a:buNone/>
             </a:pPr>
             <a:r>
-              <a:rPr lang="en-US" sz="1200" b="1" dirty="0">
+              <a:rPr lang="en-US" sz="1100" b="1" dirty="0">
                 <a:solidFill>
                   <a:srgbClr val="FFFFFF"/>
                 </a:solidFill>
@@ -2375,7 +2369,7 @@
               </a:rPr>
               <a:t>Higher Churn Risk</a:t>
             </a:r>
-            <a:endParaRPr lang="en-US" sz="1200" dirty="0"/>
+            <a:endParaRPr lang="en-US" sz="1100" dirty="0"/>
           </a:p>
         </p:txBody>
       </p:sp>
@@ -2387,8 +2381,8 @@
         </p:nvSpPr>
         <p:spPr>
           <a:xfrm>
-            <a:off x="3429000" y="3246120"/>
-            <a:ext cx="2377440" cy="822960"/>
+            <a:off x="3429000" y="2487168"/>
+            <a:ext cx="2377440" cy="640080"/>
           </a:xfrm>
           <a:prstGeom prst="rect">
             <a:avLst/>
@@ -2404,7 +2398,7 @@
               <a:buNone/>
             </a:pPr>
             <a:r>
-              <a:rPr lang="en-US" sz="950" dirty="0">
+              <a:rPr lang="en-US" sz="850" dirty="0">
                 <a:solidFill>
                   <a:srgbClr val="7090A0"/>
                 </a:solidFill>
@@ -2414,7 +2408,7 @@
               </a:rPr>
               <a:t>Mismatched users churn at 3.2× the rate of plan-fit subscribers</a:t>
             </a:r>
-            <a:endParaRPr lang="en-US" sz="950" dirty="0"/>
+            <a:endParaRPr lang="en-US" sz="850" dirty="0"/>
           </a:p>
         </p:txBody>
       </p:sp>
@@ -2426,12 +2420,12 @@
         </p:nvSpPr>
         <p:spPr>
           <a:xfrm>
-            <a:off x="6126480" y="1463040"/>
-            <a:ext cx="2651760" cy="3108960"/>
+            <a:off x="6126480" y="1051560"/>
+            <a:ext cx="2651760" cy="2560320"/>
           </a:xfrm>
           <a:prstGeom prst="roundRect">
             <a:avLst>
-              <a:gd name="adj" fmla="val 4138"/>
+              <a:gd name="adj" fmla="val 4286"/>
             </a:avLst>
           </a:prstGeom>
           <a:solidFill>
@@ -2455,8 +2449,8 @@
         </p:nvSpPr>
         <p:spPr>
           <a:xfrm>
-            <a:off x="6126480" y="1600200"/>
-            <a:ext cx="2651760" cy="457200"/>
+            <a:off x="6126480" y="1170432"/>
+            <a:ext cx="2651760" cy="384048"/>
           </a:xfrm>
           <a:prstGeom prst="rect">
             <a:avLst/>
@@ -2472,14 +2466,14 @@
               <a:buNone/>
             </a:pPr>
             <a:r>
-              <a:rPr lang="en-US" sz="2400" dirty="0">
+              <a:rPr lang="en-US" sz="2000" dirty="0">
                 <a:solidFill>
                   <a:srgbClr val="000000"/>
                 </a:solidFill>
               </a:rPr>
               <a:t>💸</a:t>
             </a:r>
-            <a:endParaRPr lang="en-US" sz="2400" dirty="0"/>
+            <a:endParaRPr lang="en-US" sz="2000" dirty="0"/>
           </a:p>
         </p:txBody>
       </p:sp>
@@ -2491,8 +2485,8 @@
         </p:nvSpPr>
         <p:spPr>
           <a:xfrm>
-            <a:off x="6126480" y="2148840"/>
-            <a:ext cx="2651760" cy="731520"/>
+            <a:off x="6126480" y="1572768"/>
+            <a:ext cx="2651760" cy="621792"/>
           </a:xfrm>
           <a:prstGeom prst="rect">
             <a:avLst/>
@@ -2508,7 +2502,7 @@
               <a:buNone/>
             </a:pPr>
             <a:r>
-              <a:rPr lang="en-US" sz="4400" b="1" dirty="0">
+              <a:rPr lang="en-US" sz="3800" b="1" dirty="0">
                 <a:solidFill>
                   <a:srgbClr val="00C6FF"/>
                 </a:solidFill>
@@ -2518,7 +2512,7 @@
               </a:rPr>
               <a:t>28%</a:t>
             </a:r>
-            <a:endParaRPr lang="en-US" sz="4400" dirty="0"/>
+            <a:endParaRPr lang="en-US" sz="3800" dirty="0"/>
           </a:p>
         </p:txBody>
       </p:sp>
@@ -2530,8 +2524,8 @@
         </p:nvSpPr>
         <p:spPr>
           <a:xfrm>
-            <a:off x="6126480" y="2880360"/>
-            <a:ext cx="2651760" cy="320040"/>
+            <a:off x="6126480" y="2194560"/>
+            <a:ext cx="2651760" cy="274320"/>
           </a:xfrm>
           <a:prstGeom prst="rect">
             <a:avLst/>
@@ -2547,7 +2541,7 @@
               <a:buNone/>
             </a:pPr>
             <a:r>
-              <a:rPr lang="en-US" sz="1200" b="1" dirty="0">
+              <a:rPr lang="en-US" sz="1100" b="1" dirty="0">
                 <a:solidFill>
                   <a:srgbClr val="FFFFFF"/>
                 </a:solidFill>
@@ -2557,7 +2551,7 @@
               </a:rPr>
               <a:t>Preventable Churn</a:t>
             </a:r>
-            <a:endParaRPr lang="en-US" sz="1200" dirty="0"/>
+            <a:endParaRPr lang="en-US" sz="1100" dirty="0"/>
           </a:p>
         </p:txBody>
       </p:sp>
@@ -2569,8 +2563,8 @@
         </p:nvSpPr>
         <p:spPr>
           <a:xfrm>
-            <a:off x="6263640" y="3246120"/>
-            <a:ext cx="2377440" cy="822960"/>
+            <a:off x="6263640" y="2487168"/>
+            <a:ext cx="2377440" cy="640080"/>
           </a:xfrm>
           <a:prstGeom prst="rect">
             <a:avLst/>
@@ -2586,7 +2580,7 @@
               <a:buNone/>
             </a:pPr>
             <a:r>
-              <a:rPr lang="en-US" sz="950" dirty="0">
+              <a:rPr lang="en-US" sz="850" dirty="0">
                 <a:solidFill>
                   <a:srgbClr val="7090A0"/>
                 </a:solidFill>
@@ -2596,7 +2590,7 @@
               </a:rPr>
               <a:t>Of all churn is addressable with right-fit plan detection at the right moment</a:t>
             </a:r>
-            <a:endParaRPr lang="en-US" sz="950" dirty="0"/>
+            <a:endParaRPr lang="en-US" sz="850" dirty="0"/>
           </a:p>
         </p:txBody>
       </p:sp>
@@ -2608,12 +2602,12 @@
         </p:nvSpPr>
         <p:spPr>
           <a:xfrm>
-            <a:off x="457200" y="4800600"/>
-            <a:ext cx="8229600" cy="868680"/>
+            <a:off x="457200" y="3840480"/>
+            <a:ext cx="8229600" cy="749808"/>
           </a:xfrm>
           <a:prstGeom prst="roundRect">
             <a:avLst>
-              <a:gd name="adj" fmla="val 8421"/>
+              <a:gd name="adj" fmla="val 9756"/>
             </a:avLst>
           </a:prstGeom>
           <a:solidFill>
@@ -2637,24 +2631,24 @@
         </p:nvSpPr>
         <p:spPr>
           <a:xfrm>
-            <a:off x="640080" y="4846320"/>
-            <a:ext cx="7863840" cy="777240"/>
-          </a:xfrm>
-          <a:prstGeom prst="rect">
-            <a:avLst/>
-          </a:prstGeom>
-          <a:noFill/>
-          <a:ln/>
-        </p:spPr>
-        <p:txBody>
-          <a:bodyPr wrap="square" rtlCol="0" anchor="ctr"/>
-          <a:lstStyle/>
-          <a:p>
-            <a:pPr indent="0" marL="0">
-              <a:buNone/>
-            </a:pPr>
-            <a:r>
-              <a:rPr lang="en-US" sz="1000" i="1" dirty="0">
+            <a:off x="640080" y="3877056"/>
+            <a:ext cx="7863840" cy="676656"/>
+          </a:xfrm>
+          <a:prstGeom prst="rect">
+            <a:avLst/>
+          </a:prstGeom>
+          <a:noFill/>
+          <a:ln/>
+        </p:spPr>
+        <p:txBody>
+          <a:bodyPr wrap="square" rtlCol="0" anchor="ctr"/>
+          <a:lstStyle/>
+          <a:p>
+            <a:pPr indent="0" marL="0">
+              <a:buNone/>
+            </a:pPr>
+            <a:r>
+              <a:rPr lang="en-US" sz="950" i="1" dirty="0">
                 <a:solidFill>
                   <a:srgbClr val="90B0C0"/>
                 </a:solidFill>
@@ -2662,9 +2656,9 @@
                 <a:ea typeface="Arial" pitchFamily="34" charset="-122"/>
                 <a:cs typeface="Arial" pitchFamily="34" charset="-120"/>
               </a:rPr>
-              <a:t>Root cause: Static plan portfolios treat all subscribers identically. Without usage-based intelligence, mismatched subscribers silently churn — and winback costs 5× more than prevention.</a:t>
-            </a:r>
-            <a:endParaRPr lang="en-US" sz="1000" dirty="0"/>
+              <a:t>Root cause: Static plan portfolios treat all subscribers identically. Without usage intelligence, mismatched subscribers silently churn — and winback costs 5× more than prevention.</a:t>
+            </a:r>
+            <a:endParaRPr lang="en-US" sz="950" dirty="0"/>
           </a:p>
         </p:txBody>
       </p:sp>
@@ -2708,31 +2702,31 @@
         </p:nvSpPr>
         <p:spPr>
           <a:xfrm>
-            <a:off x="457200" y="320040"/>
-            <a:ext cx="8229600" cy="228600"/>
-          </a:xfrm>
-          <a:prstGeom prst="rect">
-            <a:avLst/>
-          </a:prstGeom>
-          <a:noFill/>
-          <a:ln/>
-        </p:spPr>
-        <p:txBody>
-          <a:bodyPr wrap="square" rtlCol="0" anchor="ctr"/>
-          <a:lstStyle/>
-          <a:p>
-            <a:pPr indent="0" marL="0">
-              <a:buNone/>
-            </a:pPr>
-            <a:r>
-              <a:rPr lang="en-US" sz="900" b="1" dirty="0">
+            <a:off x="457200" y="201168"/>
+            <a:ext cx="8229600" cy="201168"/>
+          </a:xfrm>
+          <a:prstGeom prst="rect">
+            <a:avLst/>
+          </a:prstGeom>
+          <a:noFill/>
+          <a:ln/>
+        </p:spPr>
+        <p:txBody>
+          <a:bodyPr wrap="square" rtlCol="0" anchor="ctr"/>
+          <a:lstStyle/>
+          <a:p>
+            <a:pPr indent="0" marL="0">
+              <a:buNone/>
+            </a:pPr>
+            <a:r>
+              <a:rPr lang="en-US" sz="800" b="1" dirty="0">
                 <a:solidFill>
                   <a:srgbClr val="3B82F6"/>
                 </a:solidFill>
               </a:rPr>
               <a:t>THE INSIGHT</a:t>
             </a:r>
-            <a:endParaRPr lang="en-US" sz="900" dirty="0"/>
+            <a:endParaRPr lang="en-US" sz="800" dirty="0"/>
           </a:p>
         </p:txBody>
       </p:sp>
@@ -2744,24 +2738,24 @@
         </p:nvSpPr>
         <p:spPr>
           <a:xfrm>
-            <a:off x="457200" y="594360"/>
-            <a:ext cx="8229600" cy="594360"/>
-          </a:xfrm>
-          <a:prstGeom prst="rect">
-            <a:avLst/>
-          </a:prstGeom>
-          <a:noFill/>
-          <a:ln/>
-        </p:spPr>
-        <p:txBody>
-          <a:bodyPr wrap="square" rtlCol="0" anchor="ctr"/>
-          <a:lstStyle/>
-          <a:p>
-            <a:pPr indent="0" marL="0">
-              <a:buNone/>
-            </a:pPr>
-            <a:r>
-              <a:rPr lang="en-US" sz="2600" b="1" dirty="0">
+            <a:off x="457200" y="420624"/>
+            <a:ext cx="8229600" cy="475488"/>
+          </a:xfrm>
+          <a:prstGeom prst="rect">
+            <a:avLst/>
+          </a:prstGeom>
+          <a:noFill/>
+          <a:ln/>
+        </p:spPr>
+        <p:txBody>
+          <a:bodyPr wrap="square" rtlCol="0" anchor="ctr"/>
+          <a:lstStyle/>
+          <a:p>
+            <a:pPr indent="0" marL="0">
+              <a:buNone/>
+            </a:pPr>
+            <a:r>
+              <a:rPr lang="en-US" sz="2200" b="1" dirty="0">
                 <a:solidFill>
                   <a:srgbClr val="060D1A"/>
                 </a:solidFill>
@@ -2771,7 +2765,7 @@
               </a:rPr>
               <a:t>Churn Isn't a Price Problem — It's a Plan Fit Problem</a:t>
             </a:r>
-            <a:endParaRPr lang="en-US" sz="2600" dirty="0"/>
+            <a:endParaRPr lang="en-US" sz="2200" dirty="0"/>
           </a:p>
         </p:txBody>
       </p:sp>
@@ -2783,12 +2777,12 @@
         </p:nvSpPr>
         <p:spPr>
           <a:xfrm>
-            <a:off x="457200" y="1417320"/>
-            <a:ext cx="3657600" cy="3291840"/>
+            <a:off x="457200" y="1005840"/>
+            <a:ext cx="3657600" cy="2743200"/>
           </a:xfrm>
           <a:prstGeom prst="roundRect">
             <a:avLst>
-              <a:gd name="adj" fmla="val 2778"/>
+              <a:gd name="adj" fmla="val 3333"/>
             </a:avLst>
           </a:prstGeom>
           <a:solidFill>
@@ -2810,24 +2804,24 @@
         </p:nvSpPr>
         <p:spPr>
           <a:xfrm>
-            <a:off x="548640" y="1554480"/>
-            <a:ext cx="3474720" cy="365760"/>
-          </a:xfrm>
-          <a:prstGeom prst="rect">
-            <a:avLst/>
-          </a:prstGeom>
-          <a:noFill/>
-          <a:ln/>
-        </p:spPr>
-        <p:txBody>
-          <a:bodyPr wrap="square" rtlCol="0" anchor="ctr"/>
-          <a:lstStyle/>
-          <a:p>
-            <a:pPr indent="0" marL="0">
-              <a:buNone/>
-            </a:pPr>
-            <a:r>
-              <a:rPr lang="en-US" sz="1300" b="1" dirty="0">
+            <a:off x="548640" y="1115568"/>
+            <a:ext cx="3474720" cy="310896"/>
+          </a:xfrm>
+          <a:prstGeom prst="rect">
+            <a:avLst/>
+          </a:prstGeom>
+          <a:noFill/>
+          <a:ln/>
+        </p:spPr>
+        <p:txBody>
+          <a:bodyPr wrap="square" rtlCol="0" anchor="ctr"/>
+          <a:lstStyle/>
+          <a:p>
+            <a:pPr indent="0" marL="0">
+              <a:buNone/>
+            </a:pPr>
+            <a:r>
+              <a:rPr lang="en-US" sz="1100" b="1" dirty="0">
                 <a:solidFill>
                   <a:srgbClr val="B91C1C"/>
                 </a:solidFill>
@@ -2837,7 +2831,7 @@
               </a:rPr>
               <a:t>❌  Static Plans (Current)</a:t>
             </a:r>
-            <a:endParaRPr lang="en-US" sz="1300" dirty="0"/>
+            <a:endParaRPr lang="en-US" sz="1100" dirty="0"/>
           </a:p>
         </p:txBody>
       </p:sp>
@@ -2849,24 +2843,24 @@
         </p:nvSpPr>
         <p:spPr>
           <a:xfrm>
-            <a:off x="640080" y="2057400"/>
-            <a:ext cx="3291840" cy="411480"/>
-          </a:xfrm>
-          <a:prstGeom prst="rect">
-            <a:avLst/>
-          </a:prstGeom>
-          <a:noFill/>
-          <a:ln/>
-        </p:spPr>
-        <p:txBody>
-          <a:bodyPr wrap="square" rtlCol="0" anchor="ctr"/>
-          <a:lstStyle/>
-          <a:p>
-            <a:pPr indent="0" marL="0">
-              <a:buNone/>
-            </a:pPr>
-            <a:r>
-              <a:rPr lang="en-US" sz="1000" dirty="0">
+            <a:off x="640080" y="1517904"/>
+            <a:ext cx="3291840" cy="347472"/>
+          </a:xfrm>
+          <a:prstGeom prst="rect">
+            <a:avLst/>
+          </a:prstGeom>
+          <a:noFill/>
+          <a:ln/>
+        </p:spPr>
+        <p:txBody>
+          <a:bodyPr wrap="square" rtlCol="0" anchor="ctr"/>
+          <a:lstStyle/>
+          <a:p>
+            <a:pPr indent="0" marL="0">
+              <a:buNone/>
+            </a:pPr>
+            <a:r>
+              <a:rPr lang="en-US" sz="900" dirty="0">
                 <a:solidFill>
                   <a:srgbClr val="7F1D1D"/>
                 </a:solidFill>
@@ -2874,9 +2868,9 @@
                 <a:ea typeface="Arial" pitchFamily="34" charset="-122"/>
                 <a:cs typeface="Arial" pitchFamily="34" charset="-120"/>
               </a:rPr>
-              <a:t>• Same plan options for all users regardless of usage</a:t>
-            </a:r>
-            <a:endParaRPr lang="en-US" sz="1000" dirty="0"/>
+              <a:t>• Same plan options for all subscribers — no usage intelligence</a:t>
+            </a:r>
+            <a:endParaRPr lang="en-US" sz="900" dirty="0"/>
           </a:p>
         </p:txBody>
       </p:sp>
@@ -2888,24 +2882,24 @@
         </p:nvSpPr>
         <p:spPr>
           <a:xfrm>
-            <a:off x="640080" y="2532888"/>
-            <a:ext cx="3291840" cy="411480"/>
-          </a:xfrm>
-          <a:prstGeom prst="rect">
-            <a:avLst/>
-          </a:prstGeom>
-          <a:noFill/>
-          <a:ln/>
-        </p:spPr>
-        <p:txBody>
-          <a:bodyPr wrap="square" rtlCol="0" anchor="ctr"/>
-          <a:lstStyle/>
-          <a:p>
-            <a:pPr indent="0" marL="0">
-              <a:buNone/>
-            </a:pPr>
-            <a:r>
-              <a:rPr lang="en-US" sz="1000" dirty="0">
+            <a:off x="640080" y="1920240"/>
+            <a:ext cx="3291840" cy="347472"/>
+          </a:xfrm>
+          <a:prstGeom prst="rect">
+            <a:avLst/>
+          </a:prstGeom>
+          <a:noFill/>
+          <a:ln/>
+        </p:spPr>
+        <p:txBody>
+          <a:bodyPr wrap="square" rtlCol="0" anchor="ctr"/>
+          <a:lstStyle/>
+          <a:p>
+            <a:pPr indent="0" marL="0">
+              <a:buNone/>
+            </a:pPr>
+            <a:r>
+              <a:rPr lang="en-US" sz="900" dirty="0">
                 <a:solidFill>
                   <a:srgbClr val="7F1D1D"/>
                 </a:solidFill>
@@ -2913,9 +2907,9 @@
                 <a:ea typeface="Arial" pitchFamily="34" charset="-122"/>
                 <a:cs typeface="Arial" pitchFamily="34" charset="-120"/>
               </a:rPr>
-              <a:t>• No intelligence surfaced until bill shock or cancellation</a:t>
-            </a:r>
-            <a:endParaRPr lang="en-US" sz="1000" dirty="0"/>
+              <a:t>• No signal until bill shock or cancellation request arrives</a:t>
+            </a:r>
+            <a:endParaRPr lang="en-US" sz="900" dirty="0"/>
           </a:p>
         </p:txBody>
       </p:sp>
@@ -2927,24 +2921,24 @@
         </p:nvSpPr>
         <p:spPr>
           <a:xfrm>
-            <a:off x="640080" y="3008376"/>
-            <a:ext cx="3291840" cy="411480"/>
-          </a:xfrm>
-          <a:prstGeom prst="rect">
-            <a:avLst/>
-          </a:prstGeom>
-          <a:noFill/>
-          <a:ln/>
-        </p:spPr>
-        <p:txBody>
-          <a:bodyPr wrap="square" rtlCol="0" anchor="ctr"/>
-          <a:lstStyle/>
-          <a:p>
-            <a:pPr indent="0" marL="0">
-              <a:buNone/>
-            </a:pPr>
-            <a:r>
-              <a:rPr lang="en-US" sz="1000" dirty="0">
+            <a:off x="640080" y="2322576"/>
+            <a:ext cx="3291840" cy="347472"/>
+          </a:xfrm>
+          <a:prstGeom prst="rect">
+            <a:avLst/>
+          </a:prstGeom>
+          <a:noFill/>
+          <a:ln/>
+        </p:spPr>
+        <p:txBody>
+          <a:bodyPr wrap="square" rtlCol="0" anchor="ctr"/>
+          <a:lstStyle/>
+          <a:p>
+            <a:pPr indent="0" marL="0">
+              <a:buNone/>
+            </a:pPr>
+            <a:r>
+              <a:rPr lang="en-US" sz="900" dirty="0">
                 <a:solidFill>
                   <a:srgbClr val="7F1D1D"/>
                 </a:solidFill>
@@ -2952,9 +2946,9 @@
                 <a:ea typeface="Arial" pitchFamily="34" charset="-122"/>
                 <a:cs typeface="Arial" pitchFamily="34" charset="-120"/>
               </a:rPr>
-              <a:t>• Merchant pays 5× acquisition cost to win back churned user</a:t>
-            </a:r>
-            <a:endParaRPr lang="en-US" sz="1000" dirty="0"/>
+              <a:t>• Winback costs 5× more than proactive plan-fit intervention</a:t>
+            </a:r>
+            <a:endParaRPr lang="en-US" sz="900" dirty="0"/>
           </a:p>
         </p:txBody>
       </p:sp>
@@ -2966,24 +2960,24 @@
         </p:nvSpPr>
         <p:spPr>
           <a:xfrm>
-            <a:off x="640080" y="3483864"/>
-            <a:ext cx="3291840" cy="411480"/>
-          </a:xfrm>
-          <a:prstGeom prst="rect">
-            <a:avLst/>
-          </a:prstGeom>
-          <a:noFill/>
-          <a:ln/>
-        </p:spPr>
-        <p:txBody>
-          <a:bodyPr wrap="square" rtlCol="0" anchor="ctr"/>
-          <a:lstStyle/>
-          <a:p>
-            <a:pPr indent="0" marL="0">
-              <a:buNone/>
-            </a:pPr>
-            <a:r>
-              <a:rPr lang="en-US" sz="1000" dirty="0">
+            <a:off x="640080" y="2724912"/>
+            <a:ext cx="3291840" cy="347472"/>
+          </a:xfrm>
+          <a:prstGeom prst="rect">
+            <a:avLst/>
+          </a:prstGeom>
+          <a:noFill/>
+          <a:ln/>
+        </p:spPr>
+        <p:txBody>
+          <a:bodyPr wrap="square" rtlCol="0" anchor="ctr"/>
+          <a:lstStyle/>
+          <a:p>
+            <a:pPr indent="0" marL="0">
+              <a:buNone/>
+            </a:pPr>
+            <a:r>
+              <a:rPr lang="en-US" sz="900" dirty="0">
                 <a:solidFill>
                   <a:srgbClr val="7F1D1D"/>
                 </a:solidFill>
@@ -2991,9 +2985,9 @@
                 <a:ea typeface="Arial" pitchFamily="34" charset="-122"/>
                 <a:cs typeface="Arial" pitchFamily="34" charset="-120"/>
               </a:rPr>
-              <a:t>• ARPU stays flat — upsell requires manual outreach</a:t>
-            </a:r>
-            <a:endParaRPr lang="en-US" sz="1000" dirty="0"/>
+              <a:t>• ARPU stagnates — upsell requires expensive outbound campaigns</a:t>
+            </a:r>
+            <a:endParaRPr lang="en-US" sz="900" dirty="0"/>
           </a:p>
         </p:txBody>
       </p:sp>
@@ -3005,24 +2999,24 @@
         </p:nvSpPr>
         <p:spPr>
           <a:xfrm>
-            <a:off x="640080" y="3959352"/>
-            <a:ext cx="3291840" cy="411480"/>
-          </a:xfrm>
-          <a:prstGeom prst="rect">
-            <a:avLst/>
-          </a:prstGeom>
-          <a:noFill/>
-          <a:ln/>
-        </p:spPr>
-        <p:txBody>
-          <a:bodyPr wrap="square" rtlCol="0" anchor="ctr"/>
-          <a:lstStyle/>
-          <a:p>
-            <a:pPr indent="0" marL="0">
-              <a:buNone/>
-            </a:pPr>
-            <a:r>
-              <a:rPr lang="en-US" sz="1000" dirty="0">
+            <a:off x="640080" y="3127248"/>
+            <a:ext cx="3291840" cy="347472"/>
+          </a:xfrm>
+          <a:prstGeom prst="rect">
+            <a:avLst/>
+          </a:prstGeom>
+          <a:noFill/>
+          <a:ln/>
+        </p:spPr>
+        <p:txBody>
+          <a:bodyPr wrap="square" rtlCol="0" anchor="ctr"/>
+          <a:lstStyle/>
+          <a:p>
+            <a:pPr indent="0" marL="0">
+              <a:buNone/>
+            </a:pPr>
+            <a:r>
+              <a:rPr lang="en-US" sz="900" dirty="0">
                 <a:solidFill>
                   <a:srgbClr val="7F1D1D"/>
                 </a:solidFill>
@@ -3030,9 +3024,9 @@
                 <a:ea typeface="Arial" pitchFamily="34" charset="-122"/>
                 <a:cs typeface="Arial" pitchFamily="34" charset="-120"/>
               </a:rPr>
-              <a:t>• PM has no visibility into plan mismatch cohorts</a:t>
-            </a:r>
-            <a:endParaRPr lang="en-US" sz="1000" dirty="0"/>
+              <a:t>• PM has zero visibility into plan mismatch cohorts or churn risk</a:t>
+            </a:r>
+            <a:endParaRPr lang="en-US" sz="900" dirty="0"/>
           </a:p>
         </p:txBody>
       </p:sp>
@@ -3044,8 +3038,8 @@
         </p:nvSpPr>
         <p:spPr>
           <a:xfrm>
-            <a:off x="4005072" y="2651760"/>
-            <a:ext cx="493776" cy="493776"/>
+            <a:off x="4005072" y="2240280"/>
+            <a:ext cx="438912" cy="438912"/>
           </a:xfrm>
           <a:prstGeom prst="ellipse">
             <a:avLst/>
@@ -3069,8 +3063,8 @@
         </p:nvSpPr>
         <p:spPr>
           <a:xfrm>
-            <a:off x="4005072" y="2651760"/>
-            <a:ext cx="493776" cy="493776"/>
+            <a:off x="4005072" y="2240280"/>
+            <a:ext cx="438912" cy="438912"/>
           </a:xfrm>
           <a:prstGeom prst="rect">
             <a:avLst/>
@@ -3086,14 +3080,14 @@
               <a:buNone/>
             </a:pPr>
             <a:r>
-              <a:rPr lang="en-US" sz="900" b="1" dirty="0">
+              <a:rPr lang="en-US" sz="800" b="1" dirty="0">
                 <a:solidFill>
                   <a:srgbClr val="FFFFFF"/>
                 </a:solidFill>
               </a:rPr>
               <a:t>VS</a:t>
             </a:r>
-            <a:endParaRPr lang="en-US" sz="900" dirty="0"/>
+            <a:endParaRPr lang="en-US" sz="800" dirty="0"/>
           </a:p>
         </p:txBody>
       </p:sp>
@@ -3105,12 +3099,12 @@
         </p:nvSpPr>
         <p:spPr>
           <a:xfrm>
-            <a:off x="4389120" y="1417320"/>
-            <a:ext cx="4297680" cy="3291840"/>
+            <a:off x="4389120" y="1005840"/>
+            <a:ext cx="4297680" cy="2743200"/>
           </a:xfrm>
           <a:prstGeom prst="roundRect">
             <a:avLst>
-              <a:gd name="adj" fmla="val 2778"/>
+              <a:gd name="adj" fmla="val 3333"/>
             </a:avLst>
           </a:prstGeom>
           <a:solidFill>
@@ -3132,24 +3126,24 @@
         </p:nvSpPr>
         <p:spPr>
           <a:xfrm>
-            <a:off x="4480560" y="1554480"/>
-            <a:ext cx="4114800" cy="365760"/>
-          </a:xfrm>
-          <a:prstGeom prst="rect">
-            <a:avLst/>
-          </a:prstGeom>
-          <a:noFill/>
-          <a:ln/>
-        </p:spPr>
-        <p:txBody>
-          <a:bodyPr wrap="square" rtlCol="0" anchor="ctr"/>
-          <a:lstStyle/>
-          <a:p>
-            <a:pPr indent="0" marL="0">
-              <a:buNone/>
-            </a:pPr>
-            <a:r>
-              <a:rPr lang="en-US" sz="1300" b="1" dirty="0">
+            <a:off x="4480560" y="1115568"/>
+            <a:ext cx="4114800" cy="310896"/>
+          </a:xfrm>
+          <a:prstGeom prst="rect">
+            <a:avLst/>
+          </a:prstGeom>
+          <a:noFill/>
+          <a:ln/>
+        </p:spPr>
+        <p:txBody>
+          <a:bodyPr wrap="square" rtlCol="0" anchor="ctr"/>
+          <a:lstStyle/>
+          <a:p>
+            <a:pPr indent="0" marL="0">
+              <a:buNone/>
+            </a:pPr>
+            <a:r>
+              <a:rPr lang="en-US" sz="1100" b="1" dirty="0">
                 <a:solidFill>
                   <a:srgbClr val="0E7490"/>
                 </a:solidFill>
@@ -3159,7 +3153,7 @@
               </a:rPr>
               <a:t>✅  SmartPlan (Proposed)</a:t>
             </a:r>
-            <a:endParaRPr lang="en-US" sz="1300" dirty="0"/>
+            <a:endParaRPr lang="en-US" sz="1100" dirty="0"/>
           </a:p>
         </p:txBody>
       </p:sp>
@@ -3171,24 +3165,24 @@
         </p:nvSpPr>
         <p:spPr>
           <a:xfrm>
-            <a:off x="4572000" y="2057400"/>
-            <a:ext cx="3931920" cy="411480"/>
-          </a:xfrm>
-          <a:prstGeom prst="rect">
-            <a:avLst/>
-          </a:prstGeom>
-          <a:noFill/>
-          <a:ln/>
-        </p:spPr>
-        <p:txBody>
-          <a:bodyPr wrap="square" rtlCol="0" anchor="ctr"/>
-          <a:lstStyle/>
-          <a:p>
-            <a:pPr indent="0" marL="0">
-              <a:buNone/>
-            </a:pPr>
-            <a:r>
-              <a:rPr lang="en-US" sz="1000" dirty="0">
+            <a:off x="4572000" y="1517904"/>
+            <a:ext cx="3931920" cy="347472"/>
+          </a:xfrm>
+          <a:prstGeom prst="rect">
+            <a:avLst/>
+          </a:prstGeom>
+          <a:noFill/>
+          <a:ln/>
+        </p:spPr>
+        <p:txBody>
+          <a:bodyPr wrap="square" rtlCol="0" anchor="ctr"/>
+          <a:lstStyle/>
+          <a:p>
+            <a:pPr indent="0" marL="0">
+              <a:buNone/>
+            </a:pPr>
+            <a:r>
+              <a:rPr lang="en-US" sz="900" dirty="0">
                 <a:solidFill>
                   <a:srgbClr val="0C4A6E"/>
                 </a:solidFill>
@@ -3196,9 +3190,9 @@
                 <a:ea typeface="Arial" pitchFamily="34" charset="-122"/>
                 <a:cs typeface="Arial" pitchFamily="34" charset="-120"/>
               </a:rPr>
-              <a:t>• ML scores each subscriber's usage pattern across 90 days</a:t>
-            </a:r>
-            <a:endParaRPr lang="en-US" sz="1000" dirty="0"/>
+              <a:t>• ML scores each subscriber's 90-day usage across 4 dimensions</a:t>
+            </a:r>
+            <a:endParaRPr lang="en-US" sz="900" dirty="0"/>
           </a:p>
         </p:txBody>
       </p:sp>
@@ -3210,24 +3204,24 @@
         </p:nvSpPr>
         <p:spPr>
           <a:xfrm>
-            <a:off x="4572000" y="2532888"/>
-            <a:ext cx="3931920" cy="411480"/>
-          </a:xfrm>
-          <a:prstGeom prst="rect">
-            <a:avLst/>
-          </a:prstGeom>
-          <a:noFill/>
-          <a:ln/>
-        </p:spPr>
-        <p:txBody>
-          <a:bodyPr wrap="square" rtlCol="0" anchor="ctr"/>
-          <a:lstStyle/>
-          <a:p>
-            <a:pPr indent="0" marL="0">
-              <a:buNone/>
-            </a:pPr>
-            <a:r>
-              <a:rPr lang="en-US" sz="1000" dirty="0">
+            <a:off x="4572000" y="1920240"/>
+            <a:ext cx="3931920" cy="347472"/>
+          </a:xfrm>
+          <a:prstGeom prst="rect">
+            <a:avLst/>
+          </a:prstGeom>
+          <a:noFill/>
+          <a:ln/>
+        </p:spPr>
+        <p:txBody>
+          <a:bodyPr wrap="square" rtlCol="0" anchor="ctr"/>
+          <a:lstStyle/>
+          <a:p>
+            <a:pPr indent="0" marL="0">
+              <a:buNone/>
+            </a:pPr>
+            <a:r>
+              <a:rPr lang="en-US" sz="900" dirty="0">
                 <a:solidFill>
                   <a:srgbClr val="0C4A6E"/>
                 </a:solidFill>
@@ -3235,9 +3229,9 @@
                 <a:ea typeface="Arial" pitchFamily="34" charset="-122"/>
                 <a:cs typeface="Arial" pitchFamily="34" charset="-120"/>
               </a:rPr>
-              <a:t>• Plan Fit Score (0–100) surfaces at 80% data usage &amp; renewal</a:t>
-            </a:r>
-            <a:endParaRPr lang="en-US" sz="1000" dirty="0"/>
+              <a:t>• Plan Fit Score (0–100) surfaces at 80% data used and renewal</a:t>
+            </a:r>
+            <a:endParaRPr lang="en-US" sz="900" dirty="0"/>
           </a:p>
         </p:txBody>
       </p:sp>
@@ -3249,24 +3243,24 @@
         </p:nvSpPr>
         <p:spPr>
           <a:xfrm>
-            <a:off x="4572000" y="3008376"/>
-            <a:ext cx="3931920" cy="411480"/>
-          </a:xfrm>
-          <a:prstGeom prst="rect">
-            <a:avLst/>
-          </a:prstGeom>
-          <a:noFill/>
-          <a:ln/>
-        </p:spPr>
-        <p:txBody>
-          <a:bodyPr wrap="square" rtlCol="0" anchor="ctr"/>
-          <a:lstStyle/>
-          <a:p>
-            <a:pPr indent="0" marL="0">
-              <a:buNone/>
-            </a:pPr>
-            <a:r>
-              <a:rPr lang="en-US" sz="1000" dirty="0">
+            <a:off x="4572000" y="2322576"/>
+            <a:ext cx="3931920" cy="347472"/>
+          </a:xfrm>
+          <a:prstGeom prst="rect">
+            <a:avLst/>
+          </a:prstGeom>
+          <a:noFill/>
+          <a:ln/>
+        </p:spPr>
+        <p:txBody>
+          <a:bodyPr wrap="square" rtlCol="0" anchor="ctr"/>
+          <a:lstStyle/>
+          <a:p>
+            <a:pPr indent="0" marL="0">
+              <a:buNone/>
+            </a:pPr>
+            <a:r>
+              <a:rPr lang="en-US" sz="900" dirty="0">
                 <a:solidFill>
                   <a:srgbClr val="0C4A6E"/>
                 </a:solidFill>
@@ -3276,7 +3270,7 @@
               </a:rPr>
               <a:t>• Personalised recommendation with projected savings shown in-app</a:t>
             </a:r>
-            <a:endParaRPr lang="en-US" sz="1000" dirty="0"/>
+            <a:endParaRPr lang="en-US" sz="900" dirty="0"/>
           </a:p>
         </p:txBody>
       </p:sp>
@@ -3288,24 +3282,24 @@
         </p:nvSpPr>
         <p:spPr>
           <a:xfrm>
-            <a:off x="4572000" y="3483864"/>
-            <a:ext cx="3931920" cy="411480"/>
-          </a:xfrm>
-          <a:prstGeom prst="rect">
-            <a:avLst/>
-          </a:prstGeom>
-          <a:noFill/>
-          <a:ln/>
-        </p:spPr>
-        <p:txBody>
-          <a:bodyPr wrap="square" rtlCol="0" anchor="ctr"/>
-          <a:lstStyle/>
-          <a:p>
-            <a:pPr indent="0" marL="0">
-              <a:buNone/>
-            </a:pPr>
-            <a:r>
-              <a:rPr lang="en-US" sz="1000" dirty="0">
+            <a:off x="4572000" y="2724912"/>
+            <a:ext cx="3931920" cy="347472"/>
+          </a:xfrm>
+          <a:prstGeom prst="rect">
+            <a:avLst/>
+          </a:prstGeom>
+          <a:noFill/>
+          <a:ln/>
+        </p:spPr>
+        <p:txBody>
+          <a:bodyPr wrap="square" rtlCol="0" anchor="ctr"/>
+          <a:lstStyle/>
+          <a:p>
+            <a:pPr indent="0" marL="0">
+              <a:buNone/>
+            </a:pPr>
+            <a:r>
+              <a:rPr lang="en-US" sz="900" dirty="0">
                 <a:solidFill>
                   <a:srgbClr val="0C4A6E"/>
                 </a:solidFill>
@@ -3315,7 +3309,7 @@
               </a:rPr>
               <a:t>• Right-sized plan reduces churn risk 3.2× at zero winback cost</a:t>
             </a:r>
-            <a:endParaRPr lang="en-US" sz="1000" dirty="0"/>
+            <a:endParaRPr lang="en-US" sz="900" dirty="0"/>
           </a:p>
         </p:txBody>
       </p:sp>
@@ -3327,24 +3321,24 @@
         </p:nvSpPr>
         <p:spPr>
           <a:xfrm>
-            <a:off x="4572000" y="3959352"/>
-            <a:ext cx="3931920" cy="411480"/>
-          </a:xfrm>
-          <a:prstGeom prst="rect">
-            <a:avLst/>
-          </a:prstGeom>
-          <a:noFill/>
-          <a:ln/>
-        </p:spPr>
-        <p:txBody>
-          <a:bodyPr wrap="square" rtlCol="0" anchor="ctr"/>
-          <a:lstStyle/>
-          <a:p>
-            <a:pPr indent="0" marL="0">
-              <a:buNone/>
-            </a:pPr>
-            <a:r>
-              <a:rPr lang="en-US" sz="1000" dirty="0">
+            <a:off x="4572000" y="3127248"/>
+            <a:ext cx="3931920" cy="347472"/>
+          </a:xfrm>
+          <a:prstGeom prst="rect">
+            <a:avLst/>
+          </a:prstGeom>
+          <a:noFill/>
+          <a:ln/>
+        </p:spPr>
+        <p:txBody>
+          <a:bodyPr wrap="square" rtlCol="0" anchor="ctr"/>
+          <a:lstStyle/>
+          <a:p>
+            <a:pPr indent="0" marL="0">
+              <a:buNone/>
+            </a:pPr>
+            <a:r>
+              <a:rPr lang="en-US" sz="900" dirty="0">
                 <a:solidFill>
                   <a:srgbClr val="0C4A6E"/>
                 </a:solidFill>
@@ -3352,9 +3346,9 @@
                 <a:ea typeface="Arial" pitchFamily="34" charset="-122"/>
                 <a:cs typeface="Arial" pitchFamily="34" charset="-120"/>
               </a:rPr>
-              <a:t>• Ops dashboard exposes plan mismatch cohorts for PM team</a:t>
-            </a:r>
-            <a:endParaRPr lang="en-US" sz="1000" dirty="0"/>
+              <a:t>• Ops dashboard gives PM full cohort visibility and nudge control</a:t>
+            </a:r>
+            <a:endParaRPr lang="en-US" sz="900" dirty="0"/>
           </a:p>
         </p:txBody>
       </p:sp>
@@ -3366,12 +3360,12 @@
         </p:nvSpPr>
         <p:spPr>
           <a:xfrm>
-            <a:off x="457200" y="4846320"/>
-            <a:ext cx="8229600" cy="777240"/>
+            <a:off x="457200" y="3895344"/>
+            <a:ext cx="8229600" cy="713232"/>
           </a:xfrm>
           <a:prstGeom prst="roundRect">
             <a:avLst>
-              <a:gd name="adj" fmla="val 9412"/>
+              <a:gd name="adj" fmla="val 10256"/>
             </a:avLst>
           </a:prstGeom>
           <a:solidFill>
@@ -3395,24 +3389,24 @@
         </p:nvSpPr>
         <p:spPr>
           <a:xfrm>
-            <a:off x="640080" y="4892040"/>
-            <a:ext cx="7863840" cy="685800"/>
-          </a:xfrm>
-          <a:prstGeom prst="rect">
-            <a:avLst/>
-          </a:prstGeom>
-          <a:noFill/>
-          <a:ln/>
-        </p:spPr>
-        <p:txBody>
-          <a:bodyPr wrap="square" rtlCol="0" anchor="ctr"/>
-          <a:lstStyle/>
-          <a:p>
-            <a:pPr indent="0" marL="0">
-              <a:buNone/>
-            </a:pPr>
-            <a:r>
-              <a:rPr lang="en-US" sz="1000" i="1" dirty="0">
+            <a:off x="640080" y="3931920"/>
+            <a:ext cx="7863840" cy="640080"/>
+          </a:xfrm>
+          <a:prstGeom prst="rect">
+            <a:avLst/>
+          </a:prstGeom>
+          <a:noFill/>
+          <a:ln/>
+        </p:spPr>
+        <p:txBody>
+          <a:bodyPr wrap="square" rtlCol="0" anchor="ctr"/>
+          <a:lstStyle/>
+          <a:p>
+            <a:pPr indent="0" marL="0">
+              <a:buNone/>
+            </a:pPr>
+            <a:r>
+              <a:rPr lang="en-US" sz="950" i="1" dirty="0">
                 <a:solidFill>
                   <a:srgbClr val="0E4A6E"/>
                 </a:solidFill>
@@ -3420,9 +3414,9 @@
                 <a:ea typeface="Arial" pitchFamily="34" charset="-122"/>
                 <a:cs typeface="Arial" pitchFamily="34" charset="-120"/>
               </a:rPr>
-              <a:t>Key insight: The switch only triggers after the subscriber's own usage data validates the recommendation — zero pressure sales, maximum personalisation, subscriber keeps control.</a:t>
-            </a:r>
-            <a:endParaRPr lang="en-US" sz="1000" dirty="0"/>
+              <a:t>Key insight: The switch only triggers after the subscriber's own usage data validates the recommendation — zero pressure, maximum personalisation, subscriber stays in control.</a:t>
+            </a:r>
+            <a:endParaRPr lang="en-US" sz="950" dirty="0"/>
           </a:p>
         </p:txBody>
       </p:sp>
@@ -3466,31 +3460,31 @@
         </p:nvSpPr>
         <p:spPr>
           <a:xfrm>
-            <a:off x="457200" y="320040"/>
-            <a:ext cx="8229600" cy="228600"/>
-          </a:xfrm>
-          <a:prstGeom prst="rect">
-            <a:avLst/>
-          </a:prstGeom>
-          <a:noFill/>
-          <a:ln/>
-        </p:spPr>
-        <p:txBody>
-          <a:bodyPr wrap="square" rtlCol="0" anchor="ctr"/>
-          <a:lstStyle/>
-          <a:p>
-            <a:pPr indent="0" marL="0">
-              <a:buNone/>
-            </a:pPr>
-            <a:r>
-              <a:rPr lang="en-US" sz="900" b="1" dirty="0">
+            <a:off x="457200" y="201168"/>
+            <a:ext cx="8229600" cy="201168"/>
+          </a:xfrm>
+          <a:prstGeom prst="rect">
+            <a:avLst/>
+          </a:prstGeom>
+          <a:noFill/>
+          <a:ln/>
+        </p:spPr>
+        <p:txBody>
+          <a:bodyPr wrap="square" rtlCol="0" anchor="ctr"/>
+          <a:lstStyle/>
+          <a:p>
+            <a:pPr indent="0" marL="0">
+              <a:buNone/>
+            </a:pPr>
+            <a:r>
+              <a:rPr lang="en-US" sz="800" b="1" dirty="0">
                 <a:solidFill>
                   <a:srgbClr val="00C6FF"/>
                 </a:solidFill>
               </a:rPr>
               <a:t>THE MECHANIC</a:t>
             </a:r>
-            <a:endParaRPr lang="en-US" sz="900" dirty="0"/>
+            <a:endParaRPr lang="en-US" sz="800" dirty="0"/>
           </a:p>
         </p:txBody>
       </p:sp>
@@ -3502,24 +3496,24 @@
         </p:nvSpPr>
         <p:spPr>
           <a:xfrm>
-            <a:off x="457200" y="594360"/>
-            <a:ext cx="8229600" cy="502920"/>
-          </a:xfrm>
-          <a:prstGeom prst="rect">
-            <a:avLst/>
-          </a:prstGeom>
-          <a:noFill/>
-          <a:ln/>
-        </p:spPr>
-        <p:txBody>
-          <a:bodyPr wrap="square" rtlCol="0" anchor="ctr"/>
-          <a:lstStyle/>
-          <a:p>
-            <a:pPr indent="0" marL="0">
-              <a:buNone/>
-            </a:pPr>
-            <a:r>
-              <a:rPr lang="en-US" sz="2800" b="1" dirty="0">
+            <a:off x="457200" y="420624"/>
+            <a:ext cx="8229600" cy="475488"/>
+          </a:xfrm>
+          <a:prstGeom prst="rect">
+            <a:avLst/>
+          </a:prstGeom>
+          <a:noFill/>
+          <a:ln/>
+        </p:spPr>
+        <p:txBody>
+          <a:bodyPr wrap="square" rtlCol="0" anchor="ctr"/>
+          <a:lstStyle/>
+          <a:p>
+            <a:pPr indent="0" marL="0">
+              <a:buNone/>
+            </a:pPr>
+            <a:r>
+              <a:rPr lang="en-US" sz="2200" b="1" dirty="0">
                 <a:solidFill>
                   <a:srgbClr val="FFFFFF"/>
                 </a:solidFill>
@@ -3529,7 +3523,7 @@
               </a:rPr>
               <a:t>How SmartPlan Works: 5 Steps</a:t>
             </a:r>
-            <a:endParaRPr lang="en-US" sz="2800" dirty="0"/>
+            <a:endParaRPr lang="en-US" sz="2200" dirty="0"/>
           </a:p>
         </p:txBody>
       </p:sp>
@@ -3541,12 +3535,12 @@
         </p:nvSpPr>
         <p:spPr>
           <a:xfrm>
-            <a:off x="365760" y="1325880"/>
-            <a:ext cx="1600200" cy="3291840"/>
+            <a:off x="384048" y="1005840"/>
+            <a:ext cx="1591056" cy="2743200"/>
           </a:xfrm>
           <a:prstGeom prst="roundRect">
             <a:avLst>
-              <a:gd name="adj" fmla="val 5714"/>
+              <a:gd name="adj" fmla="val 5747"/>
             </a:avLst>
           </a:prstGeom>
           <a:solidFill>
@@ -3570,8 +3564,8 @@
         </p:nvSpPr>
         <p:spPr>
           <a:xfrm>
-            <a:off x="365760" y="1463040"/>
-            <a:ext cx="1600200" cy="502920"/>
+            <a:off x="384048" y="1097280"/>
+            <a:ext cx="1591056" cy="420624"/>
           </a:xfrm>
           <a:prstGeom prst="rect">
             <a:avLst/>
@@ -3587,7 +3581,7 @@
               <a:buNone/>
             </a:pPr>
             <a:r>
-              <a:rPr lang="en-US" sz="2800" b="1" dirty="0">
+              <a:rPr lang="en-US" sz="2400" b="1" dirty="0">
                 <a:solidFill>
                   <a:srgbClr val="00C6FF"/>
                 </a:solidFill>
@@ -3597,7 +3591,7 @@
               </a:rPr>
               <a:t>01</a:t>
             </a:r>
-            <a:endParaRPr lang="en-US" sz="2800" dirty="0"/>
+            <a:endParaRPr lang="en-US" sz="2400" dirty="0"/>
           </a:p>
         </p:txBody>
       </p:sp>
@@ -3609,8 +3603,8 @@
         </p:nvSpPr>
         <p:spPr>
           <a:xfrm>
-            <a:off x="457200" y="2057400"/>
-            <a:ext cx="1417320" cy="457200"/>
+            <a:off x="457200" y="1572768"/>
+            <a:ext cx="1444752" cy="457200"/>
           </a:xfrm>
           <a:prstGeom prst="rect">
             <a:avLst/>
@@ -3626,7 +3620,7 @@
               <a:buNone/>
             </a:pPr>
             <a:r>
-              <a:rPr lang="en-US" sz="1100" b="1" dirty="0">
+              <a:rPr lang="en-US" sz="950" b="1" dirty="0">
                 <a:solidFill>
                   <a:srgbClr val="FFFFFF"/>
                 </a:solidFill>
@@ -3634,9 +3628,26 @@
                 <a:ea typeface="Arial" pitchFamily="34" charset="-122"/>
                 <a:cs typeface="Arial" pitchFamily="34" charset="-120"/>
               </a:rPr>
-              <a:t>Data Ingestion</a:t>
-            </a:r>
-            <a:endParaRPr lang="en-US" sz="1100" dirty="0"/>
+              <a:t>Data</a:t>
+            </a:r>
+            <a:endParaRPr lang="en-US" sz="950" dirty="0"/>
+          </a:p>
+          <a:p>
+            <a:pPr algn="ctr" indent="0" marL="0">
+              <a:buNone/>
+            </a:pPr>
+            <a:r>
+              <a:rPr lang="en-US" sz="950" b="1" dirty="0">
+                <a:solidFill>
+                  <a:srgbClr val="FFFFFF"/>
+                </a:solidFill>
+                <a:latin typeface="Arial" pitchFamily="34" charset="0"/>
+                <a:ea typeface="Arial" pitchFamily="34" charset="-122"/>
+                <a:cs typeface="Arial" pitchFamily="34" charset="-120"/>
+              </a:rPr>
+              <a:t>Ingestion</a:t>
+            </a:r>
+            <a:endParaRPr lang="en-US" sz="950" dirty="0"/>
           </a:p>
         </p:txBody>
       </p:sp>
@@ -3648,8 +3659,8 @@
         </p:nvSpPr>
         <p:spPr>
           <a:xfrm>
-            <a:off x="438912" y="2606040"/>
-            <a:ext cx="1463040" cy="1737360"/>
+            <a:off x="457200" y="2103120"/>
+            <a:ext cx="1444752" cy="1508760"/>
           </a:xfrm>
           <a:prstGeom prst="rect">
             <a:avLst/>
@@ -3665,7 +3676,7 @@
               <a:buNone/>
             </a:pPr>
             <a:r>
-              <a:rPr lang="en-US" sz="900" dirty="0">
+              <a:rPr lang="en-US" sz="850" dirty="0">
                 <a:solidFill>
                   <a:srgbClr val="7090A0"/>
                 </a:solidFill>
@@ -3673,9 +3684,9 @@
                 <a:ea typeface="Arial" pitchFamily="34" charset="-122"/>
                 <a:cs typeface="Arial" pitchFamily="34" charset="-120"/>
               </a:rPr>
-              <a:t>90 days: data consumption, peak-hour patterns, roaming frequency, voice usage, add-on utilisation rate</a:t>
-            </a:r>
-            <a:endParaRPr lang="en-US" sz="900" dirty="0"/>
+              <a:t>90 days: data usage, peak hours, roaming frequency, voice mins, add-on utilisation</a:t>
+            </a:r>
+            <a:endParaRPr lang="en-US" sz="850" dirty="0"/>
           </a:p>
         </p:txBody>
       </p:sp>
@@ -3687,37 +3698,12 @@
         </p:nvSpPr>
         <p:spPr>
           <a:xfrm>
-            <a:off x="1965960" y="2926080"/>
-            <a:ext cx="100584" cy="0"/>
-          </a:xfrm>
-          <a:prstGeom prst="line">
-            <a:avLst/>
-          </a:prstGeom>
-          <a:noFill/>
-          <a:ln w="12700">
-            <a:solidFill>
-              <a:srgbClr val="00C6FF">
-                <a:alpha val="50000"/>
-              </a:srgbClr>
-            </a:solidFill>
-            <a:prstDash val="dash"/>
-          </a:ln>
-        </p:spPr>
-      </p:sp>
-      <p:sp>
-        <p:nvSpPr>
-          <p:cNvPr id="9" name="Shape 7"/>
-          <p:cNvSpPr/>
-          <p:nvPr/>
-        </p:nvSpPr>
-        <p:spPr>
-          <a:xfrm>
-            <a:off x="2066544" y="1325880"/>
-            <a:ext cx="1600200" cy="3291840"/>
+            <a:off x="2075688" y="1005840"/>
+            <a:ext cx="1591056" cy="2743200"/>
           </a:xfrm>
           <a:prstGeom prst="roundRect">
             <a:avLst>
-              <a:gd name="adj" fmla="val 5714"/>
+              <a:gd name="adj" fmla="val 5747"/>
             </a:avLst>
           </a:prstGeom>
           <a:solidFill>
@@ -3735,14 +3721,14 @@
       </p:sp>
       <p:sp>
         <p:nvSpPr>
-          <p:cNvPr id="10" name="Text 8"/>
-          <p:cNvSpPr/>
-          <p:nvPr/>
-        </p:nvSpPr>
-        <p:spPr>
-          <a:xfrm>
-            <a:off x="2066544" y="1463040"/>
-            <a:ext cx="1600200" cy="502920"/>
+          <p:cNvPr id="9" name="Text 7"/>
+          <p:cNvSpPr/>
+          <p:nvPr/>
+        </p:nvSpPr>
+        <p:spPr>
+          <a:xfrm>
+            <a:off x="2075688" y="1097280"/>
+            <a:ext cx="1591056" cy="420624"/>
           </a:xfrm>
           <a:prstGeom prst="rect">
             <a:avLst/>
@@ -3758,7 +3744,7 @@
               <a:buNone/>
             </a:pPr>
             <a:r>
-              <a:rPr lang="en-US" sz="2800" b="1" dirty="0">
+              <a:rPr lang="en-US" sz="2400" b="1" dirty="0">
                 <a:solidFill>
                   <a:srgbClr val="00C6FF"/>
                 </a:solidFill>
@@ -3768,7 +3754,63 @@
               </a:rPr>
               <a:t>02</a:t>
             </a:r>
-            <a:endParaRPr lang="en-US" sz="2800" dirty="0"/>
+            <a:endParaRPr lang="en-US" sz="2400" dirty="0"/>
+          </a:p>
+        </p:txBody>
+      </p:sp>
+      <p:sp>
+        <p:nvSpPr>
+          <p:cNvPr id="10" name="Text 8"/>
+          <p:cNvSpPr/>
+          <p:nvPr/>
+        </p:nvSpPr>
+        <p:spPr>
+          <a:xfrm>
+            <a:off x="2148840" y="1572768"/>
+            <a:ext cx="1444752" cy="457200"/>
+          </a:xfrm>
+          <a:prstGeom prst="rect">
+            <a:avLst/>
+          </a:prstGeom>
+          <a:noFill/>
+          <a:ln/>
+        </p:spPr>
+        <p:txBody>
+          <a:bodyPr wrap="square" rtlCol="0" anchor="ctr"/>
+          <a:lstStyle/>
+          <a:p>
+            <a:pPr algn="ctr" indent="0" marL="0">
+              <a:buNone/>
+            </a:pPr>
+            <a:r>
+              <a:rPr lang="en-US" sz="950" b="1" dirty="0">
+                <a:solidFill>
+                  <a:srgbClr val="FFFFFF"/>
+                </a:solidFill>
+                <a:latin typeface="Arial" pitchFamily="34" charset="0"/>
+                <a:ea typeface="Arial" pitchFamily="34" charset="-122"/>
+                <a:cs typeface="Arial" pitchFamily="34" charset="-120"/>
+              </a:rPr>
+              <a:t>ML</a:t>
+            </a:r>
+            <a:endParaRPr lang="en-US" sz="950" dirty="0"/>
+          </a:p>
+          <a:p>
+            <a:pPr algn="ctr" indent="0" marL="0">
+              <a:buNone/>
+            </a:pPr>
+            <a:r>
+              <a:rPr lang="en-US" sz="950" b="1" dirty="0">
+                <a:solidFill>
+                  <a:srgbClr val="FFFFFF"/>
+                </a:solidFill>
+                <a:latin typeface="Arial" pitchFamily="34" charset="0"/>
+                <a:ea typeface="Arial" pitchFamily="34" charset="-122"/>
+                <a:cs typeface="Arial" pitchFamily="34" charset="-120"/>
+              </a:rPr>
+              <a:t>Scoring</a:t>
+            </a:r>
+            <a:endParaRPr lang="en-US" sz="950" dirty="0"/>
           </a:p>
         </p:txBody>
       </p:sp>
@@ -3780,8 +3822,8 @@
         </p:nvSpPr>
         <p:spPr>
           <a:xfrm>
-            <a:off x="2157984" y="2057400"/>
-            <a:ext cx="1417320" cy="457200"/>
+            <a:off x="2148840" y="2103120"/>
+            <a:ext cx="1444752" cy="1508760"/>
           </a:xfrm>
           <a:prstGeom prst="rect">
             <a:avLst/>
@@ -3797,46 +3839,7 @@
               <a:buNone/>
             </a:pPr>
             <a:r>
-              <a:rPr lang="en-US" sz="1100" b="1" dirty="0">
-                <a:solidFill>
-                  <a:srgbClr val="FFFFFF"/>
-                </a:solidFill>
-                <a:latin typeface="Arial" pitchFamily="34" charset="0"/>
-                <a:ea typeface="Arial" pitchFamily="34" charset="-122"/>
-                <a:cs typeface="Arial" pitchFamily="34" charset="-120"/>
-              </a:rPr>
-              <a:t>ML Scoring</a:t>
-            </a:r>
-            <a:endParaRPr lang="en-US" sz="1100" dirty="0"/>
-          </a:p>
-        </p:txBody>
-      </p:sp>
-      <p:sp>
-        <p:nvSpPr>
-          <p:cNvPr id="12" name="Text 10"/>
-          <p:cNvSpPr/>
-          <p:nvPr/>
-        </p:nvSpPr>
-        <p:spPr>
-          <a:xfrm>
-            <a:off x="2139696" y="2606040"/>
-            <a:ext cx="1463040" cy="1737360"/>
-          </a:xfrm>
-          <a:prstGeom prst="rect">
-            <a:avLst/>
-          </a:prstGeom>
-          <a:noFill/>
-          <a:ln/>
-        </p:spPr>
-        <p:txBody>
-          <a:bodyPr wrap="square" rtlCol="0" anchor="ctr"/>
-          <a:lstStyle/>
-          <a:p>
-            <a:pPr algn="ctr" indent="0" marL="0">
-              <a:buNone/>
-            </a:pPr>
-            <a:r>
-              <a:rPr lang="en-US" sz="900" dirty="0">
+              <a:rPr lang="en-US" sz="850" dirty="0">
                 <a:solidFill>
                   <a:srgbClr val="7090A0"/>
                 </a:solidFill>
@@ -3844,51 +3847,26 @@
                 <a:ea typeface="Arial" pitchFamily="34" charset="-122"/>
                 <a:cs typeface="Arial" pitchFamily="34" charset="-120"/>
               </a:rPr>
-              <a:t>Propensity model outputs Plan Fit Score (0–100) + cohort tag: Over-Data, Under-Data, Roaming Candidate, Voice-Heavy</a:t>
-            </a:r>
-            <a:endParaRPr lang="en-US" sz="900" dirty="0"/>
-          </a:p>
-        </p:txBody>
-      </p:sp>
-      <p:sp>
-        <p:nvSpPr>
-          <p:cNvPr id="13" name="Shape 11"/>
-          <p:cNvSpPr/>
-          <p:nvPr/>
-        </p:nvSpPr>
-        <p:spPr>
-          <a:xfrm>
-            <a:off x="3666744" y="2926080"/>
-            <a:ext cx="100584" cy="0"/>
-          </a:xfrm>
-          <a:prstGeom prst="line">
-            <a:avLst/>
-          </a:prstGeom>
-          <a:noFill/>
-          <a:ln w="12700">
-            <a:solidFill>
-              <a:srgbClr val="00C6FF">
-                <a:alpha val="50000"/>
-              </a:srgbClr>
-            </a:solidFill>
-            <a:prstDash val="dash"/>
-          </a:ln>
-        </p:spPr>
-      </p:sp>
-      <p:sp>
-        <p:nvSpPr>
-          <p:cNvPr id="14" name="Shape 12"/>
-          <p:cNvSpPr/>
-          <p:nvPr/>
-        </p:nvSpPr>
-        <p:spPr>
-          <a:xfrm>
-            <a:off x="3767328" y="1325880"/>
-            <a:ext cx="1600200" cy="3291840"/>
+              <a:t>Plan Fit Score (0–100) + cohort tag: Over-Data, Roaming Candidate, Under-Used</a:t>
+            </a:r>
+            <a:endParaRPr lang="en-US" sz="850" dirty="0"/>
+          </a:p>
+        </p:txBody>
+      </p:sp>
+      <p:sp>
+        <p:nvSpPr>
+          <p:cNvPr id="12" name="Shape 10"/>
+          <p:cNvSpPr/>
+          <p:nvPr/>
+        </p:nvSpPr>
+        <p:spPr>
+          <a:xfrm>
+            <a:off x="3767328" y="1005840"/>
+            <a:ext cx="1591056" cy="2743200"/>
           </a:xfrm>
           <a:prstGeom prst="roundRect">
             <a:avLst>
-              <a:gd name="adj" fmla="val 5714"/>
+              <a:gd name="adj" fmla="val 5747"/>
             </a:avLst>
           </a:prstGeom>
           <a:solidFill>
@@ -3906,14 +3884,14 @@
       </p:sp>
       <p:sp>
         <p:nvSpPr>
-          <p:cNvPr id="15" name="Text 13"/>
-          <p:cNvSpPr/>
-          <p:nvPr/>
-        </p:nvSpPr>
-        <p:spPr>
-          <a:xfrm>
-            <a:off x="3767328" y="1463040"/>
-            <a:ext cx="1600200" cy="502920"/>
+          <p:cNvPr id="13" name="Text 11"/>
+          <p:cNvSpPr/>
+          <p:nvPr/>
+        </p:nvSpPr>
+        <p:spPr>
+          <a:xfrm>
+            <a:off x="3767328" y="1097280"/>
+            <a:ext cx="1591056" cy="420624"/>
           </a:xfrm>
           <a:prstGeom prst="rect">
             <a:avLst/>
@@ -3929,7 +3907,7 @@
               <a:buNone/>
             </a:pPr>
             <a:r>
-              <a:rPr lang="en-US" sz="2800" b="1" dirty="0">
+              <a:rPr lang="en-US" sz="2400" b="1" dirty="0">
                 <a:solidFill>
                   <a:srgbClr val="00C6FF"/>
                 </a:solidFill>
@@ -3939,20 +3917,20 @@
               </a:rPr>
               <a:t>03</a:t>
             </a:r>
-            <a:endParaRPr lang="en-US" sz="2800" dirty="0"/>
-          </a:p>
-        </p:txBody>
-      </p:sp>
-      <p:sp>
-        <p:nvSpPr>
-          <p:cNvPr id="16" name="Text 14"/>
-          <p:cNvSpPr/>
-          <p:nvPr/>
-        </p:nvSpPr>
-        <p:spPr>
-          <a:xfrm>
-            <a:off x="3858768" y="2057400"/>
-            <a:ext cx="1417320" cy="457200"/>
+            <a:endParaRPr lang="en-US" sz="2400" dirty="0"/>
+          </a:p>
+        </p:txBody>
+      </p:sp>
+      <p:sp>
+        <p:nvSpPr>
+          <p:cNvPr id="14" name="Text 12"/>
+          <p:cNvSpPr/>
+          <p:nvPr/>
+        </p:nvSpPr>
+        <p:spPr>
+          <a:xfrm>
+            <a:off x="3840480" y="1572768"/>
+            <a:ext cx="1444752" cy="457200"/>
           </a:xfrm>
           <a:prstGeom prst="rect">
             <a:avLst/>
@@ -3968,7 +3946,7 @@
               <a:buNone/>
             </a:pPr>
             <a:r>
-              <a:rPr lang="en-US" sz="1100" b="1" dirty="0">
+              <a:rPr lang="en-US" sz="950" b="1" dirty="0">
                 <a:solidFill>
                   <a:srgbClr val="FFFFFF"/>
                 </a:solidFill>
@@ -3976,38 +3954,55 @@
                 <a:ea typeface="Arial" pitchFamily="34" charset="-122"/>
                 <a:cs typeface="Arial" pitchFamily="34" charset="-120"/>
               </a:rPr>
-              <a:t>Recommendation Engine</a:t>
-            </a:r>
-            <a:endParaRPr lang="en-US" sz="1100" dirty="0"/>
-          </a:p>
-        </p:txBody>
-      </p:sp>
-      <p:sp>
-        <p:nvSpPr>
-          <p:cNvPr id="17" name="Text 15"/>
-          <p:cNvSpPr/>
-          <p:nvPr/>
-        </p:nvSpPr>
-        <p:spPr>
-          <a:xfrm>
-            <a:off x="3840480" y="2606040"/>
-            <a:ext cx="1463040" cy="1737360"/>
-          </a:xfrm>
-          <a:prstGeom prst="rect">
-            <a:avLst/>
-          </a:prstGeom>
-          <a:noFill/>
-          <a:ln/>
-        </p:spPr>
-        <p:txBody>
-          <a:bodyPr wrap="square" rtlCol="0" anchor="ctr"/>
-          <a:lstStyle/>
+              <a:t>Recommendation</a:t>
+            </a:r>
+            <a:endParaRPr lang="en-US" sz="950" dirty="0"/>
+          </a:p>
           <a:p>
             <a:pPr algn="ctr" indent="0" marL="0">
               <a:buNone/>
             </a:pPr>
             <a:r>
-              <a:rPr lang="en-US" sz="900" dirty="0">
+              <a:rPr lang="en-US" sz="950" b="1" dirty="0">
+                <a:solidFill>
+                  <a:srgbClr val="FFFFFF"/>
+                </a:solidFill>
+                <a:latin typeface="Arial" pitchFamily="34" charset="0"/>
+                <a:ea typeface="Arial" pitchFamily="34" charset="-122"/>
+                <a:cs typeface="Arial" pitchFamily="34" charset="-120"/>
+              </a:rPr>
+              <a:t>Engine</a:t>
+            </a:r>
+            <a:endParaRPr lang="en-US" sz="950" dirty="0"/>
+          </a:p>
+        </p:txBody>
+      </p:sp>
+      <p:sp>
+        <p:nvSpPr>
+          <p:cNvPr id="15" name="Text 13"/>
+          <p:cNvSpPr/>
+          <p:nvPr/>
+        </p:nvSpPr>
+        <p:spPr>
+          <a:xfrm>
+            <a:off x="3840480" y="2103120"/>
+            <a:ext cx="1444752" cy="1508760"/>
+          </a:xfrm>
+          <a:prstGeom prst="rect">
+            <a:avLst/>
+          </a:prstGeom>
+          <a:noFill/>
+          <a:ln/>
+        </p:spPr>
+        <p:txBody>
+          <a:bodyPr wrap="square" rtlCol="0" anchor="ctr"/>
+          <a:lstStyle/>
+          <a:p>
+            <a:pPr algn="ctr" indent="0" marL="0">
+              <a:buNone/>
+            </a:pPr>
+            <a:r>
+              <a:rPr lang="en-US" sz="850" dirty="0">
                 <a:solidFill>
                   <a:srgbClr val="7090A0"/>
                 </a:solidFill>
@@ -4015,51 +4010,26 @@
                 <a:ea typeface="Arial" pitchFamily="34" charset="-122"/>
                 <a:cs typeface="Arial" pitchFamily="34" charset="-120"/>
               </a:rPr>
-              <a:t>Maps user to optimal plan from current portfolio; calculates projected ARPU delta and personalised savings narrative</a:t>
-            </a:r>
-            <a:endParaRPr lang="en-US" sz="900" dirty="0"/>
-          </a:p>
-        </p:txBody>
-      </p:sp>
-      <p:sp>
-        <p:nvSpPr>
-          <p:cNvPr id="18" name="Shape 16"/>
-          <p:cNvSpPr/>
-          <p:nvPr/>
-        </p:nvSpPr>
-        <p:spPr>
-          <a:xfrm>
-            <a:off x="5367528" y="2926080"/>
-            <a:ext cx="100584" cy="0"/>
-          </a:xfrm>
-          <a:prstGeom prst="line">
-            <a:avLst/>
-          </a:prstGeom>
-          <a:noFill/>
-          <a:ln w="12700">
-            <a:solidFill>
-              <a:srgbClr val="00C6FF">
-                <a:alpha val="50000"/>
-              </a:srgbClr>
-            </a:solidFill>
-            <a:prstDash val="dash"/>
-          </a:ln>
-        </p:spPr>
-      </p:sp>
-      <p:sp>
-        <p:nvSpPr>
-          <p:cNvPr id="19" name="Shape 17"/>
-          <p:cNvSpPr/>
-          <p:nvPr/>
-        </p:nvSpPr>
-        <p:spPr>
-          <a:xfrm>
-            <a:off x="5468112" y="1325880"/>
-            <a:ext cx="1600200" cy="3291840"/>
+              <a:t>Maps user to optimal plan; calculates projected ARPU delta and personalised savings</a:t>
+            </a:r>
+            <a:endParaRPr lang="en-US" sz="850" dirty="0"/>
+          </a:p>
+        </p:txBody>
+      </p:sp>
+      <p:sp>
+        <p:nvSpPr>
+          <p:cNvPr id="16" name="Shape 14"/>
+          <p:cNvSpPr/>
+          <p:nvPr/>
+        </p:nvSpPr>
+        <p:spPr>
+          <a:xfrm>
+            <a:off x="5458968" y="1005840"/>
+            <a:ext cx="1591056" cy="2743200"/>
           </a:xfrm>
           <a:prstGeom prst="roundRect">
             <a:avLst>
-              <a:gd name="adj" fmla="val 5714"/>
+              <a:gd name="adj" fmla="val 5747"/>
             </a:avLst>
           </a:prstGeom>
           <a:solidFill>
@@ -4077,14 +4047,14 @@
       </p:sp>
       <p:sp>
         <p:nvSpPr>
-          <p:cNvPr id="20" name="Text 18"/>
-          <p:cNvSpPr/>
-          <p:nvPr/>
-        </p:nvSpPr>
-        <p:spPr>
-          <a:xfrm>
-            <a:off x="5468112" y="1463040"/>
-            <a:ext cx="1600200" cy="502920"/>
+          <p:cNvPr id="17" name="Text 15"/>
+          <p:cNvSpPr/>
+          <p:nvPr/>
+        </p:nvSpPr>
+        <p:spPr>
+          <a:xfrm>
+            <a:off x="5458968" y="1097280"/>
+            <a:ext cx="1591056" cy="420624"/>
           </a:xfrm>
           <a:prstGeom prst="rect">
             <a:avLst/>
@@ -4100,7 +4070,7 @@
               <a:buNone/>
             </a:pPr>
             <a:r>
-              <a:rPr lang="en-US" sz="2800" b="1" dirty="0">
+              <a:rPr lang="en-US" sz="2400" b="1" dirty="0">
                 <a:solidFill>
                   <a:srgbClr val="00C6FF"/>
                 </a:solidFill>
@@ -4110,20 +4080,20 @@
               </a:rPr>
               <a:t>04</a:t>
             </a:r>
-            <a:endParaRPr lang="en-US" sz="2800" dirty="0"/>
-          </a:p>
-        </p:txBody>
-      </p:sp>
-      <p:sp>
-        <p:nvSpPr>
-          <p:cNvPr id="21" name="Text 19"/>
-          <p:cNvSpPr/>
-          <p:nvPr/>
-        </p:nvSpPr>
-        <p:spPr>
-          <a:xfrm>
-            <a:off x="5559552" y="2057400"/>
-            <a:ext cx="1417320" cy="457200"/>
+            <a:endParaRPr lang="en-US" sz="2400" dirty="0"/>
+          </a:p>
+        </p:txBody>
+      </p:sp>
+      <p:sp>
+        <p:nvSpPr>
+          <p:cNvPr id="18" name="Text 16"/>
+          <p:cNvSpPr/>
+          <p:nvPr/>
+        </p:nvSpPr>
+        <p:spPr>
+          <a:xfrm>
+            <a:off x="5532120" y="1572768"/>
+            <a:ext cx="1444752" cy="457200"/>
           </a:xfrm>
           <a:prstGeom prst="rect">
             <a:avLst/>
@@ -4139,7 +4109,7 @@
               <a:buNone/>
             </a:pPr>
             <a:r>
-              <a:rPr lang="en-US" sz="1100" b="1" dirty="0">
+              <a:rPr lang="en-US" sz="950" b="1" dirty="0">
                 <a:solidFill>
                   <a:srgbClr val="FFFFFF"/>
                 </a:solidFill>
@@ -4147,38 +4117,55 @@
                 <a:ea typeface="Arial" pitchFamily="34" charset="-122"/>
                 <a:cs typeface="Arial" pitchFamily="34" charset="-120"/>
               </a:rPr>
-              <a:t>Smart Nudge Trigger</a:t>
-            </a:r>
-            <a:endParaRPr lang="en-US" sz="1100" dirty="0"/>
-          </a:p>
-        </p:txBody>
-      </p:sp>
-      <p:sp>
-        <p:nvSpPr>
-          <p:cNvPr id="22" name="Text 20"/>
-          <p:cNvSpPr/>
-          <p:nvPr/>
-        </p:nvSpPr>
-        <p:spPr>
-          <a:xfrm>
-            <a:off x="5541264" y="2606040"/>
-            <a:ext cx="1463040" cy="1737360"/>
-          </a:xfrm>
-          <a:prstGeom prst="rect">
-            <a:avLst/>
-          </a:prstGeom>
-          <a:noFill/>
-          <a:ln/>
-        </p:spPr>
-        <p:txBody>
-          <a:bodyPr wrap="square" rtlCol="0" anchor="ctr"/>
-          <a:lstStyle/>
+              <a:t>Smart Nudge</a:t>
+            </a:r>
+            <a:endParaRPr lang="en-US" sz="950" dirty="0"/>
+          </a:p>
           <a:p>
             <a:pPr algn="ctr" indent="0" marL="0">
               <a:buNone/>
             </a:pPr>
             <a:r>
-              <a:rPr lang="en-US" sz="900" dirty="0">
+              <a:rPr lang="en-US" sz="950" b="1" dirty="0">
+                <a:solidFill>
+                  <a:srgbClr val="FFFFFF"/>
+                </a:solidFill>
+                <a:latin typeface="Arial" pitchFamily="34" charset="0"/>
+                <a:ea typeface="Arial" pitchFamily="34" charset="-122"/>
+                <a:cs typeface="Arial" pitchFamily="34" charset="-120"/>
+              </a:rPr>
+              <a:t>Trigger</a:t>
+            </a:r>
+            <a:endParaRPr lang="en-US" sz="950" dirty="0"/>
+          </a:p>
+        </p:txBody>
+      </p:sp>
+      <p:sp>
+        <p:nvSpPr>
+          <p:cNvPr id="19" name="Text 17"/>
+          <p:cNvSpPr/>
+          <p:nvPr/>
+        </p:nvSpPr>
+        <p:spPr>
+          <a:xfrm>
+            <a:off x="5532120" y="2103120"/>
+            <a:ext cx="1444752" cy="1508760"/>
+          </a:xfrm>
+          <a:prstGeom prst="rect">
+            <a:avLst/>
+          </a:prstGeom>
+          <a:noFill/>
+          <a:ln/>
+        </p:spPr>
+        <p:txBody>
+          <a:bodyPr wrap="square" rtlCol="0" anchor="ctr"/>
+          <a:lstStyle/>
+          <a:p>
+            <a:pPr algn="ctr" indent="0" marL="0">
+              <a:buNone/>
+            </a:pPr>
+            <a:r>
+              <a:rPr lang="en-US" sz="850" dirty="0">
                 <a:solidFill>
                   <a:srgbClr val="7090A0"/>
                 </a:solidFill>
@@ -4186,51 +4173,26 @@
                 <a:ea typeface="Arial" pitchFamily="34" charset="-122"/>
                 <a:cs typeface="Arial" pitchFamily="34" charset="-120"/>
               </a:rPr>
-              <a:t>Surfaces SmartPlan card at high-intent moments: 80% data used, billing renewal, post-travel session, bill shock event</a:t>
-            </a:r>
-            <a:endParaRPr lang="en-US" sz="900" dirty="0"/>
-          </a:p>
-        </p:txBody>
-      </p:sp>
-      <p:sp>
-        <p:nvSpPr>
-          <p:cNvPr id="23" name="Shape 21"/>
-          <p:cNvSpPr/>
-          <p:nvPr/>
-        </p:nvSpPr>
-        <p:spPr>
-          <a:xfrm>
-            <a:off x="7068312" y="2926080"/>
-            <a:ext cx="100584" cy="0"/>
-          </a:xfrm>
-          <a:prstGeom prst="line">
-            <a:avLst/>
-          </a:prstGeom>
-          <a:noFill/>
-          <a:ln w="12700">
-            <a:solidFill>
-              <a:srgbClr val="00C6FF">
-                <a:alpha val="50000"/>
-              </a:srgbClr>
-            </a:solidFill>
-            <a:prstDash val="dash"/>
-          </a:ln>
-        </p:spPr>
-      </p:sp>
-      <p:sp>
-        <p:nvSpPr>
-          <p:cNvPr id="24" name="Shape 22"/>
-          <p:cNvSpPr/>
-          <p:nvPr/>
-        </p:nvSpPr>
-        <p:spPr>
-          <a:xfrm>
-            <a:off x="7168896" y="1325880"/>
-            <a:ext cx="1600200" cy="3291840"/>
+              <a:t>SmartPlan card surfaces at 80% data, billing renewal, post-travel, or bill shock</a:t>
+            </a:r>
+            <a:endParaRPr lang="en-US" sz="850" dirty="0"/>
+          </a:p>
+        </p:txBody>
+      </p:sp>
+      <p:sp>
+        <p:nvSpPr>
+          <p:cNvPr id="20" name="Shape 18"/>
+          <p:cNvSpPr/>
+          <p:nvPr/>
+        </p:nvSpPr>
+        <p:spPr>
+          <a:xfrm>
+            <a:off x="7150608" y="1005840"/>
+            <a:ext cx="1591056" cy="2743200"/>
           </a:xfrm>
           <a:prstGeom prst="roundRect">
             <a:avLst>
-              <a:gd name="adj" fmla="val 5714"/>
+              <a:gd name="adj" fmla="val 5747"/>
             </a:avLst>
           </a:prstGeom>
           <a:solidFill>
@@ -4248,14 +4210,14 @@
       </p:sp>
       <p:sp>
         <p:nvSpPr>
-          <p:cNvPr id="25" name="Text 23"/>
-          <p:cNvSpPr/>
-          <p:nvPr/>
-        </p:nvSpPr>
-        <p:spPr>
-          <a:xfrm>
-            <a:off x="7168896" y="1463040"/>
-            <a:ext cx="1600200" cy="502920"/>
+          <p:cNvPr id="21" name="Text 19"/>
+          <p:cNvSpPr/>
+          <p:nvPr/>
+        </p:nvSpPr>
+        <p:spPr>
+          <a:xfrm>
+            <a:off x="7150608" y="1097280"/>
+            <a:ext cx="1591056" cy="420624"/>
           </a:xfrm>
           <a:prstGeom prst="rect">
             <a:avLst/>
@@ -4271,7 +4233,7 @@
               <a:buNone/>
             </a:pPr>
             <a:r>
-              <a:rPr lang="en-US" sz="2800" b="1" dirty="0">
+              <a:rPr lang="en-US" sz="2400" b="1" dirty="0">
                 <a:solidFill>
                   <a:srgbClr val="00C6FF"/>
                 </a:solidFill>
@@ -4281,20 +4243,20 @@
               </a:rPr>
               <a:t>05</a:t>
             </a:r>
-            <a:endParaRPr lang="en-US" sz="2800" dirty="0"/>
-          </a:p>
-        </p:txBody>
-      </p:sp>
-      <p:sp>
-        <p:nvSpPr>
-          <p:cNvPr id="26" name="Text 24"/>
-          <p:cNvSpPr/>
-          <p:nvPr/>
-        </p:nvSpPr>
-        <p:spPr>
-          <a:xfrm>
-            <a:off x="7260336" y="2057400"/>
-            <a:ext cx="1417320" cy="457200"/>
+            <a:endParaRPr lang="en-US" sz="2400" dirty="0"/>
+          </a:p>
+        </p:txBody>
+      </p:sp>
+      <p:sp>
+        <p:nvSpPr>
+          <p:cNvPr id="22" name="Text 20"/>
+          <p:cNvSpPr/>
+          <p:nvPr/>
+        </p:nvSpPr>
+        <p:spPr>
+          <a:xfrm>
+            <a:off x="7223760" y="1572768"/>
+            <a:ext cx="1444752" cy="457200"/>
           </a:xfrm>
           <a:prstGeom prst="rect">
             <a:avLst/>
@@ -4310,7 +4272,7 @@
               <a:buNone/>
             </a:pPr>
             <a:r>
-              <a:rPr lang="en-US" sz="1100" b="1" dirty="0">
+              <a:rPr lang="en-US" sz="950" b="1" dirty="0">
                 <a:solidFill>
                   <a:srgbClr val="FFFFFF"/>
                 </a:solidFill>
@@ -4318,38 +4280,55 @@
                 <a:ea typeface="Arial" pitchFamily="34" charset="-122"/>
                 <a:cs typeface="Arial" pitchFamily="34" charset="-120"/>
               </a:rPr>
-              <a:t>Switch + Track</a:t>
-            </a:r>
-            <a:endParaRPr lang="en-US" sz="1100" dirty="0"/>
-          </a:p>
-        </p:txBody>
-      </p:sp>
-      <p:sp>
-        <p:nvSpPr>
-          <p:cNvPr id="27" name="Text 25"/>
-          <p:cNvSpPr/>
-          <p:nvPr/>
-        </p:nvSpPr>
-        <p:spPr>
-          <a:xfrm>
-            <a:off x="7242048" y="2606040"/>
-            <a:ext cx="1463040" cy="1737360"/>
-          </a:xfrm>
-          <a:prstGeom prst="rect">
-            <a:avLst/>
-          </a:prstGeom>
-          <a:noFill/>
-          <a:ln/>
-        </p:spPr>
-        <p:txBody>
-          <a:bodyPr wrap="square" rtlCol="0" anchor="ctr"/>
-          <a:lstStyle/>
+              <a:t>Switch</a:t>
+            </a:r>
+            <a:endParaRPr lang="en-US" sz="950" dirty="0"/>
+          </a:p>
           <a:p>
             <a:pPr algn="ctr" indent="0" marL="0">
               <a:buNone/>
             </a:pPr>
             <a:r>
-              <a:rPr lang="en-US" sz="900" dirty="0">
+              <a:rPr lang="en-US" sz="950" b="1" dirty="0">
+                <a:solidFill>
+                  <a:srgbClr val="FFFFFF"/>
+                </a:solidFill>
+                <a:latin typeface="Arial" pitchFamily="34" charset="0"/>
+                <a:ea typeface="Arial" pitchFamily="34" charset="-122"/>
+                <a:cs typeface="Arial" pitchFamily="34" charset="-120"/>
+              </a:rPr>
+              <a:t>+ Track</a:t>
+            </a:r>
+            <a:endParaRPr lang="en-US" sz="950" dirty="0"/>
+          </a:p>
+        </p:txBody>
+      </p:sp>
+      <p:sp>
+        <p:nvSpPr>
+          <p:cNvPr id="23" name="Text 21"/>
+          <p:cNvSpPr/>
+          <p:nvPr/>
+        </p:nvSpPr>
+        <p:spPr>
+          <a:xfrm>
+            <a:off x="7223760" y="2103120"/>
+            <a:ext cx="1444752" cy="1508760"/>
+          </a:xfrm>
+          <a:prstGeom prst="rect">
+            <a:avLst/>
+          </a:prstGeom>
+          <a:noFill/>
+          <a:ln/>
+        </p:spPr>
+        <p:txBody>
+          <a:bodyPr wrap="square" rtlCol="0" anchor="ctr"/>
+          <a:lstStyle/>
+          <a:p>
+            <a:pPr algn="ctr" indent="0" marL="0">
+              <a:buNone/>
+            </a:pPr>
+            <a:r>
+              <a:rPr lang="en-US" sz="850" dirty="0">
                 <a:solidFill>
                   <a:srgbClr val="7090A0"/>
                 </a:solidFill>
@@ -4357,26 +4336,26 @@
                 <a:ea typeface="Arial" pitchFamily="34" charset="-122"/>
                 <a:cs typeface="Arial" pitchFamily="34" charset="-120"/>
               </a:rPr>
-              <a:t>One-tap plan switch; 90-day outcome tracked against Plan Fit improvement, ARPU delta, and churn rate vs control cohort</a:t>
-            </a:r>
-            <a:endParaRPr lang="en-US" sz="900" dirty="0"/>
-          </a:p>
-        </p:txBody>
-      </p:sp>
-      <p:sp>
-        <p:nvSpPr>
-          <p:cNvPr id="28" name="Shape 26"/>
-          <p:cNvSpPr/>
-          <p:nvPr/>
-        </p:nvSpPr>
-        <p:spPr>
-          <a:xfrm>
-            <a:off x="457200" y="4800600"/>
-            <a:ext cx="8229600" cy="868680"/>
+              <a:t>One-tap switch; 90-day outcome tracked against Plan Fit, ARPU delta, churn rate</a:t>
+            </a:r>
+            <a:endParaRPr lang="en-US" sz="850" dirty="0"/>
+          </a:p>
+        </p:txBody>
+      </p:sp>
+      <p:sp>
+        <p:nvSpPr>
+          <p:cNvPr id="24" name="Shape 22"/>
+          <p:cNvSpPr/>
+          <p:nvPr/>
+        </p:nvSpPr>
+        <p:spPr>
+          <a:xfrm>
+            <a:off x="457200" y="3895344"/>
+            <a:ext cx="8229600" cy="731520"/>
           </a:xfrm>
           <a:prstGeom prst="roundRect">
             <a:avLst>
-              <a:gd name="adj" fmla="val 8421"/>
+              <a:gd name="adj" fmla="val 10000"/>
             </a:avLst>
           </a:prstGeom>
           <a:solidFill>
@@ -4385,7 +4364,7 @@
           <a:ln w="10160">
             <a:solidFill>
               <a:srgbClr val="F97316">
-                <a:alpha val="50000"/>
+                <a:alpha val="55000"/>
               </a:srgbClr>
             </a:solidFill>
             <a:prstDash val="solid"/>
@@ -4394,30 +4373,30 @@
       </p:sp>
       <p:sp>
         <p:nvSpPr>
-          <p:cNvPr id="29" name="Text 27"/>
-          <p:cNvSpPr/>
-          <p:nvPr/>
-        </p:nvSpPr>
-        <p:spPr>
-          <a:xfrm>
-            <a:off x="640080" y="4846320"/>
-            <a:ext cx="7863840" cy="777240"/>
-          </a:xfrm>
-          <a:prstGeom prst="rect">
-            <a:avLst/>
-          </a:prstGeom>
-          <a:noFill/>
-          <a:ln/>
-        </p:spPr>
-        <p:txBody>
-          <a:bodyPr wrap="square" rtlCol="0" anchor="ctr"/>
-          <a:lstStyle/>
-          <a:p>
-            <a:pPr indent="0" marL="0">
-              <a:buNone/>
-            </a:pPr>
-            <a:r>
-              <a:rPr lang="en-US" sz="1000" i="1" dirty="0">
+          <p:cNvPr id="25" name="Text 23"/>
+          <p:cNvSpPr/>
+          <p:nvPr/>
+        </p:nvSpPr>
+        <p:spPr>
+          <a:xfrm>
+            <a:off x="640080" y="3931920"/>
+            <a:ext cx="7863840" cy="658368"/>
+          </a:xfrm>
+          <a:prstGeom prst="rect">
+            <a:avLst/>
+          </a:prstGeom>
+          <a:noFill/>
+          <a:ln/>
+        </p:spPr>
+        <p:txBody>
+          <a:bodyPr wrap="square" rtlCol="0" anchor="ctr"/>
+          <a:lstStyle/>
+          <a:p>
+            <a:pPr indent="0" marL="0">
+              <a:buNone/>
+            </a:pPr>
+            <a:r>
+              <a:rPr lang="en-US" sz="950" i="1" dirty="0">
                 <a:solidFill>
                   <a:srgbClr val="FDBA74"/>
                 </a:solidFill>
@@ -4425,9 +4404,9 @@
                 <a:ea typeface="Arial" pitchFamily="34" charset="-122"/>
                 <a:cs typeface="Arial" pitchFamily="34" charset="-120"/>
               </a:rPr>
-              <a:t>A/B proof at PhonePe: Behaviour-linked incentive variant (Rent Waiver) vs flat discount → 60% improvement in 90-day device activation. Same trigger architecture as SmartPlan's nudge engine.</a:t>
-            </a:r>
-            <a:endParaRPr lang="en-US" sz="1000" dirty="0"/>
+              <a:t>A/B proof at PhonePe: Behaviour-linked incentive (Rent Waiver) vs flat discount → 60% improvement in 90-day device activation. Same trigger-and-track architecture as SmartPlan's nudge engine.</a:t>
+            </a:r>
+            <a:endParaRPr lang="en-US" sz="950" dirty="0"/>
           </a:p>
         </p:txBody>
       </p:sp>
@@ -4471,31 +4450,31 @@
         </p:nvSpPr>
         <p:spPr>
           <a:xfrm>
-            <a:off x="457200" y="320040"/>
-            <a:ext cx="8229600" cy="228600"/>
-          </a:xfrm>
-          <a:prstGeom prst="rect">
-            <a:avLst/>
-          </a:prstGeom>
-          <a:noFill/>
-          <a:ln/>
-        </p:spPr>
-        <p:txBody>
-          <a:bodyPr wrap="square" rtlCol="0" anchor="ctr"/>
-          <a:lstStyle/>
-          <a:p>
-            <a:pPr indent="0" marL="0">
-              <a:buNone/>
-            </a:pPr>
-            <a:r>
-              <a:rPr lang="en-US" sz="900" b="1" dirty="0">
+            <a:off x="457200" y="201168"/>
+            <a:ext cx="8229600" cy="201168"/>
+          </a:xfrm>
+          <a:prstGeom prst="rect">
+            <a:avLst/>
+          </a:prstGeom>
+          <a:noFill/>
+          <a:ln/>
+        </p:spPr>
+        <p:txBody>
+          <a:bodyPr wrap="square" rtlCol="0" anchor="ctr"/>
+          <a:lstStyle/>
+          <a:p>
+            <a:pPr indent="0" marL="0">
+              <a:buNone/>
+            </a:pPr>
+            <a:r>
+              <a:rPr lang="en-US" sz="800" b="1" dirty="0">
                 <a:solidFill>
                   <a:srgbClr val="3B82F6"/>
                 </a:solidFill>
               </a:rPr>
               <a:t>THE PRODUCT</a:t>
             </a:r>
-            <a:endParaRPr lang="en-US" sz="900" dirty="0"/>
+            <a:endParaRPr lang="en-US" sz="800" dirty="0"/>
           </a:p>
         </p:txBody>
       </p:sp>
@@ -4507,24 +4486,24 @@
         </p:nvSpPr>
         <p:spPr>
           <a:xfrm>
-            <a:off x="457200" y="594360"/>
-            <a:ext cx="8229600" cy="502920"/>
-          </a:xfrm>
-          <a:prstGeom prst="rect">
-            <a:avLst/>
-          </a:prstGeom>
-          <a:noFill/>
-          <a:ln/>
-        </p:spPr>
-        <p:txBody>
-          <a:bodyPr wrap="square" rtlCol="0" anchor="ctr"/>
-          <a:lstStyle/>
-          <a:p>
-            <a:pPr indent="0" marL="0">
-              <a:buNone/>
-            </a:pPr>
-            <a:r>
-              <a:rPr lang="en-US" sz="2600" b="1" dirty="0">
+            <a:off x="457200" y="420624"/>
+            <a:ext cx="8229600" cy="457200"/>
+          </a:xfrm>
+          <a:prstGeom prst="rect">
+            <a:avLst/>
+          </a:prstGeom>
+          <a:noFill/>
+          <a:ln/>
+        </p:spPr>
+        <p:txBody>
+          <a:bodyPr wrap="square" rtlCol="0" anchor="ctr"/>
+          <a:lstStyle/>
+          <a:p>
+            <a:pPr indent="0" marL="0">
+              <a:buNone/>
+            </a:pPr>
+            <a:r>
+              <a:rPr lang="en-US" sz="2200" b="1" dirty="0">
                 <a:solidFill>
                   <a:srgbClr val="060D1A"/>
                 </a:solidFill>
@@ -4532,9 +4511,9 @@
                 <a:ea typeface="Arial" pitchFamily="34" charset="-122"/>
                 <a:cs typeface="Arial" pitchFamily="34" charset="-120"/>
               </a:rPr>
-              <a:t>4 Key Screen States — Designed for the Circles MENA App</a:t>
-            </a:r>
-            <a:endParaRPr lang="en-US" sz="2600" dirty="0"/>
+              <a:t>4 Key Screen States — Built for the Circles MENA App</a:t>
+            </a:r>
+            <a:endParaRPr lang="en-US" sz="2200" dirty="0"/>
           </a:p>
         </p:txBody>
       </p:sp>
@@ -4546,12 +4525,12 @@
         </p:nvSpPr>
         <p:spPr>
           <a:xfrm>
-            <a:off x="320040" y="1325880"/>
-            <a:ext cx="2011680" cy="3657600"/>
+            <a:off x="347472" y="987552"/>
+            <a:ext cx="1993392" cy="3931920"/>
           </a:xfrm>
           <a:prstGeom prst="roundRect">
             <a:avLst>
-              <a:gd name="adj" fmla="val 5455"/>
+              <a:gd name="adj" fmla="val 5505"/>
             </a:avLst>
           </a:prstGeom>
           <a:solidFill>
@@ -4575,8 +4554,8 @@
         </p:nvSpPr>
         <p:spPr>
           <a:xfrm>
-            <a:off x="320040" y="1444752"/>
-            <a:ext cx="2011680" cy="320040"/>
+            <a:off x="347472" y="1078992"/>
+            <a:ext cx="1993392" cy="274320"/>
           </a:xfrm>
           <a:prstGeom prst="rect">
             <a:avLst/>
@@ -4592,14 +4571,14 @@
               <a:buNone/>
             </a:pPr>
             <a:r>
-              <a:rPr lang="en-US" sz="1100" b="1" dirty="0">
+              <a:rPr lang="en-US" sz="1000" b="1" dirty="0">
                 <a:solidFill>
                   <a:srgbClr val="00C6FF"/>
                 </a:solidFill>
               </a:rPr>
               <a:t>01</a:t>
             </a:r>
-            <a:endParaRPr lang="en-US" sz="1100" dirty="0"/>
+            <a:endParaRPr lang="en-US" sz="1000" dirty="0"/>
           </a:p>
         </p:txBody>
       </p:sp>
@@ -4611,8 +4590,8 @@
         </p:nvSpPr>
         <p:spPr>
           <a:xfrm>
-            <a:off x="393192" y="1783080"/>
-            <a:ext cx="1865376" cy="320040"/>
+            <a:off x="420624" y="1371600"/>
+            <a:ext cx="1847088" cy="274320"/>
           </a:xfrm>
           <a:prstGeom prst="rect">
             <a:avLst/>
@@ -4628,7 +4607,7 @@
               <a:buNone/>
             </a:pPr>
             <a:r>
-              <a:rPr lang="en-US" sz="1050" b="1" dirty="0">
+              <a:rPr lang="en-US" sz="950" b="1" dirty="0">
                 <a:solidFill>
                   <a:srgbClr val="FFFFFF"/>
                 </a:solidFill>
@@ -4638,7 +4617,7 @@
               </a:rPr>
               <a:t>Current Plan Home</a:t>
             </a:r>
-            <a:endParaRPr lang="en-US" sz="1050" dirty="0"/>
+            <a:endParaRPr lang="en-US" sz="950" dirty="0"/>
           </a:p>
         </p:txBody>
       </p:sp>
@@ -4650,12 +4629,12 @@
         </p:nvSpPr>
         <p:spPr>
           <a:xfrm>
-            <a:off x="429768" y="2176272"/>
-            <a:ext cx="1792224" cy="1691640"/>
+            <a:off x="457200" y="1700784"/>
+            <a:ext cx="1773936" cy="1554480"/>
           </a:xfrm>
           <a:prstGeom prst="roundRect">
             <a:avLst>
-              <a:gd name="adj" fmla="val 3243"/>
+              <a:gd name="adj" fmla="val 3529"/>
             </a:avLst>
           </a:prstGeom>
           <a:solidFill>
@@ -4677,8 +4656,8 @@
         </p:nvSpPr>
         <p:spPr>
           <a:xfrm>
-            <a:off x="448056" y="2212848"/>
-            <a:ext cx="1755648" cy="1627632"/>
+            <a:off x="475488" y="1737360"/>
+            <a:ext cx="1737360" cy="1481328"/>
           </a:xfrm>
           <a:prstGeom prst="rect">
             <a:avLst/>
@@ -4694,7 +4673,7 @@
               <a:buNone/>
             </a:pPr>
             <a:r>
-              <a:rPr lang="en-US" sz="620" dirty="0">
+              <a:rPr lang="en-US" sz="580" dirty="0">
                 <a:solidFill>
                   <a:srgbClr val="90B8C8"/>
                 </a:solidFill>
@@ -4702,16 +4681,16 @@
                 <a:ea typeface="Courier New" pitchFamily="34" charset="-122"/>
                 <a:cs typeface="Courier New" pitchFamily="34" charset="-120"/>
               </a:rPr>
-              <a:t>[circles.life]      🔔</a:t>
-            </a:r>
-            <a:endParaRPr lang="en-US" sz="620" dirty="0"/>
-          </a:p>
-          <a:p>
-            <a:pPr indent="0" marL="0">
-              <a:buNone/>
-            </a:pPr>
-            <a:r>
-              <a:rPr lang="en-US" sz="620" dirty="0">
+              <a:t>[circles.life]   🔔</a:t>
+            </a:r>
+            <a:endParaRPr lang="en-US" sz="580" dirty="0"/>
+          </a:p>
+          <a:p>
+            <a:pPr indent="0" marL="0">
+              <a:buNone/>
+            </a:pPr>
+            <a:r>
+              <a:rPr lang="en-US" sz="580" dirty="0">
                 <a:solidFill>
                   <a:srgbClr val="90B8C8"/>
                 </a:solidFill>
@@ -4719,16 +4698,16 @@
                 <a:ea typeface="Courier New" pitchFamily="34" charset="-122"/>
                 <a:cs typeface="Courier New" pitchFamily="34" charset="-120"/>
               </a:rPr>
-              <a:t>─────────────────────</a:t>
-            </a:r>
-            <a:endParaRPr lang="en-US" sz="620" dirty="0"/>
-          </a:p>
-          <a:p>
-            <a:pPr indent="0" marL="0">
-              <a:buNone/>
-            </a:pPr>
-            <a:r>
-              <a:rPr lang="en-US" sz="620" dirty="0">
+              <a:t>─────────────────</a:t>
+            </a:r>
+            <a:endParaRPr lang="en-US" sz="580" dirty="0"/>
+          </a:p>
+          <a:p>
+            <a:pPr indent="0" marL="0">
+              <a:buNone/>
+            </a:pPr>
+            <a:r>
+              <a:rPr lang="en-US" sz="580" dirty="0">
                 <a:solidFill>
                   <a:srgbClr val="90B8C8"/>
                 </a:solidFill>
@@ -4738,14 +4717,14 @@
               </a:rPr>
               <a:t>  Active Plan</a:t>
             </a:r>
-            <a:endParaRPr lang="en-US" sz="620" dirty="0"/>
-          </a:p>
-          <a:p>
-            <a:pPr indent="0" marL="0">
-              <a:buNone/>
-            </a:pPr>
-            <a:r>
-              <a:rPr lang="en-US" sz="620" dirty="0">
+            <a:endParaRPr lang="en-US" sz="580" dirty="0"/>
+          </a:p>
+          <a:p>
+            <a:pPr indent="0" marL="0">
+              <a:buNone/>
+            </a:pPr>
+            <a:r>
+              <a:rPr lang="en-US" sz="580" dirty="0">
                 <a:solidFill>
                   <a:srgbClr val="90B8C8"/>
                 </a:solidFill>
@@ -4753,16 +4732,16 @@
                 <a:ea typeface="Courier New" pitchFamily="34" charset="-122"/>
                 <a:cs typeface="Courier New" pitchFamily="34" charset="-120"/>
               </a:rPr>
-              <a:t>  Circles Base 20GB</a:t>
-            </a:r>
-            <a:endParaRPr lang="en-US" sz="620" dirty="0"/>
-          </a:p>
-          <a:p>
-            <a:pPr indent="0" marL="0">
-              <a:buNone/>
-            </a:pPr>
-            <a:r>
-              <a:rPr lang="en-US" sz="620" dirty="0">
+              <a:t>  Base 20GB · AED 89</a:t>
+            </a:r>
+            <a:endParaRPr lang="en-US" sz="580" dirty="0"/>
+          </a:p>
+          <a:p>
+            <a:pPr indent="0" marL="0">
+              <a:buNone/>
+            </a:pPr>
+            <a:r>
+              <a:rPr lang="en-US" sz="580" dirty="0">
                 <a:solidFill>
                   <a:srgbClr val="90B8C8"/>
                 </a:solidFill>
@@ -4770,16 +4749,16 @@
                 <a:ea typeface="Courier New" pitchFamily="34" charset="-122"/>
                 <a:cs typeface="Courier New" pitchFamily="34" charset="-120"/>
               </a:rPr>
-              <a:t>  ████████████░░ 18.2/20GB</a:t>
-            </a:r>
-            <a:endParaRPr lang="en-US" sz="620" dirty="0"/>
-          </a:p>
-          <a:p>
-            <a:pPr indent="0" marL="0">
-              <a:buNone/>
-            </a:pPr>
-            <a:r>
-              <a:rPr lang="en-US" sz="620" dirty="0">
+              <a:t>  ████████████░ 18.2GB</a:t>
+            </a:r>
+            <a:endParaRPr lang="en-US" sz="580" dirty="0"/>
+          </a:p>
+          <a:p>
+            <a:pPr indent="0" marL="0">
+              <a:buNone/>
+            </a:pPr>
+            <a:r>
+              <a:rPr lang="en-US" sz="580" dirty="0">
                 <a:solidFill>
                   <a:srgbClr val="90B8C8"/>
                 </a:solidFill>
@@ -4789,14 +4768,14 @@
               </a:rPr>
               <a:t>  Plan Fit: 62/100 ⚠</a:t>
             </a:r>
-            <a:endParaRPr lang="en-US" sz="620" dirty="0"/>
-          </a:p>
-          <a:p>
-            <a:pPr indent="0" marL="0">
-              <a:buNone/>
-            </a:pPr>
-            <a:r>
-              <a:rPr lang="en-US" sz="620" dirty="0">
+            <a:endParaRPr lang="en-US" sz="580" dirty="0"/>
+          </a:p>
+          <a:p>
+            <a:pPr indent="0" marL="0">
+              <a:buNone/>
+            </a:pPr>
+            <a:r>
+              <a:rPr lang="en-US" sz="580" dirty="0">
                 <a:solidFill>
                   <a:srgbClr val="90B8C8"/>
                 </a:solidFill>
@@ -4804,16 +4783,16 @@
                 <a:ea typeface="Courier New" pitchFamily="34" charset="-122"/>
                 <a:cs typeface="Courier New" pitchFamily="34" charset="-120"/>
               </a:rPr>
-              <a:t>─────────────────────</a:t>
-            </a:r>
-            <a:endParaRPr lang="en-US" sz="620" dirty="0"/>
-          </a:p>
-          <a:p>
-            <a:pPr indent="0" marL="0">
-              <a:buNone/>
-            </a:pPr>
-            <a:r>
-              <a:rPr lang="en-US" sz="620" dirty="0">
+              <a:t>─────────────────</a:t>
+            </a:r>
+            <a:endParaRPr lang="en-US" sz="580" dirty="0"/>
+          </a:p>
+          <a:p>
+            <a:pPr indent="0" marL="0">
+              <a:buNone/>
+            </a:pPr>
+            <a:r>
+              <a:rPr lang="en-US" sz="580" dirty="0">
                 <a:solidFill>
                   <a:srgbClr val="90B8C8"/>
                 </a:solidFill>
@@ -4823,14 +4802,14 @@
               </a:rPr>
               <a:t>  💡 Better plan found</a:t>
             </a:r>
-            <a:endParaRPr lang="en-US" sz="620" dirty="0"/>
-          </a:p>
-          <a:p>
-            <a:pPr indent="0" marL="0">
-              <a:buNone/>
-            </a:pPr>
-            <a:r>
-              <a:rPr lang="en-US" sz="620" dirty="0">
+            <a:endParaRPr lang="en-US" sz="580" dirty="0"/>
+          </a:p>
+          <a:p>
+            <a:pPr indent="0" marL="0">
+              <a:buNone/>
+            </a:pPr>
+            <a:r>
+              <a:rPr lang="en-US" sz="580" dirty="0">
                 <a:solidFill>
                   <a:srgbClr val="90B8C8"/>
                 </a:solidFill>
@@ -4838,26 +4817,9 @@
                 <a:ea typeface="Courier New" pitchFamily="34" charset="-122"/>
                 <a:cs typeface="Courier New" pitchFamily="34" charset="-120"/>
               </a:rPr>
-              <a:t>     Same price · +10GB</a:t>
-            </a:r>
-            <a:endParaRPr lang="en-US" sz="620" dirty="0"/>
-          </a:p>
-          <a:p>
-            <a:pPr indent="0" marL="0">
-              <a:buNone/>
-            </a:pPr>
-            <a:r>
-              <a:rPr lang="en-US" sz="620" dirty="0">
-                <a:solidFill>
-                  <a:srgbClr val="90B8C8"/>
-                </a:solidFill>
-                <a:latin typeface="Courier New" pitchFamily="34" charset="0"/>
-                <a:ea typeface="Courier New" pitchFamily="34" charset="-122"/>
-                <a:cs typeface="Courier New" pitchFamily="34" charset="-120"/>
-              </a:rPr>
-              <a:t>  [View SmartPlan →]  </a:t>
-            </a:r>
-            <a:endParaRPr lang="en-US" sz="620" dirty="0"/>
+              <a:t>  [View SmartPlan →]</a:t>
+            </a:r>
+            <a:endParaRPr lang="en-US" sz="580" dirty="0"/>
           </a:p>
         </p:txBody>
       </p:sp>
@@ -4869,8 +4831,8 @@
         </p:nvSpPr>
         <p:spPr>
           <a:xfrm>
-            <a:off x="393192" y="3931920"/>
-            <a:ext cx="1865376" cy="914400"/>
+            <a:off x="420624" y="3310128"/>
+            <a:ext cx="1847088" cy="841248"/>
           </a:xfrm>
           <a:prstGeom prst="rect">
             <a:avLst/>
@@ -4886,7 +4848,7 @@
               <a:buNone/>
             </a:pPr>
             <a:r>
-              <a:rPr lang="en-US" sz="850" dirty="0">
+              <a:rPr lang="en-US" sz="800" dirty="0">
                 <a:solidFill>
                   <a:srgbClr val="4A6A7A"/>
                 </a:solidFill>
@@ -4894,9 +4856,9 @@
                 <a:ea typeface="Arial" pitchFamily="34" charset="-122"/>
                 <a:cs typeface="Arial" pitchFamily="34" charset="-120"/>
               </a:rPr>
-              <a:t>Data usage ring + Plan Fit Score (62/100) + SmartPlan banner surfaced when fit score &lt; 75 or data &gt; 80% used</a:t>
-            </a:r>
-            <a:endParaRPr lang="en-US" sz="850" dirty="0"/>
+              <a:t>Data ring + Plan Fit Score (62/100) + SmartPlan banner when fit &lt; 75 or data &gt; 80%</a:t>
+            </a:r>
+            <a:endParaRPr lang="en-US" sz="800" dirty="0"/>
           </a:p>
         </p:txBody>
       </p:sp>
@@ -4908,12 +4870,12 @@
         </p:nvSpPr>
         <p:spPr>
           <a:xfrm>
-            <a:off x="2468880" y="1325880"/>
-            <a:ext cx="2011680" cy="3657600"/>
+            <a:off x="2478024" y="987552"/>
+            <a:ext cx="1993392" cy="3931920"/>
           </a:xfrm>
           <a:prstGeom prst="roundRect">
             <a:avLst>
-              <a:gd name="adj" fmla="val 5455"/>
+              <a:gd name="adj" fmla="val 5505"/>
             </a:avLst>
           </a:prstGeom>
           <a:solidFill>
@@ -4937,8 +4899,8 @@
         </p:nvSpPr>
         <p:spPr>
           <a:xfrm>
-            <a:off x="2468880" y="1444752"/>
-            <a:ext cx="2011680" cy="320040"/>
+            <a:off x="2478024" y="1078992"/>
+            <a:ext cx="1993392" cy="274320"/>
           </a:xfrm>
           <a:prstGeom prst="rect">
             <a:avLst/>
@@ -4954,14 +4916,14 @@
               <a:buNone/>
             </a:pPr>
             <a:r>
-              <a:rPr lang="en-US" sz="1100" b="1" dirty="0">
+              <a:rPr lang="en-US" sz="1000" b="1" dirty="0">
                 <a:solidFill>
                   <a:srgbClr val="00C6FF"/>
                 </a:solidFill>
               </a:rPr>
               <a:t>02</a:t>
             </a:r>
-            <a:endParaRPr lang="en-US" sz="1100" dirty="0"/>
+            <a:endParaRPr lang="en-US" sz="1000" dirty="0"/>
           </a:p>
         </p:txBody>
       </p:sp>
@@ -4973,8 +4935,8 @@
         </p:nvSpPr>
         <p:spPr>
           <a:xfrm>
-            <a:off x="2542032" y="1783080"/>
-            <a:ext cx="1865376" cy="320040"/>
+            <a:off x="2551176" y="1371600"/>
+            <a:ext cx="1847088" cy="274320"/>
           </a:xfrm>
           <a:prstGeom prst="rect">
             <a:avLst/>
@@ -4990,7 +4952,7 @@
               <a:buNone/>
             </a:pPr>
             <a:r>
-              <a:rPr lang="en-US" sz="1050" b="1" dirty="0">
+              <a:rPr lang="en-US" sz="950" b="1" dirty="0">
                 <a:solidFill>
                   <a:srgbClr val="FFFFFF"/>
                 </a:solidFill>
@@ -5000,7 +4962,7 @@
               </a:rPr>
               <a:t>SmartPlan Analyzer</a:t>
             </a:r>
-            <a:endParaRPr lang="en-US" sz="1050" dirty="0"/>
+            <a:endParaRPr lang="en-US" sz="950" dirty="0"/>
           </a:p>
         </p:txBody>
       </p:sp>
@@ -5012,12 +4974,12 @@
         </p:nvSpPr>
         <p:spPr>
           <a:xfrm>
-            <a:off x="2578608" y="2176272"/>
-            <a:ext cx="1792224" cy="1691640"/>
+            <a:off x="2587752" y="1700784"/>
+            <a:ext cx="1773936" cy="1554480"/>
           </a:xfrm>
           <a:prstGeom prst="roundRect">
             <a:avLst>
-              <a:gd name="adj" fmla="val 3243"/>
+              <a:gd name="adj" fmla="val 3529"/>
             </a:avLst>
           </a:prstGeom>
           <a:solidFill>
@@ -5039,8 +5001,8 @@
         </p:nvSpPr>
         <p:spPr>
           <a:xfrm>
-            <a:off x="2596896" y="2212848"/>
-            <a:ext cx="1755648" cy="1627632"/>
+            <a:off x="2606040" y="1737360"/>
+            <a:ext cx="1737360" cy="1481328"/>
           </a:xfrm>
           <a:prstGeom prst="rect">
             <a:avLst/>
@@ -5056,7 +5018,7 @@
               <a:buNone/>
             </a:pPr>
             <a:r>
-              <a:rPr lang="en-US" sz="620" dirty="0">
+              <a:rPr lang="en-US" sz="580" dirty="0">
                 <a:solidFill>
                   <a:srgbClr val="90B8C8"/>
                 </a:solidFill>
@@ -5066,14 +5028,14 @@
               </a:rPr>
               <a:t>← SmartPlan Analysis</a:t>
             </a:r>
-            <a:endParaRPr lang="en-US" sz="620" dirty="0"/>
-          </a:p>
-          <a:p>
-            <a:pPr indent="0" marL="0">
-              <a:buNone/>
-            </a:pPr>
-            <a:r>
-              <a:rPr lang="en-US" sz="620" dirty="0">
+            <a:endParaRPr lang="en-US" sz="580" dirty="0"/>
+          </a:p>
+          <a:p>
+            <a:pPr indent="0" marL="0">
+              <a:buNone/>
+            </a:pPr>
+            <a:r>
+              <a:rPr lang="en-US" sz="580" dirty="0">
                 <a:solidFill>
                   <a:srgbClr val="90B8C8"/>
                 </a:solidFill>
@@ -5081,16 +5043,16 @@
                 <a:ea typeface="Courier New" pitchFamily="34" charset="-122"/>
                 <a:cs typeface="Courier New" pitchFamily="34" charset="-120"/>
               </a:rPr>
-              <a:t>─────────────────────</a:t>
-            </a:r>
-            <a:endParaRPr lang="en-US" sz="620" dirty="0"/>
-          </a:p>
-          <a:p>
-            <a:pPr indent="0" marL="0">
-              <a:buNone/>
-            </a:pPr>
-            <a:r>
-              <a:rPr lang="en-US" sz="620" dirty="0">
+              <a:t>─────────────────</a:t>
+            </a:r>
+            <a:endParaRPr lang="en-US" sz="580" dirty="0"/>
+          </a:p>
+          <a:p>
+            <a:pPr indent="0" marL="0">
+              <a:buNone/>
+            </a:pPr>
+            <a:r>
+              <a:rPr lang="en-US" sz="580" dirty="0">
                 <a:solidFill>
                   <a:srgbClr val="90B8C8"/>
                 </a:solidFill>
@@ -5100,14 +5062,14 @@
               </a:rPr>
               <a:t>  Usage (90 days)</a:t>
             </a:r>
-            <a:endParaRPr lang="en-US" sz="620" dirty="0"/>
-          </a:p>
-          <a:p>
-            <a:pPr indent="0" marL="0">
-              <a:buNone/>
-            </a:pPr>
-            <a:r>
-              <a:rPr lang="en-US" sz="620" dirty="0">
+            <a:endParaRPr lang="en-US" sz="580" dirty="0"/>
+          </a:p>
+          <a:p>
+            <a:pPr indent="0" marL="0">
+              <a:buNone/>
+            </a:pPr>
+            <a:r>
+              <a:rPr lang="en-US" sz="580" dirty="0">
                 <a:solidFill>
                   <a:srgbClr val="90B8C8"/>
                 </a:solidFill>
@@ -5115,16 +5077,16 @@
                 <a:ea typeface="Courier New" pitchFamily="34" charset="-122"/>
                 <a:cs typeface="Courier New" pitchFamily="34" charset="-120"/>
               </a:rPr>
-              <a:t>  Data:   ████████ 19.1GB</a:t>
-            </a:r>
-            <a:endParaRPr lang="en-US" sz="620" dirty="0"/>
-          </a:p>
-          <a:p>
-            <a:pPr indent="0" marL="0">
-              <a:buNone/>
-            </a:pPr>
-            <a:r>
-              <a:rPr lang="en-US" sz="620" dirty="0">
+              <a:t>  Data: ████████ 19.1G</a:t>
+            </a:r>
+            <a:endParaRPr lang="en-US" sz="580" dirty="0"/>
+          </a:p>
+          <a:p>
+            <a:pPr indent="0" marL="0">
+              <a:buNone/>
+            </a:pPr>
+            <a:r>
+              <a:rPr lang="en-US" sz="580" dirty="0">
                 <a:solidFill>
                   <a:srgbClr val="90B8C8"/>
                 </a:solidFill>
@@ -5132,16 +5094,16 @@
                 <a:ea typeface="Courier New" pitchFamily="34" charset="-122"/>
                 <a:cs typeface="Courier New" pitchFamily="34" charset="-120"/>
               </a:rPr>
-              <a:t>  Roaming: █████░░ 3 ctry</a:t>
-            </a:r>
-            <a:endParaRPr lang="en-US" sz="620" dirty="0"/>
-          </a:p>
-          <a:p>
-            <a:pPr indent="0" marL="0">
-              <a:buNone/>
-            </a:pPr>
-            <a:r>
-              <a:rPr lang="en-US" sz="620" dirty="0">
+              <a:t>  Roam: █████░░ 3 ctry</a:t>
+            </a:r>
+            <a:endParaRPr lang="en-US" sz="580" dirty="0"/>
+          </a:p>
+          <a:p>
+            <a:pPr indent="0" marL="0">
+              <a:buNone/>
+            </a:pPr>
+            <a:r>
+              <a:rPr lang="en-US" sz="580" dirty="0">
                 <a:solidFill>
                   <a:srgbClr val="90B8C8"/>
                 </a:solidFill>
@@ -5149,16 +5111,16 @@
                 <a:ea typeface="Courier New" pitchFamily="34" charset="-122"/>
                 <a:cs typeface="Courier New" pitchFamily="34" charset="-120"/>
               </a:rPr>
-              <a:t>  Voice:  █░░░░░░  42min</a:t>
-            </a:r>
-            <a:endParaRPr lang="en-US" sz="620" dirty="0"/>
-          </a:p>
-          <a:p>
-            <a:pPr indent="0" marL="0">
-              <a:buNone/>
-            </a:pPr>
-            <a:r>
-              <a:rPr lang="en-US" sz="620" dirty="0">
+              <a:t>  Voice: █░░░░░  42min</a:t>
+            </a:r>
+            <a:endParaRPr lang="en-US" sz="580" dirty="0"/>
+          </a:p>
+          <a:p>
+            <a:pPr indent="0" marL="0">
+              <a:buNone/>
+            </a:pPr>
+            <a:r>
+              <a:rPr lang="en-US" sz="580" dirty="0">
                 <a:solidFill>
                   <a:srgbClr val="90B8C8"/>
                 </a:solidFill>
@@ -5166,16 +5128,16 @@
                 <a:ea typeface="Courier New" pitchFamily="34" charset="-122"/>
                 <a:cs typeface="Courier New" pitchFamily="34" charset="-120"/>
               </a:rPr>
-              <a:t>─────────────────────</a:t>
-            </a:r>
-            <a:endParaRPr lang="en-US" sz="620" dirty="0"/>
-          </a:p>
-          <a:p>
-            <a:pPr indent="0" marL="0">
-              <a:buNone/>
-            </a:pPr>
-            <a:r>
-              <a:rPr lang="en-US" sz="620" dirty="0">
+              <a:t>─────────────────</a:t>
+            </a:r>
+            <a:endParaRPr lang="en-US" sz="580" dirty="0"/>
+          </a:p>
+          <a:p>
+            <a:pPr indent="0" marL="0">
+              <a:buNone/>
+            </a:pPr>
+            <a:r>
+              <a:rPr lang="en-US" sz="580" dirty="0">
                 <a:solidFill>
                   <a:srgbClr val="90B8C8"/>
                 </a:solidFill>
@@ -5183,16 +5145,16 @@
                 <a:ea typeface="Courier New" pitchFamily="34" charset="-122"/>
                 <a:cs typeface="Courier New" pitchFamily="34" charset="-120"/>
               </a:rPr>
-              <a:t>  ✦ Circles Smart 30GB</a:t>
-            </a:r>
-            <a:endParaRPr lang="en-US" sz="620" dirty="0"/>
-          </a:p>
-          <a:p>
-            <a:pPr indent="0" marL="0">
-              <a:buNone/>
-            </a:pPr>
-            <a:r>
-              <a:rPr lang="en-US" sz="620" dirty="0">
+              <a:t>  ✦ Smart 30GB AED 89</a:t>
+            </a:r>
+            <a:endParaRPr lang="en-US" sz="580" dirty="0"/>
+          </a:p>
+          <a:p>
+            <a:pPr indent="0" marL="0">
+              <a:buNone/>
+            </a:pPr>
+            <a:r>
+              <a:rPr lang="en-US" sz="580" dirty="0">
                 <a:solidFill>
                   <a:srgbClr val="90B8C8"/>
                 </a:solidFill>
@@ -5200,26 +5162,9 @@
                 <a:ea typeface="Courier New" pitchFamily="34" charset="-122"/>
                 <a:cs typeface="Courier New" pitchFamily="34" charset="-120"/>
               </a:rPr>
-              <a:t>  AED 89/mo · +10GB + Roam</a:t>
-            </a:r>
-            <a:endParaRPr lang="en-US" sz="620" dirty="0"/>
-          </a:p>
-          <a:p>
-            <a:pPr indent="0" marL="0">
-              <a:buNone/>
-            </a:pPr>
-            <a:r>
-              <a:rPr lang="en-US" sz="620" dirty="0">
-                <a:solidFill>
-                  <a:srgbClr val="90B8C8"/>
-                </a:solidFill>
-                <a:latin typeface="Courier New" pitchFamily="34" charset="0"/>
-                <a:ea typeface="Courier New" pitchFamily="34" charset="-122"/>
-                <a:cs typeface="Courier New" pitchFamily="34" charset="-120"/>
-              </a:rPr>
-              <a:t>  Fit: 62 → 94 ↑↑↑  </a:t>
-            </a:r>
-            <a:endParaRPr lang="en-US" sz="620" dirty="0"/>
+              <a:t>  Fit: 62 → 94 ↑↑↑</a:t>
+            </a:r>
+            <a:endParaRPr lang="en-US" sz="580" dirty="0"/>
           </a:p>
         </p:txBody>
       </p:sp>
@@ -5231,8 +5176,8 @@
         </p:nvSpPr>
         <p:spPr>
           <a:xfrm>
-            <a:off x="2542032" y="3931920"/>
-            <a:ext cx="1865376" cy="914400"/>
+            <a:off x="2551176" y="3310128"/>
+            <a:ext cx="1847088" cy="841248"/>
           </a:xfrm>
           <a:prstGeom prst="rect">
             <a:avLst/>
@@ -5248,7 +5193,7 @@
               <a:buNone/>
             </a:pPr>
             <a:r>
-              <a:rPr lang="en-US" sz="850" dirty="0">
+              <a:rPr lang="en-US" sz="800" dirty="0">
                 <a:solidFill>
                   <a:srgbClr val="4A6A7A"/>
                 </a:solidFill>
@@ -5256,9 +5201,9 @@
                 <a:ea typeface="Arial" pitchFamily="34" charset="-122"/>
                 <a:cs typeface="Arial" pitchFamily="34" charset="-120"/>
               </a:rPr>
-              <a:t>90-day usage breakdown with ML-scored recommendation card showing Plan Fit uplift from 62 → 94</a:t>
-            </a:r>
-            <a:endParaRPr lang="en-US" sz="850" dirty="0"/>
+              <a:t>90-day usage breakdown + ML recommendation card showing Plan Fit uplift 62→94</a:t>
+            </a:r>
+            <a:endParaRPr lang="en-US" sz="800" dirty="0"/>
           </a:p>
         </p:txBody>
       </p:sp>
@@ -5270,12 +5215,12 @@
         </p:nvSpPr>
         <p:spPr>
           <a:xfrm>
-            <a:off x="4617720" y="1325880"/>
-            <a:ext cx="2011680" cy="3657600"/>
+            <a:off x="4608576" y="987552"/>
+            <a:ext cx="1993392" cy="3931920"/>
           </a:xfrm>
           <a:prstGeom prst="roundRect">
             <a:avLst>
-              <a:gd name="adj" fmla="val 5455"/>
+              <a:gd name="adj" fmla="val 5505"/>
             </a:avLst>
           </a:prstGeom>
           <a:solidFill>
@@ -5299,8 +5244,8 @@
         </p:nvSpPr>
         <p:spPr>
           <a:xfrm>
-            <a:off x="4617720" y="1444752"/>
-            <a:ext cx="2011680" cy="320040"/>
+            <a:off x="4608576" y="1078992"/>
+            <a:ext cx="1993392" cy="274320"/>
           </a:xfrm>
           <a:prstGeom prst="rect">
             <a:avLst/>
@@ -5316,14 +5261,14 @@
               <a:buNone/>
             </a:pPr>
             <a:r>
-              <a:rPr lang="en-US" sz="1100" b="1" dirty="0">
+              <a:rPr lang="en-US" sz="1000" b="1" dirty="0">
                 <a:solidFill>
                   <a:srgbClr val="00C6FF"/>
                 </a:solidFill>
               </a:rPr>
               <a:t>03</a:t>
             </a:r>
-            <a:endParaRPr lang="en-US" sz="1100" dirty="0"/>
+            <a:endParaRPr lang="en-US" sz="1000" dirty="0"/>
           </a:p>
         </p:txBody>
       </p:sp>
@@ -5335,8 +5280,8 @@
         </p:nvSpPr>
         <p:spPr>
           <a:xfrm>
-            <a:off x="4690872" y="1783080"/>
-            <a:ext cx="1865376" cy="320040"/>
+            <a:off x="4681728" y="1371600"/>
+            <a:ext cx="1847088" cy="274320"/>
           </a:xfrm>
           <a:prstGeom prst="rect">
             <a:avLst/>
@@ -5352,7 +5297,7 @@
               <a:buNone/>
             </a:pPr>
             <a:r>
-              <a:rPr lang="en-US" sz="1050" b="1" dirty="0">
+              <a:rPr lang="en-US" sz="950" b="1" dirty="0">
                 <a:solidFill>
                   <a:srgbClr val="FFFFFF"/>
                 </a:solidFill>
@@ -5360,9 +5305,9 @@
                 <a:ea typeface="Arial" pitchFamily="34" charset="-122"/>
                 <a:cs typeface="Arial" pitchFamily="34" charset="-120"/>
               </a:rPr>
-              <a:t>Plan Switch Confirmed</a:t>
-            </a:r>
-            <a:endParaRPr lang="en-US" sz="1050" dirty="0"/>
+              <a:t>Switch Confirmed</a:t>
+            </a:r>
+            <a:endParaRPr lang="en-US" sz="950" dirty="0"/>
           </a:p>
         </p:txBody>
       </p:sp>
@@ -5374,12 +5319,12 @@
         </p:nvSpPr>
         <p:spPr>
           <a:xfrm>
-            <a:off x="4727448" y="2176272"/>
-            <a:ext cx="1792224" cy="1691640"/>
+            <a:off x="4718304" y="1700784"/>
+            <a:ext cx="1773936" cy="1554480"/>
           </a:xfrm>
           <a:prstGeom prst="roundRect">
             <a:avLst>
-              <a:gd name="adj" fmla="val 3243"/>
+              <a:gd name="adj" fmla="val 3529"/>
             </a:avLst>
           </a:prstGeom>
           <a:solidFill>
@@ -5401,8 +5346,8 @@
         </p:nvSpPr>
         <p:spPr>
           <a:xfrm>
-            <a:off x="4745736" y="2212848"/>
-            <a:ext cx="1755648" cy="1627632"/>
+            <a:off x="4736592" y="1737360"/>
+            <a:ext cx="1737360" cy="1481328"/>
           </a:xfrm>
           <a:prstGeom prst="rect">
             <a:avLst/>
@@ -5418,7 +5363,7 @@
               <a:buNone/>
             </a:pPr>
             <a:r>
-              <a:rPr lang="en-US" sz="620" dirty="0">
+              <a:rPr lang="en-US" sz="580" dirty="0">
                 <a:solidFill>
                   <a:srgbClr val="90B8C8"/>
                 </a:solidFill>
@@ -5426,16 +5371,16 @@
                 <a:ea typeface="Courier New" pitchFamily="34" charset="-122"/>
                 <a:cs typeface="Courier New" pitchFamily="34" charset="-120"/>
               </a:rPr>
-              <a:t>  🎉 Plan Switched!    </a:t>
-            </a:r>
-            <a:endParaRPr lang="en-US" sz="620" dirty="0"/>
-          </a:p>
-          <a:p>
-            <a:pPr indent="0" marL="0">
-              <a:buNone/>
-            </a:pPr>
-            <a:r>
-              <a:rPr lang="en-US" sz="620" dirty="0">
+              <a:t>  🎉 Plan Switched!</a:t>
+            </a:r>
+            <a:endParaRPr lang="en-US" sz="580" dirty="0"/>
+          </a:p>
+          <a:p>
+            <a:pPr indent="0" marL="0">
+              <a:buNone/>
+            </a:pPr>
+            <a:r>
+              <a:rPr lang="en-US" sz="580" dirty="0">
                 <a:solidFill>
                   <a:srgbClr val="90B8C8"/>
                 </a:solidFill>
@@ -5443,16 +5388,16 @@
                 <a:ea typeface="Courier New" pitchFamily="34" charset="-122"/>
                 <a:cs typeface="Courier New" pitchFamily="34" charset="-120"/>
               </a:rPr>
-              <a:t>─────────────────────</a:t>
-            </a:r>
-            <a:endParaRPr lang="en-US" sz="620" dirty="0"/>
-          </a:p>
-          <a:p>
-            <a:pPr indent="0" marL="0">
-              <a:buNone/>
-            </a:pPr>
-            <a:r>
-              <a:rPr lang="en-US" sz="620" dirty="0">
+              <a:t>─────────────────</a:t>
+            </a:r>
+            <a:endParaRPr lang="en-US" sz="580" dirty="0"/>
+          </a:p>
+          <a:p>
+            <a:pPr indent="0" marL="0">
+              <a:buNone/>
+            </a:pPr>
+            <a:r>
+              <a:rPr lang="en-US" sz="580" dirty="0">
                 <a:solidFill>
                   <a:srgbClr val="90B8C8"/>
                 </a:solidFill>
@@ -5460,16 +5405,16 @@
                 <a:ea typeface="Courier New" pitchFamily="34" charset="-122"/>
                 <a:cs typeface="Courier New" pitchFamily="34" charset="-120"/>
               </a:rPr>
-              <a:t>  Circles Smart 30GB  </a:t>
-            </a:r>
-            <a:endParaRPr lang="en-US" sz="620" dirty="0"/>
-          </a:p>
-          <a:p>
-            <a:pPr indent="0" marL="0">
-              <a:buNone/>
-            </a:pPr>
-            <a:r>
-              <a:rPr lang="en-US" sz="620" dirty="0">
+              <a:t>  Circles Smart 30GB</a:t>
+            </a:r>
+            <a:endParaRPr lang="en-US" sz="580" dirty="0"/>
+          </a:p>
+          <a:p>
+            <a:pPr indent="0" marL="0">
+              <a:buNone/>
+            </a:pPr>
+            <a:r>
+              <a:rPr lang="en-US" sz="580" dirty="0">
                 <a:solidFill>
                   <a:srgbClr val="90B8C8"/>
                 </a:solidFill>
@@ -5477,16 +5422,16 @@
                 <a:ea typeface="Courier New" pitchFamily="34" charset="-122"/>
                 <a:cs typeface="Courier New" pitchFamily="34" charset="-120"/>
               </a:rPr>
-              <a:t>  activates midnight  </a:t>
-            </a:r>
-            <a:endParaRPr lang="en-US" sz="620" dirty="0"/>
-          </a:p>
-          <a:p>
-            <a:pPr indent="0" marL="0">
-              <a:buNone/>
-            </a:pPr>
-            <a:r>
-              <a:rPr lang="en-US" sz="620" dirty="0">
+              <a:t>  Activates midnight</a:t>
+            </a:r>
+            <a:endParaRPr lang="en-US" sz="580" dirty="0"/>
+          </a:p>
+          <a:p>
+            <a:pPr indent="0" marL="0">
+              <a:buNone/>
+            </a:pPr>
+            <a:r>
+              <a:rPr lang="en-US" sz="580" dirty="0">
                 <a:solidFill>
                   <a:srgbClr val="90B8C8"/>
                 </a:solidFill>
@@ -5494,16 +5439,16 @@
                 <a:ea typeface="Courier New" pitchFamily="34" charset="-122"/>
                 <a:cs typeface="Courier New" pitchFamily="34" charset="-120"/>
               </a:rPr>
-              <a:t>─────────────────────</a:t>
-            </a:r>
-            <a:endParaRPr lang="en-US" sz="620" dirty="0"/>
-          </a:p>
-          <a:p>
-            <a:pPr indent="0" marL="0">
-              <a:buNone/>
-            </a:pPr>
-            <a:r>
-              <a:rPr lang="en-US" sz="620" dirty="0">
+              <a:t>─────────────────</a:t>
+            </a:r>
+            <a:endParaRPr lang="en-US" sz="580" dirty="0"/>
+          </a:p>
+          <a:p>
+            <a:pPr indent="0" marL="0">
+              <a:buNone/>
+            </a:pPr>
+            <a:r>
+              <a:rPr lang="en-US" sz="580" dirty="0">
                 <a:solidFill>
                   <a:srgbClr val="90B8C8"/>
                 </a:solidFill>
@@ -5511,16 +5456,16 @@
                 <a:ea typeface="Courier New" pitchFamily="34" charset="-122"/>
                 <a:cs typeface="Courier New" pitchFamily="34" charset="-120"/>
               </a:rPr>
-              <a:t>  Data    20GB → 30GB </a:t>
-            </a:r>
-            <a:endParaRPr lang="en-US" sz="620" dirty="0"/>
-          </a:p>
-          <a:p>
-            <a:pPr indent="0" marL="0">
-              <a:buNone/>
-            </a:pPr>
-            <a:r>
-              <a:rPr lang="en-US" sz="620" dirty="0">
+              <a:t>  Data    20→30 GB ↑</a:t>
+            </a:r>
+            <a:endParaRPr lang="en-US" sz="580" dirty="0"/>
+          </a:p>
+          <a:p>
+            <a:pPr indent="0" marL="0">
+              <a:buNone/>
+            </a:pPr>
+            <a:r>
+              <a:rPr lang="en-US" sz="580" dirty="0">
                 <a:solidFill>
                   <a:srgbClr val="90B8C8"/>
                 </a:solidFill>
@@ -5528,16 +5473,16 @@
                 <a:ea typeface="Courier New" pitchFamily="34" charset="-122"/>
                 <a:cs typeface="Courier New" pitchFamily="34" charset="-120"/>
               </a:rPr>
-              <a:t>  Roaming   No → 10ct </a:t>
-            </a:r>
-            <a:endParaRPr lang="en-US" sz="620" dirty="0"/>
-          </a:p>
-          <a:p>
-            <a:pPr indent="0" marL="0">
-              <a:buNone/>
-            </a:pPr>
-            <a:r>
-              <a:rPr lang="en-US" sz="620" dirty="0">
+              <a:t>  Roaming  No→10ct ↑</a:t>
+            </a:r>
+            <a:endParaRPr lang="en-US" sz="580" dirty="0"/>
+          </a:p>
+          <a:p>
+            <a:pPr indent="0" marL="0">
+              <a:buNone/>
+            </a:pPr>
+            <a:r>
+              <a:rPr lang="en-US" sz="580" dirty="0">
                 <a:solidFill>
                   <a:srgbClr val="90B8C8"/>
                 </a:solidFill>
@@ -5545,16 +5490,16 @@
                 <a:ea typeface="Courier New" pitchFamily="34" charset="-122"/>
                 <a:cs typeface="Courier New" pitchFamily="34" charset="-120"/>
               </a:rPr>
-              <a:t>  Cost  AED 89 → 89 ✓ </a:t>
-            </a:r>
-            <a:endParaRPr lang="en-US" sz="620" dirty="0"/>
-          </a:p>
-          <a:p>
-            <a:pPr indent="0" marL="0">
-              <a:buNone/>
-            </a:pPr>
-            <a:r>
-              <a:rPr lang="en-US" sz="620" dirty="0">
+              <a:t>  Cost  AED 89→89 ✓</a:t>
+            </a:r>
+            <a:endParaRPr lang="en-US" sz="580" dirty="0"/>
+          </a:p>
+          <a:p>
+            <a:pPr indent="0" marL="0">
+              <a:buNone/>
+            </a:pPr>
+            <a:r>
+              <a:rPr lang="en-US" sz="580" dirty="0">
                 <a:solidFill>
                   <a:srgbClr val="90B8C8"/>
                 </a:solidFill>
@@ -5562,26 +5507,9 @@
                 <a:ea typeface="Courier New" pitchFamily="34" charset="-122"/>
                 <a:cs typeface="Courier New" pitchFamily="34" charset="-120"/>
               </a:rPr>
-              <a:t>  Fit Score 62 → 94 ✓ </a:t>
-            </a:r>
-            <a:endParaRPr lang="en-US" sz="620" dirty="0"/>
-          </a:p>
-          <a:p>
-            <a:pPr indent="0" marL="0">
-              <a:buNone/>
-            </a:pPr>
-            <a:r>
-              <a:rPr lang="en-US" sz="620" dirty="0">
-                <a:solidFill>
-                  <a:srgbClr val="90B8C8"/>
-                </a:solidFill>
-                <a:latin typeface="Courier New" pitchFamily="34" charset="0"/>
-                <a:ea typeface="Courier New" pitchFamily="34" charset="-122"/>
-                <a:cs typeface="Courier New" pitchFamily="34" charset="-120"/>
-              </a:rPr>
-              <a:t>  [← Back to Home]   </a:t>
-            </a:r>
-            <a:endParaRPr lang="en-US" sz="620" dirty="0"/>
+              <a:t>  Fit    62→94/100 ✓</a:t>
+            </a:r>
+            <a:endParaRPr lang="en-US" sz="580" dirty="0"/>
           </a:p>
         </p:txBody>
       </p:sp>
@@ -5593,8 +5521,8 @@
         </p:nvSpPr>
         <p:spPr>
           <a:xfrm>
-            <a:off x="4690872" y="3931920"/>
-            <a:ext cx="1865376" cy="914400"/>
+            <a:off x="4681728" y="3310128"/>
+            <a:ext cx="1847088" cy="841248"/>
           </a:xfrm>
           <a:prstGeom prst="rect">
             <a:avLst/>
@@ -5610,7 +5538,7 @@
               <a:buNone/>
             </a:pPr>
             <a:r>
-              <a:rPr lang="en-US" sz="850" dirty="0">
+              <a:rPr lang="en-US" sz="800" dirty="0">
                 <a:solidFill>
                   <a:srgbClr val="4A6A7A"/>
                 </a:solidFill>
@@ -5618,9 +5546,9 @@
                 <a:ea typeface="Arial" pitchFamily="34" charset="-122"/>
                 <a:cs typeface="Arial" pitchFamily="34" charset="-120"/>
               </a:rPr>
-              <a:t>Confetti celebration + before/after comparison showing zero price change with 10GB uplift and free roaming</a:t>
-            </a:r>
-            <a:endParaRPr lang="en-US" sz="850" dirty="0"/>
+              <a:t>Confetti + before/after: +10GB, free roaming, same price, Plan Fit 94/100</a:t>
+            </a:r>
+            <a:endParaRPr lang="en-US" sz="800" dirty="0"/>
           </a:p>
         </p:txBody>
       </p:sp>
@@ -5632,12 +5560,12 @@
         </p:nvSpPr>
         <p:spPr>
           <a:xfrm>
-            <a:off x="6766560" y="1325880"/>
-            <a:ext cx="2011680" cy="3657600"/>
+            <a:off x="6739128" y="987552"/>
+            <a:ext cx="1993392" cy="3931920"/>
           </a:xfrm>
           <a:prstGeom prst="roundRect">
             <a:avLst>
-              <a:gd name="adj" fmla="val 5455"/>
+              <a:gd name="adj" fmla="val 5505"/>
             </a:avLst>
           </a:prstGeom>
           <a:solidFill>
@@ -5661,8 +5589,8 @@
         </p:nvSpPr>
         <p:spPr>
           <a:xfrm>
-            <a:off x="6766560" y="1444752"/>
-            <a:ext cx="2011680" cy="320040"/>
+            <a:off x="6739128" y="1078992"/>
+            <a:ext cx="1993392" cy="274320"/>
           </a:xfrm>
           <a:prstGeom prst="rect">
             <a:avLst/>
@@ -5678,14 +5606,14 @@
               <a:buNone/>
             </a:pPr>
             <a:r>
-              <a:rPr lang="en-US" sz="1100" b="1" dirty="0">
+              <a:rPr lang="en-US" sz="1000" b="1" dirty="0">
                 <a:solidFill>
                   <a:srgbClr val="00C6FF"/>
                 </a:solidFill>
               </a:rPr>
               <a:t>04</a:t>
             </a:r>
-            <a:endParaRPr lang="en-US" sz="1100" dirty="0"/>
+            <a:endParaRPr lang="en-US" sz="1000" dirty="0"/>
           </a:p>
         </p:txBody>
       </p:sp>
@@ -5697,8 +5625,8 @@
         </p:nvSpPr>
         <p:spPr>
           <a:xfrm>
-            <a:off x="6839712" y="1783080"/>
-            <a:ext cx="1865376" cy="320040"/>
+            <a:off x="6812280" y="1371600"/>
+            <a:ext cx="1847088" cy="274320"/>
           </a:xfrm>
           <a:prstGeom prst="rect">
             <a:avLst/>
@@ -5714,7 +5642,7 @@
               <a:buNone/>
             </a:pPr>
             <a:r>
-              <a:rPr lang="en-US" sz="1050" b="1" dirty="0">
+              <a:rPr lang="en-US" sz="950" b="1" dirty="0">
                 <a:solidFill>
                   <a:srgbClr val="FFFFFF"/>
                 </a:solidFill>
@@ -5724,7 +5652,7 @@
               </a:rPr>
               <a:t>Ops Intelligence</a:t>
             </a:r>
-            <a:endParaRPr lang="en-US" sz="1050" dirty="0"/>
+            <a:endParaRPr lang="en-US" sz="950" dirty="0"/>
           </a:p>
         </p:txBody>
       </p:sp>
@@ -5736,12 +5664,12 @@
         </p:nvSpPr>
         <p:spPr>
           <a:xfrm>
-            <a:off x="6876288" y="2176272"/>
-            <a:ext cx="1792224" cy="1691640"/>
+            <a:off x="6848856" y="1700784"/>
+            <a:ext cx="1773936" cy="1554480"/>
           </a:xfrm>
           <a:prstGeom prst="roundRect">
             <a:avLst>
-              <a:gd name="adj" fmla="val 3243"/>
+              <a:gd name="adj" fmla="val 3529"/>
             </a:avLst>
           </a:prstGeom>
           <a:solidFill>
@@ -5763,8 +5691,8 @@
         </p:nvSpPr>
         <p:spPr>
           <a:xfrm>
-            <a:off x="6894576" y="2212848"/>
-            <a:ext cx="1755648" cy="1627632"/>
+            <a:off x="6867144" y="1737360"/>
+            <a:ext cx="1737360" cy="1481328"/>
           </a:xfrm>
           <a:prstGeom prst="rect">
             <a:avLst/>
@@ -5780,7 +5708,7 @@
               <a:buNone/>
             </a:pPr>
             <a:r>
-              <a:rPr lang="en-US" sz="620" dirty="0">
+              <a:rPr lang="en-US" sz="580" dirty="0">
                 <a:solidFill>
                   <a:srgbClr val="90B8C8"/>
                 </a:solidFill>
@@ -5788,16 +5716,16 @@
                 <a:ea typeface="Courier New" pitchFamily="34" charset="-122"/>
                 <a:cs typeface="Courier New" pitchFamily="34" charset="-120"/>
               </a:rPr>
-              <a:t>SmartPlan Intelligence</a:t>
-            </a:r>
-            <a:endParaRPr lang="en-US" sz="620" dirty="0"/>
-          </a:p>
-          <a:p>
-            <a:pPr indent="0" marL="0">
-              <a:buNone/>
-            </a:pPr>
-            <a:r>
-              <a:rPr lang="en-US" sz="620" dirty="0">
+              <a:t>SmartPlan Intel</a:t>
+            </a:r>
+            <a:endParaRPr lang="en-US" sz="580" dirty="0"/>
+          </a:p>
+          <a:p>
+            <a:pPr indent="0" marL="0">
+              <a:buNone/>
+            </a:pPr>
+            <a:r>
+              <a:rPr lang="en-US" sz="580" dirty="0">
                 <a:solidFill>
                   <a:srgbClr val="90B8C8"/>
                 </a:solidFill>
@@ -5805,16 +5733,16 @@
                 <a:ea typeface="Courier New" pitchFamily="34" charset="-122"/>
                 <a:cs typeface="Courier New" pitchFamily="34" charset="-120"/>
               </a:rPr>
-              <a:t>─────────────────────</a:t>
-            </a:r>
-            <a:endParaRPr lang="en-US" sz="620" dirty="0"/>
-          </a:p>
-          <a:p>
-            <a:pPr indent="0" marL="0">
-              <a:buNone/>
-            </a:pPr>
-            <a:r>
-              <a:rPr lang="en-US" sz="620" dirty="0">
+              <a:t>─────────────────</a:t>
+            </a:r>
+            <a:endParaRPr lang="en-US" sz="580" dirty="0"/>
+          </a:p>
+          <a:p>
+            <a:pPr indent="0" marL="0">
+              <a:buNone/>
+            </a:pPr>
+            <a:r>
+              <a:rPr lang="en-US" sz="580" dirty="0">
                 <a:solidFill>
                   <a:srgbClr val="90B8C8"/>
                 </a:solidFill>
@@ -5822,16 +5750,16 @@
                 <a:ea typeface="Courier New" pitchFamily="34" charset="-122"/>
                 <a:cs typeface="Courier New" pitchFamily="34" charset="-120"/>
               </a:rPr>
-              <a:t> Mismatch: 34% ⚠ +4pp</a:t>
-            </a:r>
-            <a:endParaRPr lang="en-US" sz="620" dirty="0"/>
-          </a:p>
-          <a:p>
-            <a:pPr indent="0" marL="0">
-              <a:buNone/>
-            </a:pPr>
-            <a:r>
-              <a:rPr lang="en-US" sz="620" dirty="0">
+              <a:t> Mismatch  34% ⚠</a:t>
+            </a:r>
+            <a:endParaRPr lang="en-US" sz="580" dirty="0"/>
+          </a:p>
+          <a:p>
+            <a:pPr indent="0" marL="0">
+              <a:buNone/>
+            </a:pPr>
+            <a:r>
+              <a:rPr lang="en-US" sz="580" dirty="0">
                 <a:solidFill>
                   <a:srgbClr val="90B8C8"/>
                 </a:solidFill>
@@ -5839,16 +5767,16 @@
                 <a:ea typeface="Courier New" pitchFamily="34" charset="-122"/>
                 <a:cs typeface="Courier New" pitchFamily="34" charset="-120"/>
               </a:rPr>
-              <a:t> Churn Risk: 3.2× ⚠ </a:t>
-            </a:r>
-            <a:endParaRPr lang="en-US" sz="620" dirty="0"/>
-          </a:p>
-          <a:p>
-            <a:pPr indent="0" marL="0">
-              <a:buNone/>
-            </a:pPr>
-            <a:r>
-              <a:rPr lang="en-US" sz="620" dirty="0">
+              <a:t> Churn Risk 3.2× ⚠</a:t>
+            </a:r>
+            <a:endParaRPr lang="en-US" sz="580" dirty="0"/>
+          </a:p>
+          <a:p>
+            <a:pPr indent="0" marL="0">
+              <a:buNone/>
+            </a:pPr>
+            <a:r>
+              <a:rPr lang="en-US" sz="580" dirty="0">
                 <a:solidFill>
                   <a:srgbClr val="90B8C8"/>
                 </a:solidFill>
@@ -5856,16 +5784,16 @@
                 <a:ea typeface="Courier New" pitchFamily="34" charset="-122"/>
                 <a:cs typeface="Courier New" pitchFamily="34" charset="-120"/>
               </a:rPr>
-              <a:t> Avg Fit Score: 62   </a:t>
-            </a:r>
-            <a:endParaRPr lang="en-US" sz="620" dirty="0"/>
-          </a:p>
-          <a:p>
-            <a:pPr indent="0" marL="0">
-              <a:buNone/>
-            </a:pPr>
-            <a:r>
-              <a:rPr lang="en-US" sz="620" dirty="0">
+              <a:t> Avg Fit Score: 62</a:t>
+            </a:r>
+            <a:endParaRPr lang="en-US" sz="580" dirty="0"/>
+          </a:p>
+          <a:p>
+            <a:pPr indent="0" marL="0">
+              <a:buNone/>
+            </a:pPr>
+            <a:r>
+              <a:rPr lang="en-US" sz="580" dirty="0">
                 <a:solidFill>
                   <a:srgbClr val="90B8C8"/>
                 </a:solidFill>
@@ -5873,16 +5801,16 @@
                 <a:ea typeface="Courier New" pitchFamily="34" charset="-122"/>
                 <a:cs typeface="Courier New" pitchFamily="34" charset="-120"/>
               </a:rPr>
-              <a:t>─────────────────────</a:t>
-            </a:r>
-            <a:endParaRPr lang="en-US" sz="620" dirty="0"/>
-          </a:p>
-          <a:p>
-            <a:pPr indent="0" marL="0">
-              <a:buNone/>
-            </a:pPr>
-            <a:r>
-              <a:rPr lang="en-US" sz="620" dirty="0">
+              <a:t>─────────────────</a:t>
+            </a:r>
+            <a:endParaRPr lang="en-US" sz="580" dirty="0"/>
+          </a:p>
+          <a:p>
+            <a:pPr indent="0" marL="0">
+              <a:buNone/>
+            </a:pPr>
+            <a:r>
+              <a:rPr lang="en-US" sz="580" dirty="0">
                 <a:solidFill>
                   <a:srgbClr val="90B8C8"/>
                 </a:solidFill>
@@ -5890,16 +5818,16 @@
                 <a:ea typeface="Courier New" pitchFamily="34" charset="-122"/>
                 <a:cs typeface="Courier New" pitchFamily="34" charset="-120"/>
               </a:rPr>
-              <a:t> Data Overage   8,420</a:t>
-            </a:r>
-            <a:endParaRPr lang="en-US" sz="620" dirty="0"/>
-          </a:p>
-          <a:p>
-            <a:pPr indent="0" marL="0">
-              <a:buNone/>
-            </a:pPr>
-            <a:r>
-              <a:rPr lang="en-US" sz="620" dirty="0">
+              <a:t> Overage  8,420 usr</a:t>
+            </a:r>
+            <a:endParaRPr lang="en-US" sz="580" dirty="0"/>
+          </a:p>
+          <a:p>
+            <a:pPr indent="0" marL="0">
+              <a:buNone/>
+            </a:pPr>
+            <a:r>
+              <a:rPr lang="en-US" sz="580" dirty="0">
                 <a:solidFill>
                   <a:srgbClr val="90B8C8"/>
                 </a:solidFill>
@@ -5907,16 +5835,16 @@
                 <a:ea typeface="Courier New" pitchFamily="34" charset="-122"/>
                 <a:cs typeface="Courier New" pitchFamily="34" charset="-120"/>
               </a:rPr>
-              <a:t> Unused Add-ons 12.3K</a:t>
-            </a:r>
-            <a:endParaRPr lang="en-US" sz="620" dirty="0"/>
-          </a:p>
-          <a:p>
-            <a:pPr indent="0" marL="0">
-              <a:buNone/>
-            </a:pPr>
-            <a:r>
-              <a:rPr lang="en-US" sz="620" dirty="0">
+              <a:t> Unused  12,300 usr</a:t>
+            </a:r>
+            <a:endParaRPr lang="en-US" sz="580" dirty="0"/>
+          </a:p>
+          <a:p>
+            <a:pPr indent="0" marL="0">
+              <a:buNone/>
+            </a:pPr>
+            <a:r>
+              <a:rPr lang="en-US" sz="580" dirty="0">
                 <a:solidFill>
                   <a:srgbClr val="90B8C8"/>
                 </a:solidFill>
@@ -5924,26 +5852,9 @@
                 <a:ea typeface="Courier New" pitchFamily="34" charset="-122"/>
                 <a:cs typeface="Courier New" pitchFamily="34" charset="-120"/>
               </a:rPr>
-              <a:t> Travel Cands    3.8K</a:t>
-            </a:r>
-            <a:endParaRPr lang="en-US" sz="620" dirty="0"/>
-          </a:p>
-          <a:p>
-            <a:pPr indent="0" marL="0">
-              <a:buNone/>
-            </a:pPr>
-            <a:r>
-              <a:rPr lang="en-US" sz="620" dirty="0">
-                <a:solidFill>
-                  <a:srgbClr val="90B8C8"/>
-                </a:solidFill>
-                <a:latin typeface="Courier New" pitchFamily="34" charset="0"/>
-                <a:ea typeface="Courier New" pitchFamily="34" charset="-122"/>
-                <a:cs typeface="Courier New" pitchFamily="34" charset="-120"/>
-              </a:rPr>
-              <a:t> ARPU at Risk AED 2.1M</a:t>
-            </a:r>
-            <a:endParaRPr lang="en-US" sz="620" dirty="0"/>
+              <a:t> ARPU@Risk AED 2.1M</a:t>
+            </a:r>
+            <a:endParaRPr lang="en-US" sz="580" dirty="0"/>
           </a:p>
         </p:txBody>
       </p:sp>
@@ -5955,8 +5866,8 @@
         </p:nvSpPr>
         <p:spPr>
           <a:xfrm>
-            <a:off x="6839712" y="3931920"/>
-            <a:ext cx="1865376" cy="914400"/>
+            <a:off x="6812280" y="3310128"/>
+            <a:ext cx="1847088" cy="841248"/>
           </a:xfrm>
           <a:prstGeom prst="rect">
             <a:avLst/>
@@ -5972,7 +5883,7 @@
               <a:buNone/>
             </a:pPr>
             <a:r>
-              <a:rPr lang="en-US" sz="850" dirty="0">
+              <a:rPr lang="en-US" sz="800" dirty="0">
                 <a:solidFill>
                   <a:srgbClr val="4A6A7A"/>
                 </a:solidFill>
@@ -5980,9 +5891,9 @@
                 <a:ea typeface="Arial" pitchFamily="34" charset="-122"/>
                 <a:cs typeface="Arial" pitchFamily="34" charset="-120"/>
               </a:rPr>
-              <a:t>PM dashboard: plan mismatch cohorts, ARPU at risk (AED 2.1M), churn risk segments, one-click nudge launcher</a:t>
-            </a:r>
-            <a:endParaRPr lang="en-US" sz="850" dirty="0"/>
+              <a:t>PM view: mismatch cohorts, ARPU at risk (AED 2.1M), churn segments, nudge launcher</a:t>
+            </a:r>
+            <a:endParaRPr lang="en-US" sz="800" dirty="0"/>
           </a:p>
         </p:txBody>
       </p:sp>
@@ -6026,31 +5937,31 @@
         </p:nvSpPr>
         <p:spPr>
           <a:xfrm>
-            <a:off x="457200" y="320040"/>
-            <a:ext cx="8229600" cy="228600"/>
-          </a:xfrm>
-          <a:prstGeom prst="rect">
-            <a:avLst/>
-          </a:prstGeom>
-          <a:noFill/>
-          <a:ln/>
-        </p:spPr>
-        <p:txBody>
-          <a:bodyPr wrap="square" rtlCol="0" anchor="ctr"/>
-          <a:lstStyle/>
-          <a:p>
-            <a:pPr indent="0" marL="0">
-              <a:buNone/>
-            </a:pPr>
-            <a:r>
-              <a:rPr lang="en-US" sz="900" b="1" dirty="0">
+            <a:off x="457200" y="201168"/>
+            <a:ext cx="8229600" cy="201168"/>
+          </a:xfrm>
+          <a:prstGeom prst="rect">
+            <a:avLst/>
+          </a:prstGeom>
+          <a:noFill/>
+          <a:ln/>
+        </p:spPr>
+        <p:txBody>
+          <a:bodyPr wrap="square" rtlCol="0" anchor="ctr"/>
+          <a:lstStyle/>
+          <a:p>
+            <a:pPr indent="0" marL="0">
+              <a:buNone/>
+            </a:pPr>
+            <a:r>
+              <a:rPr lang="en-US" sz="800" b="1" dirty="0">
                 <a:solidFill>
                   <a:srgbClr val="00C6FF"/>
                 </a:solidFill>
               </a:rPr>
               <a:t>IMPACT &amp; ROI</a:t>
             </a:r>
-            <a:endParaRPr lang="en-US" sz="900" dirty="0"/>
+            <a:endParaRPr lang="en-US" sz="800" dirty="0"/>
           </a:p>
         </p:txBody>
       </p:sp>
@@ -6062,24 +5973,24 @@
         </p:nvSpPr>
         <p:spPr>
           <a:xfrm>
-            <a:off x="457200" y="594360"/>
-            <a:ext cx="8229600" cy="502920"/>
-          </a:xfrm>
-          <a:prstGeom prst="rect">
-            <a:avLst/>
-          </a:prstGeom>
-          <a:noFill/>
-          <a:ln/>
-        </p:spPr>
-        <p:txBody>
-          <a:bodyPr wrap="square" rtlCol="0" anchor="ctr"/>
-          <a:lstStyle/>
-          <a:p>
-            <a:pPr indent="0" marL="0">
-              <a:buNone/>
-            </a:pPr>
-            <a:r>
-              <a:rPr lang="en-US" sz="2800" b="1" dirty="0">
+            <a:off x="457200" y="420624"/>
+            <a:ext cx="8229600" cy="475488"/>
+          </a:xfrm>
+          <a:prstGeom prst="rect">
+            <a:avLst/>
+          </a:prstGeom>
+          <a:noFill/>
+          <a:ln/>
+        </p:spPr>
+        <p:txBody>
+          <a:bodyPr wrap="square" rtlCol="0" anchor="ctr"/>
+          <a:lstStyle/>
+          <a:p>
+            <a:pPr indent="0" marL="0">
+              <a:buNone/>
+            </a:pPr>
+            <a:r>
+              <a:rPr lang="en-US" sz="2200" b="1" dirty="0">
                 <a:solidFill>
                   <a:srgbClr val="FFFFFF"/>
                 </a:solidFill>
@@ -6089,7 +6000,7 @@
               </a:rPr>
               <a:t>Projected Impact — Built on PhonePe Proof Points</a:t>
             </a:r>
-            <a:endParaRPr lang="en-US" sz="2800" dirty="0"/>
+            <a:endParaRPr lang="en-US" sz="2200" dirty="0"/>
           </a:p>
         </p:txBody>
       </p:sp>
@@ -6101,12 +6012,12 @@
         </p:nvSpPr>
         <p:spPr>
           <a:xfrm>
-            <a:off x="365760" y="1325880"/>
-            <a:ext cx="3977640" cy="365760"/>
+            <a:off x="365760" y="1005840"/>
+            <a:ext cx="3977640" cy="292608"/>
           </a:xfrm>
           <a:prstGeom prst="roundRect">
             <a:avLst>
-              <a:gd name="adj" fmla="val 12500"/>
+              <a:gd name="adj" fmla="val 15625"/>
             </a:avLst>
           </a:prstGeom>
           <a:solidFill>
@@ -6130,8 +6041,8 @@
         </p:nvSpPr>
         <p:spPr>
           <a:xfrm>
-            <a:off x="365760" y="1325880"/>
-            <a:ext cx="3977640" cy="365760"/>
+            <a:off x="365760" y="1005840"/>
+            <a:ext cx="3977640" cy="292608"/>
           </a:xfrm>
           <a:prstGeom prst="rect">
             <a:avLst/>
@@ -6147,14 +6058,14 @@
               <a:buNone/>
             </a:pPr>
             <a:r>
-              <a:rPr lang="en-US" sz="900" b="1" dirty="0">
+              <a:rPr lang="en-US" sz="800" b="1" dirty="0">
                 <a:solidFill>
                   <a:srgbClr val="00C6FF"/>
                 </a:solidFill>
               </a:rPr>
               <a:t>SUBSCRIBER IMPACT</a:t>
             </a:r>
-            <a:endParaRPr lang="en-US" sz="900" dirty="0"/>
+            <a:endParaRPr lang="en-US" sz="800" dirty="0"/>
           </a:p>
         </p:txBody>
       </p:sp>
@@ -6166,12 +6077,12 @@
         </p:nvSpPr>
         <p:spPr>
           <a:xfrm>
-            <a:off x="365760" y="1828800"/>
-            <a:ext cx="3977640" cy="713232"/>
+            <a:off x="365760" y="1389888"/>
+            <a:ext cx="3977640" cy="603504"/>
           </a:xfrm>
           <a:prstGeom prst="roundRect">
             <a:avLst>
-              <a:gd name="adj" fmla="val 10256"/>
+              <a:gd name="adj" fmla="val 12121"/>
             </a:avLst>
           </a:prstGeom>
           <a:solidFill>
@@ -6193,8 +6104,8 @@
         </p:nvSpPr>
         <p:spPr>
           <a:xfrm>
-            <a:off x="502920" y="1874520"/>
-            <a:ext cx="1188720" cy="621792"/>
+            <a:off x="457200" y="1426464"/>
+            <a:ext cx="1188720" cy="530352"/>
           </a:xfrm>
           <a:prstGeom prst="rect">
             <a:avLst/>
@@ -6210,7 +6121,7 @@
               <a:buNone/>
             </a:pPr>
             <a:r>
-              <a:rPr lang="en-US" sz="2200" b="1" dirty="0">
+              <a:rPr lang="en-US" sz="1800" b="1" dirty="0">
                 <a:solidFill>
                   <a:srgbClr val="00C6FF"/>
                 </a:solidFill>
@@ -6220,7 +6131,7 @@
               </a:rPr>
               <a:t>↑ 28%</a:t>
             </a:r>
-            <a:endParaRPr lang="en-US" sz="2200" dirty="0"/>
+            <a:endParaRPr lang="en-US" sz="1800" dirty="0"/>
           </a:p>
         </p:txBody>
       </p:sp>
@@ -6232,24 +6143,24 @@
         </p:nvSpPr>
         <p:spPr>
           <a:xfrm>
-            <a:off x="1828800" y="1920240"/>
-            <a:ext cx="2377440" cy="530352"/>
-          </a:xfrm>
-          <a:prstGeom prst="rect">
-            <a:avLst/>
-          </a:prstGeom>
-          <a:noFill/>
-          <a:ln/>
-        </p:spPr>
-        <p:txBody>
-          <a:bodyPr wrap="square" rtlCol="0" anchor="ctr"/>
-          <a:lstStyle/>
-          <a:p>
-            <a:pPr indent="0" marL="0">
-              <a:buNone/>
-            </a:pPr>
-            <a:r>
-              <a:rPr lang="en-US" sz="950" dirty="0">
+            <a:off x="1783080" y="1463040"/>
+            <a:ext cx="2423160" cy="457200"/>
+          </a:xfrm>
+          <a:prstGeom prst="rect">
+            <a:avLst/>
+          </a:prstGeom>
+          <a:noFill/>
+          <a:ln/>
+        </p:spPr>
+        <p:txBody>
+          <a:bodyPr wrap="square" rtlCol="0" anchor="ctr"/>
+          <a:lstStyle/>
+          <a:p>
+            <a:pPr indent="0" marL="0">
+              <a:buNone/>
+            </a:pPr>
+            <a:r>
+              <a:rPr lang="en-US" sz="900" dirty="0">
                 <a:solidFill>
                   <a:srgbClr val="7090A0"/>
                 </a:solidFill>
@@ -6259,7 +6170,7 @@
               </a:rPr>
               <a:t>Right-fit plan adoption within 90 days of SmartPlan launch</a:t>
             </a:r>
-            <a:endParaRPr lang="en-US" sz="950" dirty="0"/>
+            <a:endParaRPr lang="en-US" sz="900" dirty="0"/>
           </a:p>
         </p:txBody>
       </p:sp>
@@ -6271,12 +6182,12 @@
         </p:nvSpPr>
         <p:spPr>
           <a:xfrm>
-            <a:off x="365760" y="2633472"/>
-            <a:ext cx="3977640" cy="713232"/>
+            <a:off x="365760" y="2066544"/>
+            <a:ext cx="3977640" cy="603504"/>
           </a:xfrm>
           <a:prstGeom prst="roundRect">
             <a:avLst>
-              <a:gd name="adj" fmla="val 10256"/>
+              <a:gd name="adj" fmla="val 12121"/>
             </a:avLst>
           </a:prstGeom>
           <a:solidFill>
@@ -6298,8 +6209,8 @@
         </p:nvSpPr>
         <p:spPr>
           <a:xfrm>
-            <a:off x="502920" y="2679192"/>
-            <a:ext cx="1188720" cy="621792"/>
+            <a:off x="457200" y="2103120"/>
+            <a:ext cx="1188720" cy="530352"/>
           </a:xfrm>
           <a:prstGeom prst="rect">
             <a:avLst/>
@@ -6315,7 +6226,7 @@
               <a:buNone/>
             </a:pPr>
             <a:r>
-              <a:rPr lang="en-US" sz="2200" b="1" dirty="0">
+              <a:rPr lang="en-US" sz="1800" b="1" dirty="0">
                 <a:solidFill>
                   <a:srgbClr val="00C6FF"/>
                 </a:solidFill>
@@ -6325,7 +6236,7 @@
               </a:rPr>
               <a:t>↓ 31%</a:t>
             </a:r>
-            <a:endParaRPr lang="en-US" sz="2200" dirty="0"/>
+            <a:endParaRPr lang="en-US" sz="1800" dirty="0"/>
           </a:p>
         </p:txBody>
       </p:sp>
@@ -6337,24 +6248,24 @@
         </p:nvSpPr>
         <p:spPr>
           <a:xfrm>
-            <a:off x="1828800" y="2724912"/>
-            <a:ext cx="2377440" cy="530352"/>
-          </a:xfrm>
-          <a:prstGeom prst="rect">
-            <a:avLst/>
-          </a:prstGeom>
-          <a:noFill/>
-          <a:ln/>
-        </p:spPr>
-        <p:txBody>
-          <a:bodyPr wrap="square" rtlCol="0" anchor="ctr"/>
-          <a:lstStyle/>
-          <a:p>
-            <a:pPr indent="0" marL="0">
-              <a:buNone/>
-            </a:pPr>
-            <a:r>
-              <a:rPr lang="en-US" sz="950" dirty="0">
+            <a:off x="1783080" y="2139696"/>
+            <a:ext cx="2423160" cy="457200"/>
+          </a:xfrm>
+          <a:prstGeom prst="rect">
+            <a:avLst/>
+          </a:prstGeom>
+          <a:noFill/>
+          <a:ln/>
+        </p:spPr>
+        <p:txBody>
+          <a:bodyPr wrap="square" rtlCol="0" anchor="ctr"/>
+          <a:lstStyle/>
+          <a:p>
+            <a:pPr indent="0" marL="0">
+              <a:buNone/>
+            </a:pPr>
+            <a:r>
+              <a:rPr lang="en-US" sz="900" dirty="0">
                 <a:solidFill>
                   <a:srgbClr val="7090A0"/>
                 </a:solidFill>
@@ -6364,7 +6275,7 @@
               </a:rPr>
               <a:t>Churn rate in mismatched subscriber cohort post-intervention</a:t>
             </a:r>
-            <a:endParaRPr lang="en-US" sz="950" dirty="0"/>
+            <a:endParaRPr lang="en-US" sz="900" dirty="0"/>
           </a:p>
         </p:txBody>
       </p:sp>
@@ -6376,12 +6287,12 @@
         </p:nvSpPr>
         <p:spPr>
           <a:xfrm>
-            <a:off x="365760" y="3438144"/>
-            <a:ext cx="3977640" cy="713232"/>
+            <a:off x="365760" y="2743200"/>
+            <a:ext cx="3977640" cy="603504"/>
           </a:xfrm>
           <a:prstGeom prst="roundRect">
             <a:avLst>
-              <a:gd name="adj" fmla="val 10256"/>
+              <a:gd name="adj" fmla="val 12121"/>
             </a:avLst>
           </a:prstGeom>
           <a:solidFill>
@@ -6403,8 +6314,8 @@
         </p:nvSpPr>
         <p:spPr>
           <a:xfrm>
-            <a:off x="502920" y="3483864"/>
-            <a:ext cx="1188720" cy="621792"/>
+            <a:off x="457200" y="2779776"/>
+            <a:ext cx="1188720" cy="530352"/>
           </a:xfrm>
           <a:prstGeom prst="rect">
             <a:avLst/>
@@ -6420,7 +6331,7 @@
               <a:buNone/>
             </a:pPr>
             <a:r>
-              <a:rPr lang="en-US" sz="2200" b="1" dirty="0">
+              <a:rPr lang="en-US" sz="1800" b="1" dirty="0">
                 <a:solidFill>
                   <a:srgbClr val="00C6FF"/>
                 </a:solidFill>
@@ -6430,7 +6341,7 @@
               </a:rPr>
               <a:t>94/100</a:t>
             </a:r>
-            <a:endParaRPr lang="en-US" sz="2200" dirty="0"/>
+            <a:endParaRPr lang="en-US" sz="1800" dirty="0"/>
           </a:p>
         </p:txBody>
       </p:sp>
@@ -6442,24 +6353,24 @@
         </p:nvSpPr>
         <p:spPr>
           <a:xfrm>
-            <a:off x="1828800" y="3529584"/>
-            <a:ext cx="2377440" cy="530352"/>
-          </a:xfrm>
-          <a:prstGeom prst="rect">
-            <a:avLst/>
-          </a:prstGeom>
-          <a:noFill/>
-          <a:ln/>
-        </p:spPr>
-        <p:txBody>
-          <a:bodyPr wrap="square" rtlCol="0" anchor="ctr"/>
-          <a:lstStyle/>
-          <a:p>
-            <a:pPr indent="0" marL="0">
-              <a:buNone/>
-            </a:pPr>
-            <a:r>
-              <a:rPr lang="en-US" sz="950" dirty="0">
+            <a:off x="1783080" y="2816352"/>
+            <a:ext cx="2423160" cy="457200"/>
+          </a:xfrm>
+          <a:prstGeom prst="rect">
+            <a:avLst/>
+          </a:prstGeom>
+          <a:noFill/>
+          <a:ln/>
+        </p:spPr>
+        <p:txBody>
+          <a:bodyPr wrap="square" rtlCol="0" anchor="ctr"/>
+          <a:lstStyle/>
+          <a:p>
+            <a:pPr indent="0" marL="0">
+              <a:buNone/>
+            </a:pPr>
+            <a:r>
+              <a:rPr lang="en-US" sz="900" dirty="0">
                 <a:solidFill>
                   <a:srgbClr val="7090A0"/>
                 </a:solidFill>
@@ -6467,9 +6378,9 @@
                 <a:ea typeface="Arial" pitchFamily="34" charset="-122"/>
                 <a:cs typeface="Arial" pitchFamily="34" charset="-120"/>
               </a:rPr>
-              <a:t>Average Plan Fit Score after SmartPlan switch (vs 62 baseline)</a:t>
-            </a:r>
-            <a:endParaRPr lang="en-US" sz="950" dirty="0"/>
+              <a:t>Average Plan Fit Score after switch (vs 62 baseline)</a:t>
+            </a:r>
+            <a:endParaRPr lang="en-US" sz="900" dirty="0"/>
           </a:p>
         </p:txBody>
       </p:sp>
@@ -6481,12 +6392,12 @@
         </p:nvSpPr>
         <p:spPr>
           <a:xfrm>
-            <a:off x="365760" y="4242816"/>
-            <a:ext cx="3977640" cy="713232"/>
+            <a:off x="365760" y="3419856"/>
+            <a:ext cx="3977640" cy="603504"/>
           </a:xfrm>
           <a:prstGeom prst="roundRect">
             <a:avLst>
-              <a:gd name="adj" fmla="val 10256"/>
+              <a:gd name="adj" fmla="val 12121"/>
             </a:avLst>
           </a:prstGeom>
           <a:solidFill>
@@ -6508,8 +6419,8 @@
         </p:nvSpPr>
         <p:spPr>
           <a:xfrm>
-            <a:off x="502920" y="4288536"/>
-            <a:ext cx="1188720" cy="621792"/>
+            <a:off x="457200" y="3456432"/>
+            <a:ext cx="1188720" cy="530352"/>
           </a:xfrm>
           <a:prstGeom prst="rect">
             <a:avLst/>
@@ -6525,7 +6436,7 @@
               <a:buNone/>
             </a:pPr>
             <a:r>
-              <a:rPr lang="en-US" sz="2200" b="1" dirty="0">
+              <a:rPr lang="en-US" sz="1800" b="1" dirty="0">
                 <a:solidFill>
                   <a:srgbClr val="00C6FF"/>
                 </a:solidFill>
@@ -6535,7 +6446,7 @@
               </a:rPr>
               <a:t>&lt; 4 min</a:t>
             </a:r>
-            <a:endParaRPr lang="en-US" sz="2200" dirty="0"/>
+            <a:endParaRPr lang="en-US" sz="1800" dirty="0"/>
           </a:p>
         </p:txBody>
       </p:sp>
@@ -6547,24 +6458,24 @@
         </p:nvSpPr>
         <p:spPr>
           <a:xfrm>
-            <a:off x="1828800" y="4334256"/>
-            <a:ext cx="2377440" cy="530352"/>
-          </a:xfrm>
-          <a:prstGeom prst="rect">
-            <a:avLst/>
-          </a:prstGeom>
-          <a:noFill/>
-          <a:ln/>
-        </p:spPr>
-        <p:txBody>
-          <a:bodyPr wrap="square" rtlCol="0" anchor="ctr"/>
-          <a:lstStyle/>
-          <a:p>
-            <a:pPr indent="0" marL="0">
-              <a:buNone/>
-            </a:pPr>
-            <a:r>
-              <a:rPr lang="en-US" sz="950" dirty="0">
+            <a:off x="1783080" y="3493008"/>
+            <a:ext cx="2423160" cy="457200"/>
+          </a:xfrm>
+          <a:prstGeom prst="rect">
+            <a:avLst/>
+          </a:prstGeom>
+          <a:noFill/>
+          <a:ln/>
+        </p:spPr>
+        <p:txBody>
+          <a:bodyPr wrap="square" rtlCol="0" anchor="ctr"/>
+          <a:lstStyle/>
+          <a:p>
+            <a:pPr indent="0" marL="0">
+              <a:buNone/>
+            </a:pPr>
+            <a:r>
+              <a:rPr lang="en-US" sz="900" dirty="0">
                 <a:solidFill>
                   <a:srgbClr val="7090A0"/>
                 </a:solidFill>
@@ -6572,9 +6483,9 @@
                 <a:ea typeface="Arial" pitchFamily="34" charset="-122"/>
                 <a:cs typeface="Arial" pitchFamily="34" charset="-120"/>
               </a:rPr>
-              <a:t>Time from SmartPlan recommendation surfaced to plan switch confirmed</a:t>
-            </a:r>
-            <a:endParaRPr lang="en-US" sz="950" dirty="0"/>
+              <a:t>Time from recommendation surfaced to plan switch confirmed</a:t>
+            </a:r>
+            <a:endParaRPr lang="en-US" sz="900" dirty="0"/>
           </a:p>
         </p:txBody>
       </p:sp>
@@ -6586,12 +6497,12 @@
         </p:nvSpPr>
         <p:spPr>
           <a:xfrm>
-            <a:off x="4663440" y="1325880"/>
-            <a:ext cx="4114800" cy="365760"/>
+            <a:off x="4663440" y="1005840"/>
+            <a:ext cx="4114800" cy="292608"/>
           </a:xfrm>
           <a:prstGeom prst="roundRect">
             <a:avLst>
-              <a:gd name="adj" fmla="val 12500"/>
+              <a:gd name="adj" fmla="val 15625"/>
             </a:avLst>
           </a:prstGeom>
           <a:solidFill>
@@ -6615,8 +6526,8 @@
         </p:nvSpPr>
         <p:spPr>
           <a:xfrm>
-            <a:off x="4663440" y="1325880"/>
-            <a:ext cx="4114800" cy="365760"/>
+            <a:off x="4663440" y="1005840"/>
+            <a:ext cx="4114800" cy="292608"/>
           </a:xfrm>
           <a:prstGeom prst="rect">
             <a:avLst/>
@@ -6632,14 +6543,14 @@
               <a:buNone/>
             </a:pPr>
             <a:r>
-              <a:rPr lang="en-US" sz="900" b="1" dirty="0">
+              <a:rPr lang="en-US" sz="800" b="1" dirty="0">
                 <a:solidFill>
                   <a:srgbClr val="22C55E"/>
                 </a:solidFill>
               </a:rPr>
               <a:t>BUSINESS ROI</a:t>
             </a:r>
-            <a:endParaRPr lang="en-US" sz="900" dirty="0"/>
+            <a:endParaRPr lang="en-US" sz="800" dirty="0"/>
           </a:p>
         </p:txBody>
       </p:sp>
@@ -6651,12 +6562,12 @@
         </p:nvSpPr>
         <p:spPr>
           <a:xfrm>
-            <a:off x="4663440" y="1828800"/>
-            <a:ext cx="4114800" cy="713232"/>
+            <a:off x="4663440" y="1389888"/>
+            <a:ext cx="4114800" cy="603504"/>
           </a:xfrm>
           <a:prstGeom prst="roundRect">
             <a:avLst>
-              <a:gd name="adj" fmla="val 10256"/>
+              <a:gd name="adj" fmla="val 12121"/>
             </a:avLst>
           </a:prstGeom>
           <a:solidFill>
@@ -6678,8 +6589,8 @@
         </p:nvSpPr>
         <p:spPr>
           <a:xfrm>
-            <a:off x="4709160" y="1874520"/>
-            <a:ext cx="1417320" cy="621792"/>
+            <a:off x="4709160" y="1426464"/>
+            <a:ext cx="1417320" cy="530352"/>
           </a:xfrm>
           <a:prstGeom prst="rect">
             <a:avLst/>
@@ -6695,7 +6606,7 @@
               <a:buNone/>
             </a:pPr>
             <a:r>
-              <a:rPr lang="en-US" sz="1800" b="1" dirty="0">
+              <a:rPr lang="en-US" sz="1600" b="1" dirty="0">
                 <a:solidFill>
                   <a:srgbClr val="22C55E"/>
                 </a:solidFill>
@@ -6705,7 +6616,7 @@
               </a:rPr>
               <a:t>+AED 8.40</a:t>
             </a:r>
-            <a:endParaRPr lang="en-US" sz="1800" dirty="0"/>
+            <a:endParaRPr lang="en-US" sz="1600" dirty="0"/>
           </a:p>
         </p:txBody>
       </p:sp>
@@ -6717,24 +6628,24 @@
         </p:nvSpPr>
         <p:spPr>
           <a:xfrm>
-            <a:off x="6217920" y="1920240"/>
-            <a:ext cx="2423160" cy="530352"/>
-          </a:xfrm>
-          <a:prstGeom prst="rect">
-            <a:avLst/>
-          </a:prstGeom>
-          <a:noFill/>
-          <a:ln/>
-        </p:spPr>
-        <p:txBody>
-          <a:bodyPr wrap="square" rtlCol="0" anchor="ctr"/>
-          <a:lstStyle/>
-          <a:p>
-            <a:pPr indent="0" marL="0">
-              <a:buNone/>
-            </a:pPr>
-            <a:r>
-              <a:rPr lang="en-US" sz="950" dirty="0">
+            <a:off x="6217920" y="1463040"/>
+            <a:ext cx="2423160" cy="457200"/>
+          </a:xfrm>
+          <a:prstGeom prst="rect">
+            <a:avLst/>
+          </a:prstGeom>
+          <a:noFill/>
+          <a:ln/>
+        </p:spPr>
+        <p:txBody>
+          <a:bodyPr wrap="square" rtlCol="0" anchor="ctr"/>
+          <a:lstStyle/>
+          <a:p>
+            <a:pPr indent="0" marL="0">
+              <a:buNone/>
+            </a:pPr>
+            <a:r>
+              <a:rPr lang="en-US" sz="900" dirty="0">
                 <a:solidFill>
                   <a:srgbClr val="4A7A5A"/>
                 </a:solidFill>
@@ -6742,9 +6653,9 @@
                 <a:ea typeface="Arial" pitchFamily="34" charset="-122"/>
                 <a:cs typeface="Arial" pitchFamily="34" charset="-120"/>
               </a:rPr>
-              <a:t>ARPU uplift per switched subscriber per month via upsell to better-fit plans</a:t>
-            </a:r>
-            <a:endParaRPr lang="en-US" sz="950" dirty="0"/>
+              <a:t>ARPU uplift per switched subscriber per month via fit-based upsell</a:t>
+            </a:r>
+            <a:endParaRPr lang="en-US" sz="900" dirty="0"/>
           </a:p>
         </p:txBody>
       </p:sp>
@@ -6756,12 +6667,12 @@
         </p:nvSpPr>
         <p:spPr>
           <a:xfrm>
-            <a:off x="4663440" y="2633472"/>
-            <a:ext cx="4114800" cy="713232"/>
+            <a:off x="4663440" y="2066544"/>
+            <a:ext cx="4114800" cy="603504"/>
           </a:xfrm>
           <a:prstGeom prst="roundRect">
             <a:avLst>
-              <a:gd name="adj" fmla="val 10256"/>
+              <a:gd name="adj" fmla="val 12121"/>
             </a:avLst>
           </a:prstGeom>
           <a:solidFill>
@@ -6783,8 +6694,8 @@
         </p:nvSpPr>
         <p:spPr>
           <a:xfrm>
-            <a:off x="4709160" y="2679192"/>
-            <a:ext cx="1417320" cy="621792"/>
+            <a:off x="4709160" y="2103120"/>
+            <a:ext cx="1417320" cy="530352"/>
           </a:xfrm>
           <a:prstGeom prst="rect">
             <a:avLst/>
@@ -6800,7 +6711,7 @@
               <a:buNone/>
             </a:pPr>
             <a:r>
-              <a:rPr lang="en-US" sz="1800" b="1" dirty="0">
+              <a:rPr lang="en-US" sz="1600" b="1" dirty="0">
                 <a:solidFill>
                   <a:srgbClr val="22C55E"/>
                 </a:solidFill>
@@ -6810,7 +6721,7 @@
               </a:rPr>
               <a:t>3.2× ↓</a:t>
             </a:r>
-            <a:endParaRPr lang="en-US" sz="1800" dirty="0"/>
+            <a:endParaRPr lang="en-US" sz="1600" dirty="0"/>
           </a:p>
         </p:txBody>
       </p:sp>
@@ -6822,24 +6733,24 @@
         </p:nvSpPr>
         <p:spPr>
           <a:xfrm>
-            <a:off x="6217920" y="2724912"/>
-            <a:ext cx="2423160" cy="530352"/>
-          </a:xfrm>
-          <a:prstGeom prst="rect">
-            <a:avLst/>
-          </a:prstGeom>
-          <a:noFill/>
-          <a:ln/>
-        </p:spPr>
-        <p:txBody>
-          <a:bodyPr wrap="square" rtlCol="0" anchor="ctr"/>
-          <a:lstStyle/>
-          <a:p>
-            <a:pPr indent="0" marL="0">
-              <a:buNone/>
-            </a:pPr>
-            <a:r>
-              <a:rPr lang="en-US" sz="950" dirty="0">
+            <a:off x="6217920" y="2139696"/>
+            <a:ext cx="2423160" cy="457200"/>
+          </a:xfrm>
+          <a:prstGeom prst="rect">
+            <a:avLst/>
+          </a:prstGeom>
+          <a:noFill/>
+          <a:ln/>
+        </p:spPr>
+        <p:txBody>
+          <a:bodyPr wrap="square" rtlCol="0" anchor="ctr"/>
+          <a:lstStyle/>
+          <a:p>
+            <a:pPr indent="0" marL="0">
+              <a:buNone/>
+            </a:pPr>
+            <a:r>
+              <a:rPr lang="en-US" sz="900" dirty="0">
                 <a:solidFill>
                   <a:srgbClr val="4A7A5A"/>
                 </a:solidFill>
@@ -6847,9 +6758,9 @@
                 <a:ea typeface="Arial" pitchFamily="34" charset="-122"/>
                 <a:cs typeface="Arial" pitchFamily="34" charset="-120"/>
               </a:rPr>
-              <a:t>Churn risk reduction in targeted mismatched cohort vs non-intervened control</a:t>
-            </a:r>
-            <a:endParaRPr lang="en-US" sz="950" dirty="0"/>
+              <a:t>Churn risk reduction in targeted cohort vs non-intervened control</a:t>
+            </a:r>
+            <a:endParaRPr lang="en-US" sz="900" dirty="0"/>
           </a:p>
         </p:txBody>
       </p:sp>
@@ -6861,12 +6772,12 @@
         </p:nvSpPr>
         <p:spPr>
           <a:xfrm>
-            <a:off x="4663440" y="3438144"/>
-            <a:ext cx="4114800" cy="713232"/>
+            <a:off x="4663440" y="2743200"/>
+            <a:ext cx="4114800" cy="603504"/>
           </a:xfrm>
           <a:prstGeom prst="roundRect">
             <a:avLst>
-              <a:gd name="adj" fmla="val 10256"/>
+              <a:gd name="adj" fmla="val 12121"/>
             </a:avLst>
           </a:prstGeom>
           <a:solidFill>
@@ -6888,8 +6799,8 @@
         </p:nvSpPr>
         <p:spPr>
           <a:xfrm>
-            <a:off x="4709160" y="3483864"/>
-            <a:ext cx="1417320" cy="621792"/>
+            <a:off x="4709160" y="2779776"/>
+            <a:ext cx="1417320" cy="530352"/>
           </a:xfrm>
           <a:prstGeom prst="rect">
             <a:avLst/>
@@ -6905,7 +6816,7 @@
               <a:buNone/>
             </a:pPr>
             <a:r>
-              <a:rPr lang="en-US" sz="1800" b="1" dirty="0">
+              <a:rPr lang="en-US" sz="1600" b="1" dirty="0">
                 <a:solidFill>
                   <a:srgbClr val="22C55E"/>
                 </a:solidFill>
@@ -6915,7 +6826,7 @@
               </a:rPr>
               <a:t>AED 2.1M+</a:t>
             </a:r>
-            <a:endParaRPr lang="en-US" sz="1800" dirty="0"/>
+            <a:endParaRPr lang="en-US" sz="1600" dirty="0"/>
           </a:p>
         </p:txBody>
       </p:sp>
@@ -6927,24 +6838,24 @@
         </p:nvSpPr>
         <p:spPr>
           <a:xfrm>
-            <a:off x="6217920" y="3529584"/>
-            <a:ext cx="2423160" cy="530352"/>
-          </a:xfrm>
-          <a:prstGeom prst="rect">
-            <a:avLst/>
-          </a:prstGeom>
-          <a:noFill/>
-          <a:ln/>
-        </p:spPr>
-        <p:txBody>
-          <a:bodyPr wrap="square" rtlCol="0" anchor="ctr"/>
-          <a:lstStyle/>
-          <a:p>
-            <a:pPr indent="0" marL="0">
-              <a:buNone/>
-            </a:pPr>
-            <a:r>
-              <a:rPr lang="en-US" sz="950" dirty="0">
+            <a:off x="6217920" y="2816352"/>
+            <a:ext cx="2423160" cy="457200"/>
+          </a:xfrm>
+          <a:prstGeom prst="rect">
+            <a:avLst/>
+          </a:prstGeom>
+          <a:noFill/>
+          <a:ln/>
+        </p:spPr>
+        <p:txBody>
+          <a:bodyPr wrap="square" rtlCol="0" anchor="ctr"/>
+          <a:lstStyle/>
+          <a:p>
+            <a:pPr indent="0" marL="0">
+              <a:buNone/>
+            </a:pPr>
+            <a:r>
+              <a:rPr lang="en-US" sz="900" dirty="0">
                 <a:solidFill>
                   <a:srgbClr val="4A7A5A"/>
                 </a:solidFill>
@@ -6954,7 +6865,7 @@
               </a:rPr>
               <a:t>Annual ARPU at risk rescued per 250K-subscriber MENA base</a:t>
             </a:r>
-            <a:endParaRPr lang="en-US" sz="950" dirty="0"/>
+            <a:endParaRPr lang="en-US" sz="900" dirty="0"/>
           </a:p>
         </p:txBody>
       </p:sp>
@@ -6966,12 +6877,12 @@
         </p:nvSpPr>
         <p:spPr>
           <a:xfrm>
-            <a:off x="4663440" y="4242816"/>
-            <a:ext cx="4114800" cy="713232"/>
+            <a:off x="4663440" y="3419856"/>
+            <a:ext cx="4114800" cy="603504"/>
           </a:xfrm>
           <a:prstGeom prst="roundRect">
             <a:avLst>
-              <a:gd name="adj" fmla="val 10256"/>
+              <a:gd name="adj" fmla="val 12121"/>
             </a:avLst>
           </a:prstGeom>
           <a:solidFill>
@@ -6993,8 +6904,8 @@
         </p:nvSpPr>
         <p:spPr>
           <a:xfrm>
-            <a:off x="4709160" y="4288536"/>
-            <a:ext cx="1417320" cy="621792"/>
+            <a:off x="4709160" y="3456432"/>
+            <a:ext cx="1417320" cy="530352"/>
           </a:xfrm>
           <a:prstGeom prst="rect">
             <a:avLst/>
@@ -7010,7 +6921,7 @@
               <a:buNone/>
             </a:pPr>
             <a:r>
-              <a:rPr lang="en-US" sz="1800" b="1" dirty="0">
+              <a:rPr lang="en-US" sz="1600" b="1" dirty="0">
                 <a:solidFill>
                   <a:srgbClr val="22C55E"/>
                 </a:solidFill>
@@ -7020,7 +6931,7 @@
               </a:rPr>
               <a:t>↓ 22%</a:t>
             </a:r>
-            <a:endParaRPr lang="en-US" sz="1800" dirty="0"/>
+            <a:endParaRPr lang="en-US" sz="1600" dirty="0"/>
           </a:p>
         </p:txBody>
       </p:sp>
@@ -7032,24 +6943,24 @@
         </p:nvSpPr>
         <p:spPr>
           <a:xfrm>
-            <a:off x="6217920" y="4334256"/>
-            <a:ext cx="2423160" cy="530352"/>
-          </a:xfrm>
-          <a:prstGeom prst="rect">
-            <a:avLst/>
-          </a:prstGeom>
-          <a:noFill/>
-          <a:ln/>
-        </p:spPr>
-        <p:txBody>
-          <a:bodyPr wrap="square" rtlCol="0" anchor="ctr"/>
-          <a:lstStyle/>
-          <a:p>
-            <a:pPr indent="0" marL="0">
-              <a:buNone/>
-            </a:pPr>
-            <a:r>
-              <a:rPr lang="en-US" sz="950" dirty="0">
+            <a:off x="6217920" y="3493008"/>
+            <a:ext cx="2423160" cy="457200"/>
+          </a:xfrm>
+          <a:prstGeom prst="rect">
+            <a:avLst/>
+          </a:prstGeom>
+          <a:noFill/>
+          <a:ln/>
+        </p:spPr>
+        <p:txBody>
+          <a:bodyPr wrap="square" rtlCol="0" anchor="ctr"/>
+          <a:lstStyle/>
+          <a:p>
+            <a:pPr indent="0" marL="0">
+              <a:buNone/>
+            </a:pPr>
+            <a:r>
+              <a:rPr lang="en-US" sz="900" dirty="0">
                 <a:solidFill>
                   <a:srgbClr val="4A7A5A"/>
                 </a:solidFill>
@@ -7057,9 +6968,9 @@
                 <a:ea typeface="Arial" pitchFamily="34" charset="-122"/>
                 <a:cs typeface="Arial" pitchFamily="34" charset="-120"/>
               </a:rPr>
-              <a:t>Reduction in data-cap-related customer support contacts within 60 days</a:t>
-            </a:r>
-            <a:endParaRPr lang="en-US" sz="950" dirty="0"/>
+              <a:t>Reduction in data-cap support contacts within 60 days of launch</a:t>
+            </a:r>
+            <a:endParaRPr lang="en-US" sz="900" dirty="0"/>
           </a:p>
         </p:txBody>
       </p:sp>
@@ -7071,12 +6982,12 @@
         </p:nvSpPr>
         <p:spPr>
           <a:xfrm>
-            <a:off x="365760" y="5047488"/>
-            <a:ext cx="8412480" cy="621792"/>
+            <a:off x="365760" y="4206240"/>
+            <a:ext cx="8412480" cy="640080"/>
           </a:xfrm>
           <a:prstGeom prst="roundRect">
             <a:avLst>
-              <a:gd name="adj" fmla="val 11765"/>
+              <a:gd name="adj" fmla="val 11429"/>
             </a:avLst>
           </a:prstGeom>
           <a:solidFill>
@@ -7100,8 +7011,8 @@
         </p:nvSpPr>
         <p:spPr>
           <a:xfrm>
-            <a:off x="548640" y="5084064"/>
-            <a:ext cx="8229600" cy="548640"/>
+            <a:off x="548640" y="4242816"/>
+            <a:ext cx="8229600" cy="566928"/>
           </a:xfrm>
           <a:prstGeom prst="rect">
             <a:avLst/>
@@ -7125,7 +7036,7 @@
                 <a:ea typeface="Arial" pitchFamily="34" charset="-122"/>
                 <a:cs typeface="Arial" pitchFamily="34" charset="-120"/>
               </a:rPr>
-              <a:t>SmartPlan only recommends a switch after the subscriber's own usage data confirms the mismatch — making this zero-cost retention. The ARPU uplift is a by-product of fit, not aggressive upselling.</a:t>
+              <a:t>SmartPlan only triggers after the subscriber's usage data validates the mismatch — zero-cost retention. ARPU uplift is a by-product of right-fit, not aggressive upselling.</a:t>
             </a:r>
             <a:endParaRPr lang="en-US" sz="950" dirty="0"/>
           </a:p>
@@ -7171,31 +7082,31 @@
         </p:nvSpPr>
         <p:spPr>
           <a:xfrm>
-            <a:off x="457200" y="320040"/>
-            <a:ext cx="8229600" cy="228600"/>
-          </a:xfrm>
-          <a:prstGeom prst="rect">
-            <a:avLst/>
-          </a:prstGeom>
-          <a:noFill/>
-          <a:ln/>
-        </p:spPr>
-        <p:txBody>
-          <a:bodyPr wrap="square" rtlCol="0" anchor="ctr"/>
-          <a:lstStyle/>
-          <a:p>
-            <a:pPr indent="0" marL="0">
-              <a:buNone/>
-            </a:pPr>
-            <a:r>
-              <a:rPr lang="en-US" sz="900" b="1" dirty="0">
+            <a:off x="457200" y="201168"/>
+            <a:ext cx="8229600" cy="201168"/>
+          </a:xfrm>
+          <a:prstGeom prst="rect">
+            <a:avLst/>
+          </a:prstGeom>
+          <a:noFill/>
+          <a:ln/>
+        </p:spPr>
+        <p:txBody>
+          <a:bodyPr wrap="square" rtlCol="0" anchor="ctr"/>
+          <a:lstStyle/>
+          <a:p>
+            <a:pPr indent="0" marL="0">
+              <a:buNone/>
+            </a:pPr>
+            <a:r>
+              <a:rPr lang="en-US" sz="800" b="1" dirty="0">
                 <a:solidFill>
                   <a:srgbClr val="3B82F6"/>
                 </a:solidFill>
               </a:rPr>
               <a:t>PROOF OF WORK</a:t>
             </a:r>
-            <a:endParaRPr lang="en-US" sz="900" dirty="0"/>
+            <a:endParaRPr lang="en-US" sz="800" dirty="0"/>
           </a:p>
         </p:txBody>
       </p:sp>
@@ -7207,24 +7118,24 @@
         </p:nvSpPr>
         <p:spPr>
           <a:xfrm>
-            <a:off x="457200" y="594360"/>
-            <a:ext cx="8229600" cy="502920"/>
-          </a:xfrm>
-          <a:prstGeom prst="rect">
-            <a:avLst/>
-          </a:prstGeom>
-          <a:noFill/>
-          <a:ln/>
-        </p:spPr>
-        <p:txBody>
-          <a:bodyPr wrap="square" rtlCol="0" anchor="ctr"/>
-          <a:lstStyle/>
-          <a:p>
-            <a:pPr indent="0" marL="0">
-              <a:buNone/>
-            </a:pPr>
-            <a:r>
-              <a:rPr lang="en-US" sz="2400" b="1" dirty="0">
+            <a:off x="457200" y="420624"/>
+            <a:ext cx="8229600" cy="475488"/>
+          </a:xfrm>
+          <a:prstGeom prst="rect">
+            <a:avLst/>
+          </a:prstGeom>
+          <a:noFill/>
+          <a:ln/>
+        </p:spPr>
+        <p:txBody>
+          <a:bodyPr wrap="square" rtlCol="0" anchor="ctr"/>
+          <a:lstStyle/>
+          <a:p>
+            <a:pPr indent="0" marL="0">
+              <a:buNone/>
+            </a:pPr>
+            <a:r>
+              <a:rPr lang="en-US" sz="2200" b="1" dirty="0">
                 <a:solidFill>
                   <a:srgbClr val="060D1A"/>
                 </a:solidFill>
@@ -7234,7 +7145,7 @@
               </a:rPr>
               <a:t>I've Built Every Piece of This. Here's the Evidence.</a:t>
             </a:r>
-            <a:endParaRPr lang="en-US" sz="2400" dirty="0"/>
+            <a:endParaRPr lang="en-US" sz="2200" dirty="0"/>
           </a:p>
         </p:txBody>
       </p:sp>
@@ -7246,12 +7157,12 @@
         </p:nvSpPr>
         <p:spPr>
           <a:xfrm>
-            <a:off x="365760" y="1280160"/>
-            <a:ext cx="4023360" cy="4297680"/>
+            <a:off x="365760" y="987552"/>
+            <a:ext cx="4023360" cy="3657600"/>
           </a:xfrm>
           <a:prstGeom prst="roundRect">
             <a:avLst>
-              <a:gd name="adj" fmla="val 2727"/>
+              <a:gd name="adj" fmla="val 3000"/>
             </a:avLst>
           </a:prstGeom>
           <a:solidFill>
@@ -7275,24 +7186,24 @@
         </p:nvSpPr>
         <p:spPr>
           <a:xfrm>
-            <a:off x="502920" y="1417320"/>
-            <a:ext cx="3749040" cy="320040"/>
-          </a:xfrm>
-          <a:prstGeom prst="rect">
-            <a:avLst/>
-          </a:prstGeom>
-          <a:noFill/>
-          <a:ln/>
-        </p:spPr>
-        <p:txBody>
-          <a:bodyPr wrap="square" rtlCol="0" anchor="ctr"/>
-          <a:lstStyle/>
-          <a:p>
-            <a:pPr indent="0" marL="0">
-              <a:buNone/>
-            </a:pPr>
-            <a:r>
-              <a:rPr lang="en-US" sz="1200" b="1" dirty="0">
+            <a:off x="502920" y="1097280"/>
+            <a:ext cx="3749040" cy="274320"/>
+          </a:xfrm>
+          <a:prstGeom prst="rect">
+            <a:avLst/>
+          </a:prstGeom>
+          <a:noFill/>
+          <a:ln/>
+        </p:spPr>
+        <p:txBody>
+          <a:bodyPr wrap="square" rtlCol="0" anchor="ctr"/>
+          <a:lstStyle/>
+          <a:p>
+            <a:pPr indent="0" marL="0">
+              <a:buNone/>
+            </a:pPr>
+            <a:r>
+              <a:rPr lang="en-US" sz="1100" b="1" dirty="0">
                 <a:solidFill>
                   <a:srgbClr val="00C6FF"/>
                 </a:solidFill>
@@ -7302,7 +7213,7 @@
               </a:rPr>
               <a:t>What I shipped at PhonePe</a:t>
             </a:r>
-            <a:endParaRPr lang="en-US" sz="1200" dirty="0"/>
+            <a:endParaRPr lang="en-US" sz="1100" dirty="0"/>
           </a:p>
         </p:txBody>
       </p:sp>
@@ -7314,24 +7225,24 @@
         </p:nvSpPr>
         <p:spPr>
           <a:xfrm>
-            <a:off x="548640" y="1920240"/>
-            <a:ext cx="3657600" cy="274320"/>
-          </a:xfrm>
-          <a:prstGeom prst="rect">
-            <a:avLst/>
-          </a:prstGeom>
-          <a:noFill/>
-          <a:ln/>
-        </p:spPr>
-        <p:txBody>
-          <a:bodyPr wrap="square" rtlCol="0" anchor="ctr"/>
-          <a:lstStyle/>
-          <a:p>
-            <a:pPr indent="0" marL="0">
-              <a:buNone/>
-            </a:pPr>
-            <a:r>
-              <a:rPr lang="en-US" sz="1050" b="1" dirty="0">
+            <a:off x="548640" y="1499616"/>
+            <a:ext cx="3657600" cy="256032"/>
+          </a:xfrm>
+          <a:prstGeom prst="rect">
+            <a:avLst/>
+          </a:prstGeom>
+          <a:noFill/>
+          <a:ln/>
+        </p:spPr>
+        <p:txBody>
+          <a:bodyPr wrap="square" rtlCol="0" anchor="ctr"/>
+          <a:lstStyle/>
+          <a:p>
+            <a:pPr indent="0" marL="0">
+              <a:buNone/>
+            </a:pPr>
+            <a:r>
+              <a:rPr lang="en-US" sz="950" b="1" dirty="0">
                 <a:solidFill>
                   <a:srgbClr val="FFFFFF"/>
                 </a:solidFill>
@@ -7341,7 +7252,7 @@
               </a:rPr>
               <a:t>▸ ML Propensity-to-Transact models</a:t>
             </a:r>
-            <a:endParaRPr lang="en-US" sz="1050" dirty="0"/>
+            <a:endParaRPr lang="en-US" sz="950" dirty="0"/>
           </a:p>
         </p:txBody>
       </p:sp>
@@ -7353,8 +7264,8 @@
         </p:nvSpPr>
         <p:spPr>
           <a:xfrm>
-            <a:off x="594360" y="2212848"/>
-            <a:ext cx="3566160" cy="411480"/>
+            <a:off x="594360" y="1773936"/>
+            <a:ext cx="3566160" cy="365760"/>
           </a:xfrm>
           <a:prstGeom prst="rect">
             <a:avLst/>
@@ -7378,7 +7289,7 @@
                 <a:ea typeface="Arial" pitchFamily="34" charset="-122"/>
                 <a:cs typeface="Arial" pitchFamily="34" charset="-120"/>
               </a:rPr>
-              <a:t>Replaced ₹1,000+ Cr/yr of static targeting → 32% spend reduction, sustained GMV. Same scoring engine as Plan Fit Score.</a:t>
+              <a:t>Replaced ₹1,000+ Cr/yr of static targeting → 32% spend reduction. Same scoring engine as Plan Fit Score.</a:t>
             </a:r>
             <a:endParaRPr lang="en-US" sz="850" dirty="0"/>
           </a:p>
@@ -7392,24 +7303,24 @@
         </p:nvSpPr>
         <p:spPr>
           <a:xfrm>
-            <a:off x="548640" y="2761488"/>
-            <a:ext cx="3657600" cy="274320"/>
-          </a:xfrm>
-          <a:prstGeom prst="rect">
-            <a:avLst/>
-          </a:prstGeom>
-          <a:noFill/>
-          <a:ln/>
-        </p:spPr>
-        <p:txBody>
-          <a:bodyPr wrap="square" rtlCol="0" anchor="ctr"/>
-          <a:lstStyle/>
-          <a:p>
-            <a:pPr indent="0" marL="0">
-              <a:buNone/>
-            </a:pPr>
-            <a:r>
-              <a:rPr lang="en-US" sz="1050" b="1" dirty="0">
+            <a:off x="548640" y="2231136"/>
+            <a:ext cx="3657600" cy="256032"/>
+          </a:xfrm>
+          <a:prstGeom prst="rect">
+            <a:avLst/>
+          </a:prstGeom>
+          <a:noFill/>
+          <a:ln/>
+        </p:spPr>
+        <p:txBody>
+          <a:bodyPr wrap="square" rtlCol="0" anchor="ctr"/>
+          <a:lstStyle/>
+          <a:p>
+            <a:pPr indent="0" marL="0">
+              <a:buNone/>
+            </a:pPr>
+            <a:r>
+              <a:rPr lang="en-US" sz="950" b="1" dirty="0">
                 <a:solidFill>
                   <a:srgbClr val="FFFFFF"/>
                 </a:solidFill>
@@ -7419,7 +7330,7 @@
               </a:rPr>
               <a:t>▸ Context-aware trigger engine</a:t>
             </a:r>
-            <a:endParaRPr lang="en-US" sz="1050" dirty="0"/>
+            <a:endParaRPr lang="en-US" sz="950" dirty="0"/>
           </a:p>
         </p:txBody>
       </p:sp>
@@ -7431,8 +7342,8 @@
         </p:nvSpPr>
         <p:spPr>
           <a:xfrm>
-            <a:off x="594360" y="3054096"/>
-            <a:ext cx="3566160" cy="411480"/>
+            <a:off x="594360" y="2505456"/>
+            <a:ext cx="3566160" cy="365760"/>
           </a:xfrm>
           <a:prstGeom prst="rect">
             <a:avLst/>
@@ -7456,7 +7367,7 @@
                 <a:ea typeface="Arial" pitchFamily="34" charset="-122"/>
                 <a:cs typeface="Arial" pitchFamily="34" charset="-120"/>
               </a:rPr>
-              <a:t>Cart value × user intent × time-of-day signals for dynamic incentivisation → 35% AOV uplift. Same architecture as SmartPlan nudge layer.</a:t>
+              <a:t>Cart × intent × time-of-day signals → 35% AOV uplift. Same architecture as SmartPlan nudge layer.</a:t>
             </a:r>
             <a:endParaRPr lang="en-US" sz="850" dirty="0"/>
           </a:p>
@@ -7470,24 +7381,24 @@
         </p:nvSpPr>
         <p:spPr>
           <a:xfrm>
-            <a:off x="548640" y="3602736"/>
-            <a:ext cx="3657600" cy="274320"/>
-          </a:xfrm>
-          <a:prstGeom prst="rect">
-            <a:avLst/>
-          </a:prstGeom>
-          <a:noFill/>
-          <a:ln/>
-        </p:spPr>
-        <p:txBody>
-          <a:bodyPr wrap="square" rtlCol="0" anchor="ctr"/>
-          <a:lstStyle/>
-          <a:p>
-            <a:pPr indent="0" marL="0">
-              <a:buNone/>
-            </a:pPr>
-            <a:r>
-              <a:rPr lang="en-US" sz="1050" b="1" dirty="0">
+            <a:off x="548640" y="2962656"/>
+            <a:ext cx="3657600" cy="256032"/>
+          </a:xfrm>
+          <a:prstGeom prst="rect">
+            <a:avLst/>
+          </a:prstGeom>
+          <a:noFill/>
+          <a:ln/>
+        </p:spPr>
+        <p:txBody>
+          <a:bodyPr wrap="square" rtlCol="0" anchor="ctr"/>
+          <a:lstStyle/>
+          <a:p>
+            <a:pPr indent="0" marL="0">
+              <a:buNone/>
+            </a:pPr>
+            <a:r>
+              <a:rPr lang="en-US" sz="950" b="1" dirty="0">
                 <a:solidFill>
                   <a:srgbClr val="FFFFFF"/>
                 </a:solidFill>
@@ -7497,7 +7408,7 @@
               </a:rPr>
               <a:t>▸ Ops intelligence dashboard</a:t>
             </a:r>
-            <a:endParaRPr lang="en-US" sz="1050" dirty="0"/>
+            <a:endParaRPr lang="en-US" sz="950" dirty="0"/>
           </a:p>
         </p:txBody>
       </p:sp>
@@ -7509,8 +7420,8 @@
         </p:nvSpPr>
         <p:spPr>
           <a:xfrm>
-            <a:off x="594360" y="3895344"/>
-            <a:ext cx="3566160" cy="411480"/>
+            <a:off x="594360" y="3236976"/>
+            <a:ext cx="3566160" cy="365760"/>
           </a:xfrm>
           <a:prstGeom prst="rect">
             <a:avLst/>
@@ -7534,7 +7445,7 @@
                 <a:ea typeface="Arial" pitchFamily="34" charset="-122"/>
                 <a:cs typeface="Arial" pitchFamily="34" charset="-120"/>
               </a:rPr>
-              <a:t>Replaced 6 analyst workflows → TAT 2 days to 4 hours. Same as SmartPlan Intelligence cohort dashboard.</a:t>
+              <a:t>Replaced 6 analyst workflows → TAT 2 days to 4 hours. Same as SmartPlan Intelligence cohort view.</a:t>
             </a:r>
             <a:endParaRPr lang="en-US" sz="850" dirty="0"/>
           </a:p>
@@ -7548,24 +7459,24 @@
         </p:nvSpPr>
         <p:spPr>
           <a:xfrm>
-            <a:off x="548640" y="4443984"/>
-            <a:ext cx="3657600" cy="274320"/>
-          </a:xfrm>
-          <a:prstGeom prst="rect">
-            <a:avLst/>
-          </a:prstGeom>
-          <a:noFill/>
-          <a:ln/>
-        </p:spPr>
-        <p:txBody>
-          <a:bodyPr wrap="square" rtlCol="0" anchor="ctr"/>
-          <a:lstStyle/>
-          <a:p>
-            <a:pPr indent="0" marL="0">
-              <a:buNone/>
-            </a:pPr>
-            <a:r>
-              <a:rPr lang="en-US" sz="1050" b="1" dirty="0">
+            <a:off x="548640" y="3694176"/>
+            <a:ext cx="3657600" cy="256032"/>
+          </a:xfrm>
+          <a:prstGeom prst="rect">
+            <a:avLst/>
+          </a:prstGeom>
+          <a:noFill/>
+          <a:ln/>
+        </p:spPr>
+        <p:txBody>
+          <a:bodyPr wrap="square" rtlCol="0" anchor="ctr"/>
+          <a:lstStyle/>
+          <a:p>
+            <a:pPr indent="0" marL="0">
+              <a:buNone/>
+            </a:pPr>
+            <a:r>
+              <a:rPr lang="en-US" sz="950" b="1" dirty="0">
                 <a:solidFill>
                   <a:srgbClr val="FFFFFF"/>
                 </a:solidFill>
@@ -7575,7 +7486,7 @@
               </a:rPr>
               <a:t>▸ Milestone A/B test framework</a:t>
             </a:r>
-            <a:endParaRPr lang="en-US" sz="1050" dirty="0"/>
+            <a:endParaRPr lang="en-US" sz="950" dirty="0"/>
           </a:p>
         </p:txBody>
       </p:sp>
@@ -7587,8 +7498,8 @@
         </p:nvSpPr>
         <p:spPr>
           <a:xfrm>
-            <a:off x="594360" y="4736592"/>
-            <a:ext cx="3566160" cy="411480"/>
+            <a:off x="594360" y="3968496"/>
+            <a:ext cx="3566160" cy="365760"/>
           </a:xfrm>
           <a:prstGeom prst="rect">
             <a:avLst/>
@@ -7612,7 +7523,7 @@
                 <a:ea typeface="Arial" pitchFamily="34" charset="-122"/>
                 <a:cs typeface="Arial" pitchFamily="34" charset="-120"/>
               </a:rPr>
-              <a:t>Behaviour-linked incentive vs flat discount → 60% device activation improvement. SmartPlan recommendation uses same BAT structure.</a:t>
+              <a:t>Behaviour-linked incentive vs flat discount → 60% device activation uplift. Same BAT structure.</a:t>
             </a:r>
             <a:endParaRPr lang="en-US" sz="850" dirty="0"/>
           </a:p>
@@ -7626,12 +7537,12 @@
         </p:nvSpPr>
         <p:spPr>
           <a:xfrm>
-            <a:off x="4663440" y="1280160"/>
-            <a:ext cx="4114800" cy="4297680"/>
+            <a:off x="4663440" y="987552"/>
+            <a:ext cx="4114800" cy="3657600"/>
           </a:xfrm>
           <a:prstGeom prst="roundRect">
             <a:avLst>
-              <a:gd name="adj" fmla="val 2667"/>
+              <a:gd name="adj" fmla="val 3000"/>
             </a:avLst>
           </a:prstGeom>
           <a:solidFill>
@@ -7655,24 +7566,24 @@
         </p:nvSpPr>
         <p:spPr>
           <a:xfrm>
-            <a:off x="4800600" y="1417320"/>
-            <a:ext cx="3840480" cy="320040"/>
-          </a:xfrm>
-          <a:prstGeom prst="rect">
-            <a:avLst/>
-          </a:prstGeom>
-          <a:noFill/>
-          <a:ln/>
-        </p:spPr>
-        <p:txBody>
-          <a:bodyPr wrap="square" rtlCol="0" anchor="ctr"/>
-          <a:lstStyle/>
-          <a:p>
-            <a:pPr indent="0" marL="0">
-              <a:buNone/>
-            </a:pPr>
-            <a:r>
-              <a:rPr lang="en-US" sz="1200" b="1" dirty="0">
+            <a:off x="4800600" y="1097280"/>
+            <a:ext cx="3840480" cy="274320"/>
+          </a:xfrm>
+          <a:prstGeom prst="rect">
+            <a:avLst/>
+          </a:prstGeom>
+          <a:noFill/>
+          <a:ln/>
+        </p:spPr>
+        <p:txBody>
+          <a:bodyPr wrap="square" rtlCol="0" anchor="ctr"/>
+          <a:lstStyle/>
+          <a:p>
+            <a:pPr indent="0" marL="0">
+              <a:buNone/>
+            </a:pPr>
+            <a:r>
+              <a:rPr lang="en-US" sz="1100" b="1" dirty="0">
                 <a:solidFill>
                   <a:srgbClr val="3B82F6"/>
                 </a:solidFill>
@@ -7680,9 +7591,9 @@
                 <a:ea typeface="Arial" pitchFamily="34" charset="-122"/>
                 <a:cs typeface="Arial" pitchFamily="34" charset="-120"/>
               </a:rPr>
-              <a:t>How it maps to this JD</a:t>
-            </a:r>
-            <a:endParaRPr lang="en-US" sz="1200" dirty="0"/>
+              <a:t>How it maps to this role</a:t>
+            </a:r>
+            <a:endParaRPr lang="en-US" sz="1100" dirty="0"/>
           </a:p>
         </p:txBody>
       </p:sp>
@@ -7694,24 +7605,24 @@
         </p:nvSpPr>
         <p:spPr>
           <a:xfrm>
-            <a:off x="4800600" y="1920240"/>
-            <a:ext cx="3840480" cy="274320"/>
-          </a:xfrm>
-          <a:prstGeom prst="rect">
-            <a:avLst/>
-          </a:prstGeom>
-          <a:noFill/>
-          <a:ln/>
-        </p:spPr>
-        <p:txBody>
-          <a:bodyPr wrap="square" rtlCol="0" anchor="ctr"/>
-          <a:lstStyle/>
-          <a:p>
-            <a:pPr indent="0" marL="0">
-              <a:buNone/>
-            </a:pPr>
-            <a:r>
-              <a:rPr lang="en-US" sz="1050" b="1" dirty="0">
+            <a:off x="4800600" y="1499616"/>
+            <a:ext cx="3840480" cy="256032"/>
+          </a:xfrm>
+          <a:prstGeom prst="rect">
+            <a:avLst/>
+          </a:prstGeom>
+          <a:noFill/>
+          <a:ln/>
+        </p:spPr>
+        <p:txBody>
+          <a:bodyPr wrap="square" rtlCol="0" anchor="ctr"/>
+          <a:lstStyle/>
+          <a:p>
+            <a:pPr indent="0" marL="0">
+              <a:buNone/>
+            </a:pPr>
+            <a:r>
+              <a:rPr lang="en-US" sz="950" b="1" dirty="0">
                 <a:solidFill>
                   <a:srgbClr val="060D1A"/>
                 </a:solidFill>
@@ -7721,7 +7632,7 @@
               </a:rPr>
               <a:t>▸ User-level ML scoring</a:t>
             </a:r>
-            <a:endParaRPr lang="en-US" sz="1050" dirty="0"/>
+            <a:endParaRPr lang="en-US" sz="950" dirty="0"/>
           </a:p>
         </p:txBody>
       </p:sp>
@@ -7733,8 +7644,8 @@
         </p:nvSpPr>
         <p:spPr>
           <a:xfrm>
-            <a:off x="4846320" y="2212848"/>
-            <a:ext cx="3749040" cy="411480"/>
+            <a:off x="4846320" y="1773936"/>
+            <a:ext cx="3749040" cy="365760"/>
           </a:xfrm>
           <a:prstGeom prst="rect">
             <a:avLst/>
@@ -7758,7 +7669,7 @@
                 <a:ea typeface="Arial" pitchFamily="34" charset="-122"/>
                 <a:cs typeface="Arial" pitchFamily="34" charset="-120"/>
               </a:rPr>
-              <a:t>→ Plan Fit Score engine (0–100) replacing static plan assignment for MENA subscribers</a:t>
+              <a:t>→ Plan Fit Score (0–100) replacing static plan assignment for MENA subscribers</a:t>
             </a:r>
             <a:endParaRPr lang="en-US" sz="850" dirty="0"/>
           </a:p>
@@ -7772,24 +7683,24 @@
         </p:nvSpPr>
         <p:spPr>
           <a:xfrm>
-            <a:off x="4800600" y="2761488"/>
-            <a:ext cx="3840480" cy="274320"/>
-          </a:xfrm>
-          <a:prstGeom prst="rect">
-            <a:avLst/>
-          </a:prstGeom>
-          <a:noFill/>
-          <a:ln/>
-        </p:spPr>
-        <p:txBody>
-          <a:bodyPr wrap="square" rtlCol="0" anchor="ctr"/>
-          <a:lstStyle/>
-          <a:p>
-            <a:pPr indent="0" marL="0">
-              <a:buNone/>
-            </a:pPr>
-            <a:r>
-              <a:rPr lang="en-US" sz="1050" b="1" dirty="0">
+            <a:off x="4800600" y="2231136"/>
+            <a:ext cx="3840480" cy="256032"/>
+          </a:xfrm>
+          <a:prstGeom prst="rect">
+            <a:avLst/>
+          </a:prstGeom>
+          <a:noFill/>
+          <a:ln/>
+        </p:spPr>
+        <p:txBody>
+          <a:bodyPr wrap="square" rtlCol="0" anchor="ctr"/>
+          <a:lstStyle/>
+          <a:p>
+            <a:pPr indent="0" marL="0">
+              <a:buNone/>
+            </a:pPr>
+            <a:r>
+              <a:rPr lang="en-US" sz="950" b="1" dirty="0">
                 <a:solidFill>
                   <a:srgbClr val="060D1A"/>
                 </a:solidFill>
@@ -7799,7 +7710,7 @@
               </a:rPr>
               <a:t>▸ Funnel performance tracking</a:t>
             </a:r>
-            <a:endParaRPr lang="en-US" sz="1050" dirty="0"/>
+            <a:endParaRPr lang="en-US" sz="950" dirty="0"/>
           </a:p>
         </p:txBody>
       </p:sp>
@@ -7811,8 +7722,8 @@
         </p:nvSpPr>
         <p:spPr>
           <a:xfrm>
-            <a:off x="4846320" y="3054096"/>
-            <a:ext cx="3749040" cy="411480"/>
+            <a:off x="4846320" y="2505456"/>
+            <a:ext cx="3749040" cy="365760"/>
           </a:xfrm>
           <a:prstGeom prst="rect">
             <a:avLst/>
@@ -7836,7 +7747,7 @@
                 <a:ea typeface="Arial" pitchFamily="34" charset="-122"/>
                 <a:cs typeface="Arial" pitchFamily="34" charset="-120"/>
               </a:rPr>
-              <a:t>→ KPI ownership across acquisition, plan fit, churn, and ARPU tracked in Ops Intelligence</a:t>
+              <a:t>→ KPI ownership across acquisition, plan fit, churn, and ARPU with pre-launch instrumentation</a:t>
             </a:r>
             <a:endParaRPr lang="en-US" sz="850" dirty="0"/>
           </a:p>
@@ -7850,24 +7761,24 @@
         </p:nvSpPr>
         <p:spPr>
           <a:xfrm>
-            <a:off x="4800600" y="3602736"/>
-            <a:ext cx="3840480" cy="274320"/>
-          </a:xfrm>
-          <a:prstGeom prst="rect">
-            <a:avLst/>
-          </a:prstGeom>
-          <a:noFill/>
-          <a:ln/>
-        </p:spPr>
-        <p:txBody>
-          <a:bodyPr wrap="square" rtlCol="0" anchor="ctr"/>
-          <a:lstStyle/>
-          <a:p>
-            <a:pPr indent="0" marL="0">
-              <a:buNone/>
-            </a:pPr>
-            <a:r>
-              <a:rPr lang="en-US" sz="1050" b="1" dirty="0">
+            <a:off x="4800600" y="2962656"/>
+            <a:ext cx="3840480" cy="256032"/>
+          </a:xfrm>
+          <a:prstGeom prst="rect">
+            <a:avLst/>
+          </a:prstGeom>
+          <a:noFill/>
+          <a:ln/>
+        </p:spPr>
+        <p:txBody>
+          <a:bodyPr wrap="square" rtlCol="0" anchor="ctr"/>
+          <a:lstStyle/>
+          <a:p>
+            <a:pPr indent="0" marL="0">
+              <a:buNone/>
+            </a:pPr>
+            <a:r>
+              <a:rPr lang="en-US" sz="950" b="1" dirty="0">
                 <a:solidFill>
                   <a:srgbClr val="060D1A"/>
                 </a:solidFill>
@@ -7877,7 +7788,7 @@
               </a:rPr>
               <a:t>▸ Cross-functional Agile delivery</a:t>
             </a:r>
-            <a:endParaRPr lang="en-US" sz="1050" dirty="0"/>
+            <a:endParaRPr lang="en-US" sz="950" dirty="0"/>
           </a:p>
         </p:txBody>
       </p:sp>
@@ -7889,8 +7800,8 @@
         </p:nvSpPr>
         <p:spPr>
           <a:xfrm>
-            <a:off x="4846320" y="3895344"/>
-            <a:ext cx="3749040" cy="411480"/>
+            <a:off x="4846320" y="3236976"/>
+            <a:ext cx="3749040" cy="365760"/>
           </a:xfrm>
           <a:prstGeom prst="rect">
             <a:avLst/>
@@ -7914,7 +7825,7 @@
                 <a:ea typeface="Arial" pitchFamily="34" charset="-122"/>
                 <a:cs typeface="Arial" pitchFamily="34" charset="-120"/>
               </a:rPr>
-              <a:t>→ Product, engineering, DS, commercial, and CS alignment for SmartPlan phased rollout</a:t>
+              <a:t>→ Product, engineering, DS, commercial, and CS alignment for phased MENA rollout</a:t>
             </a:r>
             <a:endParaRPr lang="en-US" sz="850" dirty="0"/>
           </a:p>
@@ -7928,24 +7839,24 @@
         </p:nvSpPr>
         <p:spPr>
           <a:xfrm>
-            <a:off x="4800600" y="4443984"/>
-            <a:ext cx="3840480" cy="274320"/>
-          </a:xfrm>
-          <a:prstGeom prst="rect">
-            <a:avLst/>
-          </a:prstGeom>
-          <a:noFill/>
-          <a:ln/>
-        </p:spPr>
-        <p:txBody>
-          <a:bodyPr wrap="square" rtlCol="0" anchor="ctr"/>
-          <a:lstStyle/>
-          <a:p>
-            <a:pPr indent="0" marL="0">
-              <a:buNone/>
-            </a:pPr>
-            <a:r>
-              <a:rPr lang="en-US" sz="1050" b="1" dirty="0">
+            <a:off x="4800600" y="3694176"/>
+            <a:ext cx="3840480" cy="256032"/>
+          </a:xfrm>
+          <a:prstGeom prst="rect">
+            <a:avLst/>
+          </a:prstGeom>
+          <a:noFill/>
+          <a:ln/>
+        </p:spPr>
+        <p:txBody>
+          <a:bodyPr wrap="square" rtlCol="0" anchor="ctr"/>
+          <a:lstStyle/>
+          <a:p>
+            <a:pPr indent="0" marL="0">
+              <a:buNone/>
+            </a:pPr>
+            <a:r>
+              <a:rPr lang="en-US" sz="950" b="1" dirty="0">
                 <a:solidFill>
                   <a:srgbClr val="060D1A"/>
                 </a:solidFill>
@@ -7955,7 +7866,7 @@
               </a:rPr>
               <a:t>▸ Data-to-recommendation loop</a:t>
             </a:r>
-            <a:endParaRPr lang="en-US" sz="1050" dirty="0"/>
+            <a:endParaRPr lang="en-US" sz="950" dirty="0"/>
           </a:p>
         </p:txBody>
       </p:sp>
@@ -7967,8 +7878,8 @@
         </p:nvSpPr>
         <p:spPr>
           <a:xfrm>
-            <a:off x="4846320" y="4736592"/>
-            <a:ext cx="3749040" cy="411480"/>
+            <a:off x="4846320" y="3968496"/>
+            <a:ext cx="3749040" cy="365760"/>
           </a:xfrm>
           <a:prstGeom prst="rect">
             <a:avLst/>
@@ -7992,7 +7903,7 @@
                 <a:ea typeface="Arial" pitchFamily="34" charset="-122"/>
                 <a:cs typeface="Arial" pitchFamily="34" charset="-120"/>
               </a:rPr>
-              <a:t>→ 90-day usage data → Plan Fit Score → personalised nudge → switch outcome tracking</a:t>
+              <a:t>→ 90-day usage → Plan Fit Score → personalised nudge → switch outcome tracking</a:t>
             </a:r>
             <a:endParaRPr lang="en-US" sz="850" dirty="0"/>
           </a:p>
@@ -8038,31 +7949,31 @@
         </p:nvSpPr>
         <p:spPr>
           <a:xfrm>
-            <a:off x="457200" y="320040"/>
-            <a:ext cx="8229600" cy="228600"/>
-          </a:xfrm>
-          <a:prstGeom prst="rect">
-            <a:avLst/>
-          </a:prstGeom>
-          <a:noFill/>
-          <a:ln/>
-        </p:spPr>
-        <p:txBody>
-          <a:bodyPr wrap="square" rtlCol="0" anchor="ctr"/>
-          <a:lstStyle/>
-          <a:p>
-            <a:pPr indent="0" marL="0">
-              <a:buNone/>
-            </a:pPr>
-            <a:r>
-              <a:rPr lang="en-US" sz="900" b="1" dirty="0">
+            <a:off x="457200" y="201168"/>
+            <a:ext cx="8229600" cy="201168"/>
+          </a:xfrm>
+          <a:prstGeom prst="rect">
+            <a:avLst/>
+          </a:prstGeom>
+          <a:noFill/>
+          <a:ln/>
+        </p:spPr>
+        <p:txBody>
+          <a:bodyPr wrap="square" rtlCol="0" anchor="ctr"/>
+          <a:lstStyle/>
+          <a:p>
+            <a:pPr indent="0" marL="0">
+              <a:buNone/>
+            </a:pPr>
+            <a:r>
+              <a:rPr lang="en-US" sz="800" b="1" dirty="0">
                 <a:solidFill>
                   <a:srgbClr val="00C6FF"/>
                 </a:solidFill>
               </a:rPr>
               <a:t>ROLLOUT PLAN</a:t>
             </a:r>
-            <a:endParaRPr lang="en-US" sz="900" dirty="0"/>
+            <a:endParaRPr lang="en-US" sz="800" dirty="0"/>
           </a:p>
         </p:txBody>
       </p:sp>
@@ -8074,24 +7985,24 @@
         </p:nvSpPr>
         <p:spPr>
           <a:xfrm>
-            <a:off x="457200" y="594360"/>
-            <a:ext cx="8229600" cy="502920"/>
-          </a:xfrm>
-          <a:prstGeom prst="rect">
-            <a:avLst/>
-          </a:prstGeom>
-          <a:noFill/>
-          <a:ln/>
-        </p:spPr>
-        <p:txBody>
-          <a:bodyPr wrap="square" rtlCol="0" anchor="ctr"/>
-          <a:lstStyle/>
-          <a:p>
-            <a:pPr indent="0" marL="0">
-              <a:buNone/>
-            </a:pPr>
-            <a:r>
-              <a:rPr lang="en-US" sz="2800" b="1" dirty="0">
+            <a:off x="457200" y="420624"/>
+            <a:ext cx="8229600" cy="475488"/>
+          </a:xfrm>
+          <a:prstGeom prst="rect">
+            <a:avLst/>
+          </a:prstGeom>
+          <a:noFill/>
+          <a:ln/>
+        </p:spPr>
+        <p:txBody>
+          <a:bodyPr wrap="square" rtlCol="0" anchor="ctr"/>
+          <a:lstStyle/>
+          <a:p>
+            <a:pPr indent="0" marL="0">
+              <a:buNone/>
+            </a:pPr>
+            <a:r>
+              <a:rPr lang="en-US" sz="2200" b="1" dirty="0">
                 <a:solidFill>
                   <a:srgbClr val="FFFFFF"/>
                 </a:solidFill>
@@ -8101,7 +8012,7 @@
               </a:rPr>
               <a:t>Phased Delivery — MENA Digital Brand Launch</a:t>
             </a:r>
-            <a:endParaRPr lang="en-US" sz="2800" dirty="0"/>
+            <a:endParaRPr lang="en-US" sz="2200" dirty="0"/>
           </a:p>
         </p:txBody>
       </p:sp>
@@ -8113,12 +8024,12 @@
         </p:nvSpPr>
         <p:spPr>
           <a:xfrm>
-            <a:off x="365760" y="1325880"/>
-            <a:ext cx="2697480" cy="3154680"/>
+            <a:off x="384048" y="1005840"/>
+            <a:ext cx="2697480" cy="2670048"/>
           </a:xfrm>
           <a:prstGeom prst="roundRect">
             <a:avLst>
-              <a:gd name="adj" fmla="val 3390"/>
+              <a:gd name="adj" fmla="val 3425"/>
             </a:avLst>
           </a:prstGeom>
           <a:solidFill>
@@ -8142,17 +8053,17 @@
         </p:nvSpPr>
         <p:spPr>
           <a:xfrm>
-            <a:off x="365760" y="1325880"/>
-            <a:ext cx="2697480" cy="566928"/>
+            <a:off x="384048" y="1005840"/>
+            <a:ext cx="2697480" cy="475488"/>
           </a:xfrm>
           <a:prstGeom prst="roundRect">
             <a:avLst>
-              <a:gd name="adj" fmla="val 16129"/>
+              <a:gd name="adj" fmla="val 19231"/>
             </a:avLst>
           </a:prstGeom>
           <a:solidFill>
             <a:srgbClr val="00C6FF">
-              <a:alpha val="20000"/>
+              <a:alpha val="18000"/>
             </a:srgbClr>
           </a:solidFill>
           <a:ln w="6350">
@@ -8173,8 +8084,8 @@
         </p:nvSpPr>
         <p:spPr>
           <a:xfrm>
-            <a:off x="365760" y="1371600"/>
-            <a:ext cx="2697480" cy="256032"/>
+            <a:off x="384048" y="1042416"/>
+            <a:ext cx="2697480" cy="219456"/>
           </a:xfrm>
           <a:prstGeom prst="rect">
             <a:avLst/>
@@ -8190,14 +8101,14 @@
               <a:buNone/>
             </a:pPr>
             <a:r>
-              <a:rPr lang="en-US" sz="900" b="1" dirty="0">
+              <a:rPr lang="en-US" sz="800" b="1" dirty="0">
                 <a:solidFill>
                   <a:srgbClr val="00C6FF"/>
                 </a:solidFill>
               </a:rPr>
               <a:t>Phase 1  ·  Month 1–2</a:t>
             </a:r>
-            <a:endParaRPr lang="en-US" sz="900" dirty="0"/>
+            <a:endParaRPr lang="en-US" sz="800" dirty="0"/>
           </a:p>
         </p:txBody>
       </p:sp>
@@ -8209,8 +8120,8 @@
         </p:nvSpPr>
         <p:spPr>
           <a:xfrm>
-            <a:off x="365760" y="1627632"/>
-            <a:ext cx="2697480" cy="256032"/>
+            <a:off x="384048" y="1261872"/>
+            <a:ext cx="2697480" cy="219456"/>
           </a:xfrm>
           <a:prstGeom prst="rect">
             <a:avLst/>
@@ -8226,7 +8137,7 @@
               <a:buNone/>
             </a:pPr>
             <a:r>
-              <a:rPr lang="en-US" sz="1100" b="1" dirty="0">
+              <a:rPr lang="en-US" sz="1000" b="1" dirty="0">
                 <a:solidFill>
                   <a:srgbClr val="FFFFFF"/>
                 </a:solidFill>
@@ -8236,7 +8147,7 @@
               </a:rPr>
               <a:t>Pilot · 5K Subscribers</a:t>
             </a:r>
-            <a:endParaRPr lang="en-US" sz="1100" dirty="0"/>
+            <a:endParaRPr lang="en-US" sz="1000" dirty="0"/>
           </a:p>
         </p:txBody>
       </p:sp>
@@ -8248,24 +8159,24 @@
         </p:nvSpPr>
         <p:spPr>
           <a:xfrm>
-            <a:off x="502920" y="2011680"/>
-            <a:ext cx="2423160" cy="457200"/>
-          </a:xfrm>
-          <a:prstGeom prst="rect">
-            <a:avLst/>
-          </a:prstGeom>
-          <a:noFill/>
-          <a:ln/>
-        </p:spPr>
-        <p:txBody>
-          <a:bodyPr wrap="square" rtlCol="0" anchor="ctr"/>
-          <a:lstStyle/>
-          <a:p>
-            <a:pPr indent="0" marL="0">
-              <a:buNone/>
-            </a:pPr>
-            <a:r>
-              <a:rPr lang="en-US" sz="900" dirty="0">
+            <a:off x="512064" y="1591056"/>
+            <a:ext cx="2423160" cy="402336"/>
+          </a:xfrm>
+          <a:prstGeom prst="rect">
+            <a:avLst/>
+          </a:prstGeom>
+          <a:noFill/>
+          <a:ln/>
+        </p:spPr>
+        <p:txBody>
+          <a:bodyPr wrap="square" rtlCol="0" anchor="ctr"/>
+          <a:lstStyle/>
+          <a:p>
+            <a:pPr indent="0" marL="0">
+              <a:buNone/>
+            </a:pPr>
+            <a:r>
+              <a:rPr lang="en-US" sz="850" dirty="0">
                 <a:solidFill>
                   <a:srgbClr val="7090A0"/>
                 </a:solidFill>
@@ -8275,7 +8186,7 @@
               </a:rPr>
               <a:t>• Instrument Plan Fit Score on 5,000 MENA beta users</a:t>
             </a:r>
-            <a:endParaRPr lang="en-US" sz="900" dirty="0"/>
+            <a:endParaRPr lang="en-US" sz="850" dirty="0"/>
           </a:p>
         </p:txBody>
       </p:sp>
@@ -8287,24 +8198,24 @@
         </p:nvSpPr>
         <p:spPr>
           <a:xfrm>
-            <a:off x="502920" y="2542032"/>
-            <a:ext cx="2423160" cy="457200"/>
-          </a:xfrm>
-          <a:prstGeom prst="rect">
-            <a:avLst/>
-          </a:prstGeom>
-          <a:noFill/>
-          <a:ln/>
-        </p:spPr>
-        <p:txBody>
-          <a:bodyPr wrap="square" rtlCol="0" anchor="ctr"/>
-          <a:lstStyle/>
-          <a:p>
-            <a:pPr indent="0" marL="0">
-              <a:buNone/>
-            </a:pPr>
-            <a:r>
-              <a:rPr lang="en-US" sz="900" dirty="0">
+            <a:off x="512064" y="2048256"/>
+            <a:ext cx="2423160" cy="402336"/>
+          </a:xfrm>
+          <a:prstGeom prst="rect">
+            <a:avLst/>
+          </a:prstGeom>
+          <a:noFill/>
+          <a:ln/>
+        </p:spPr>
+        <p:txBody>
+          <a:bodyPr wrap="square" rtlCol="0" anchor="ctr"/>
+          <a:lstStyle/>
+          <a:p>
+            <a:pPr indent="0" marL="0">
+              <a:buNone/>
+            </a:pPr>
+            <a:r>
+              <a:rPr lang="en-US" sz="850" dirty="0">
                 <a:solidFill>
                   <a:srgbClr val="7090A0"/>
                 </a:solidFill>
@@ -8314,7 +8225,7 @@
               </a:rPr>
               <a:t>• Baseline churn rate, ARPU, and support ticket volume</a:t>
             </a:r>
-            <a:endParaRPr lang="en-US" sz="900" dirty="0"/>
+            <a:endParaRPr lang="en-US" sz="850" dirty="0"/>
           </a:p>
         </p:txBody>
       </p:sp>
@@ -8326,24 +8237,24 @@
         </p:nvSpPr>
         <p:spPr>
           <a:xfrm>
-            <a:off x="502920" y="3072384"/>
-            <a:ext cx="2423160" cy="457200"/>
-          </a:xfrm>
-          <a:prstGeom prst="rect">
-            <a:avLst/>
-          </a:prstGeom>
-          <a:noFill/>
-          <a:ln/>
-        </p:spPr>
-        <p:txBody>
-          <a:bodyPr wrap="square" rtlCol="0" anchor="ctr"/>
-          <a:lstStyle/>
-          <a:p>
-            <a:pPr indent="0" marL="0">
-              <a:buNone/>
-            </a:pPr>
-            <a:r>
-              <a:rPr lang="en-US" sz="900" dirty="0">
+            <a:off x="512064" y="2505456"/>
+            <a:ext cx="2423160" cy="402336"/>
+          </a:xfrm>
+          <a:prstGeom prst="rect">
+            <a:avLst/>
+          </a:prstGeom>
+          <a:noFill/>
+          <a:ln/>
+        </p:spPr>
+        <p:txBody>
+          <a:bodyPr wrap="square" rtlCol="0" anchor="ctr"/>
+          <a:lstStyle/>
+          <a:p>
+            <a:pPr indent="0" marL="0">
+              <a:buNone/>
+            </a:pPr>
+            <a:r>
+              <a:rPr lang="en-US" sz="850" dirty="0">
                 <a:solidFill>
                   <a:srgbClr val="7090A0"/>
                 </a:solidFill>
@@ -8351,9 +8262,9 @@
                 <a:ea typeface="Arial" pitchFamily="34" charset="-122"/>
                 <a:cs typeface="Arial" pitchFamily="34" charset="-120"/>
               </a:rPr>
-              <a:t>• A/B test SmartPlan banner vs control (no banner)</a:t>
-            </a:r>
-            <a:endParaRPr lang="en-US" sz="900" dirty="0"/>
+              <a:t>• A/B test SmartPlan banner vs control (no intervention)</a:t>
+            </a:r>
+            <a:endParaRPr lang="en-US" sz="850" dirty="0"/>
           </a:p>
         </p:txBody>
       </p:sp>
@@ -8365,24 +8276,24 @@
         </p:nvSpPr>
         <p:spPr>
           <a:xfrm>
-            <a:off x="502920" y="3602736"/>
-            <a:ext cx="2423160" cy="457200"/>
-          </a:xfrm>
-          <a:prstGeom prst="rect">
-            <a:avLst/>
-          </a:prstGeom>
-          <a:noFill/>
-          <a:ln/>
-        </p:spPr>
-        <p:txBody>
-          <a:bodyPr wrap="square" rtlCol="0" anchor="ctr"/>
-          <a:lstStyle/>
-          <a:p>
-            <a:pPr indent="0" marL="0">
-              <a:buNone/>
-            </a:pPr>
-            <a:r>
-              <a:rPr lang="en-US" sz="900" dirty="0">
+            <a:off x="512064" y="2962656"/>
+            <a:ext cx="2423160" cy="402336"/>
+          </a:xfrm>
+          <a:prstGeom prst="rect">
+            <a:avLst/>
+          </a:prstGeom>
+          <a:noFill/>
+          <a:ln/>
+        </p:spPr>
+        <p:txBody>
+          <a:bodyPr wrap="square" rtlCol="0" anchor="ctr"/>
+          <a:lstStyle/>
+          <a:p>
+            <a:pPr indent="0" marL="0">
+              <a:buNone/>
+            </a:pPr>
+            <a:r>
+              <a:rPr lang="en-US" sz="850" dirty="0">
                 <a:solidFill>
                   <a:srgbClr val="7090A0"/>
                 </a:solidFill>
@@ -8392,7 +8303,7 @@
               </a:rPr>
               <a:t>• Validate 90-day usage data pipeline with ML team</a:t>
             </a:r>
-            <a:endParaRPr lang="en-US" sz="900" dirty="0"/>
+            <a:endParaRPr lang="en-US" sz="850" dirty="0"/>
           </a:p>
         </p:txBody>
       </p:sp>
@@ -8404,12 +8315,12 @@
         </p:nvSpPr>
         <p:spPr>
           <a:xfrm>
-            <a:off x="3218688" y="1325880"/>
-            <a:ext cx="2697480" cy="3154680"/>
+            <a:off x="3236976" y="1005840"/>
+            <a:ext cx="2697480" cy="2670048"/>
           </a:xfrm>
           <a:prstGeom prst="roundRect">
             <a:avLst>
-              <a:gd name="adj" fmla="val 3390"/>
+              <a:gd name="adj" fmla="val 3425"/>
             </a:avLst>
           </a:prstGeom>
           <a:solidFill>
@@ -8433,17 +8344,17 @@
         </p:nvSpPr>
         <p:spPr>
           <a:xfrm>
-            <a:off x="3218688" y="1325880"/>
-            <a:ext cx="2697480" cy="566928"/>
+            <a:off x="3236976" y="1005840"/>
+            <a:ext cx="2697480" cy="475488"/>
           </a:xfrm>
           <a:prstGeom prst="roundRect">
             <a:avLst>
-              <a:gd name="adj" fmla="val 16129"/>
+              <a:gd name="adj" fmla="val 19231"/>
             </a:avLst>
           </a:prstGeom>
           <a:solidFill>
             <a:srgbClr val="3B82F6">
-              <a:alpha val="20000"/>
+              <a:alpha val="18000"/>
             </a:srgbClr>
           </a:solidFill>
           <a:ln w="6350">
@@ -8464,8 +8375,8 @@
         </p:nvSpPr>
         <p:spPr>
           <a:xfrm>
-            <a:off x="3218688" y="1371600"/>
-            <a:ext cx="2697480" cy="256032"/>
+            <a:off x="3236976" y="1042416"/>
+            <a:ext cx="2697480" cy="219456"/>
           </a:xfrm>
           <a:prstGeom prst="rect">
             <a:avLst/>
@@ -8481,14 +8392,14 @@
               <a:buNone/>
             </a:pPr>
             <a:r>
-              <a:rPr lang="en-US" sz="900" b="1" dirty="0">
+              <a:rPr lang="en-US" sz="800" b="1" dirty="0">
                 <a:solidFill>
                   <a:srgbClr val="3B82F6"/>
                 </a:solidFill>
               </a:rPr>
               <a:t>Phase 2  ·  Month 3–4</a:t>
             </a:r>
-            <a:endParaRPr lang="en-US" sz="900" dirty="0"/>
+            <a:endParaRPr lang="en-US" sz="800" dirty="0"/>
           </a:p>
         </p:txBody>
       </p:sp>
@@ -8500,8 +8411,8 @@
         </p:nvSpPr>
         <p:spPr>
           <a:xfrm>
-            <a:off x="3218688" y="1627632"/>
-            <a:ext cx="2697480" cy="256032"/>
+            <a:off x="3236976" y="1261872"/>
+            <a:ext cx="2697480" cy="219456"/>
           </a:xfrm>
           <a:prstGeom prst="rect">
             <a:avLst/>
@@ -8517,7 +8428,7 @@
               <a:buNone/>
             </a:pPr>
             <a:r>
-              <a:rPr lang="en-US" sz="1100" b="1" dirty="0">
+              <a:rPr lang="en-US" sz="1000" b="1" dirty="0">
                 <a:solidFill>
                   <a:srgbClr val="FFFFFF"/>
                 </a:solidFill>
@@ -8527,7 +8438,7 @@
               </a:rPr>
               <a:t>Scale · 50K Users</a:t>
             </a:r>
-            <a:endParaRPr lang="en-US" sz="1100" dirty="0"/>
+            <a:endParaRPr lang="en-US" sz="1000" dirty="0"/>
           </a:p>
         </p:txBody>
       </p:sp>
@@ -8539,24 +8450,24 @@
         </p:nvSpPr>
         <p:spPr>
           <a:xfrm>
-            <a:off x="3355848" y="2011680"/>
-            <a:ext cx="2423160" cy="457200"/>
-          </a:xfrm>
-          <a:prstGeom prst="rect">
-            <a:avLst/>
-          </a:prstGeom>
-          <a:noFill/>
-          <a:ln/>
-        </p:spPr>
-        <p:txBody>
-          <a:bodyPr wrap="square" rtlCol="0" anchor="ctr"/>
-          <a:lstStyle/>
-          <a:p>
-            <a:pPr indent="0" marL="0">
-              <a:buNone/>
-            </a:pPr>
-            <a:r>
-              <a:rPr lang="en-US" sz="900" dirty="0">
+            <a:off x="3364992" y="1591056"/>
+            <a:ext cx="2423160" cy="402336"/>
+          </a:xfrm>
+          <a:prstGeom prst="rect">
+            <a:avLst/>
+          </a:prstGeom>
+          <a:noFill/>
+          <a:ln/>
+        </p:spPr>
+        <p:txBody>
+          <a:bodyPr wrap="square" rtlCol="0" anchor="ctr"/>
+          <a:lstStyle/>
+          <a:p>
+            <a:pPr indent="0" marL="0">
+              <a:buNone/>
+            </a:pPr>
+            <a:r>
+              <a:rPr lang="en-US" sz="850" dirty="0">
                 <a:solidFill>
                   <a:srgbClr val="7090A0"/>
                 </a:solidFill>
@@ -8564,9 +8475,9 @@
                 <a:ea typeface="Arial" pitchFamily="34" charset="-122"/>
                 <a:cs typeface="Arial" pitchFamily="34" charset="-120"/>
               </a:rPr>
-              <a:t>• Roll SmartPlan to 50K users; A/B: proactive nudge vs reactive trigger</a:t>
-            </a:r>
-            <a:endParaRPr lang="en-US" sz="900" dirty="0"/>
+              <a:t>• Expand to 50K; A/B test proactive vs reactive nudge</a:t>
+            </a:r>
+            <a:endParaRPr lang="en-US" sz="850" dirty="0"/>
           </a:p>
         </p:txBody>
       </p:sp>
@@ -8578,24 +8489,24 @@
         </p:nvSpPr>
         <p:spPr>
           <a:xfrm>
-            <a:off x="3355848" y="2542032"/>
-            <a:ext cx="2423160" cy="457200"/>
-          </a:xfrm>
-          <a:prstGeom prst="rect">
-            <a:avLst/>
-          </a:prstGeom>
-          <a:noFill/>
-          <a:ln/>
-        </p:spPr>
-        <p:txBody>
-          <a:bodyPr wrap="square" rtlCol="0" anchor="ctr"/>
-          <a:lstStyle/>
-          <a:p>
-            <a:pPr indent="0" marL="0">
-              <a:buNone/>
-            </a:pPr>
-            <a:r>
-              <a:rPr lang="en-US" sz="900" dirty="0">
+            <a:off x="3364992" y="2048256"/>
+            <a:ext cx="2423160" cy="402336"/>
+          </a:xfrm>
+          <a:prstGeom prst="rect">
+            <a:avLst/>
+          </a:prstGeom>
+          <a:noFill/>
+          <a:ln/>
+        </p:spPr>
+        <p:txBody>
+          <a:bodyPr wrap="square" rtlCol="0" anchor="ctr"/>
+          <a:lstStyle/>
+          <a:p>
+            <a:pPr indent="0" marL="0">
+              <a:buNone/>
+            </a:pPr>
+            <a:r>
+              <a:rPr lang="en-US" sz="850" dirty="0">
                 <a:solidFill>
                   <a:srgbClr val="7090A0"/>
                 </a:solidFill>
@@ -8603,9 +8514,9 @@
                 <a:ea typeface="Arial" pitchFamily="34" charset="-122"/>
                 <a:cs typeface="Arial" pitchFamily="34" charset="-120"/>
               </a:rPr>
-              <a:t>• Tune Plan Fit Score thresholds based on pilot churn data</a:t>
-            </a:r>
-            <a:endParaRPr lang="en-US" sz="900" dirty="0"/>
+              <a:t>• Tune Plan Fit thresholds using pilot churn data</a:t>
+            </a:r>
+            <a:endParaRPr lang="en-US" sz="850" dirty="0"/>
           </a:p>
         </p:txBody>
       </p:sp>
@@ -8617,24 +8528,24 @@
         </p:nvSpPr>
         <p:spPr>
           <a:xfrm>
-            <a:off x="3355848" y="3072384"/>
-            <a:ext cx="2423160" cy="457200"/>
-          </a:xfrm>
-          <a:prstGeom prst="rect">
-            <a:avLst/>
-          </a:prstGeom>
-          <a:noFill/>
-          <a:ln/>
-        </p:spPr>
-        <p:txBody>
-          <a:bodyPr wrap="square" rtlCol="0" anchor="ctr"/>
-          <a:lstStyle/>
-          <a:p>
-            <a:pPr indent="0" marL="0">
-              <a:buNone/>
-            </a:pPr>
-            <a:r>
-              <a:rPr lang="en-US" sz="900" dirty="0">
+            <a:off x="3364992" y="2505456"/>
+            <a:ext cx="2423160" cy="402336"/>
+          </a:xfrm>
+          <a:prstGeom prst="rect">
+            <a:avLst/>
+          </a:prstGeom>
+          <a:noFill/>
+          <a:ln/>
+        </p:spPr>
+        <p:txBody>
+          <a:bodyPr wrap="square" rtlCol="0" anchor="ctr"/>
+          <a:lstStyle/>
+          <a:p>
+            <a:pPr indent="0" marL="0">
+              <a:buNone/>
+            </a:pPr>
+            <a:r>
+              <a:rPr lang="en-US" sz="850" dirty="0">
                 <a:solidFill>
                   <a:srgbClr val="7090A0"/>
                 </a:solidFill>
@@ -8642,9 +8553,9 @@
                 <a:ea typeface="Arial" pitchFamily="34" charset="-122"/>
                 <a:cs typeface="Arial" pitchFamily="34" charset="-120"/>
               </a:rPr>
-              <a:t>• Launch Ops Intelligence dashboard for PM and commercial team</a:t>
-            </a:r>
-            <a:endParaRPr lang="en-US" sz="900" dirty="0"/>
+              <a:t>• Launch Ops Intelligence dashboard for PM &amp; commercial</a:t>
+            </a:r>
+            <a:endParaRPr lang="en-US" sz="850" dirty="0"/>
           </a:p>
         </p:txBody>
       </p:sp>
@@ -8656,24 +8567,24 @@
         </p:nvSpPr>
         <p:spPr>
           <a:xfrm>
-            <a:off x="3355848" y="3602736"/>
-            <a:ext cx="2423160" cy="457200"/>
-          </a:xfrm>
-          <a:prstGeom prst="rect">
-            <a:avLst/>
-          </a:prstGeom>
-          <a:noFill/>
-          <a:ln/>
-        </p:spPr>
-        <p:txBody>
-          <a:bodyPr wrap="square" rtlCol="0" anchor="ctr"/>
-          <a:lstStyle/>
-          <a:p>
-            <a:pPr indent="0" marL="0">
-              <a:buNone/>
-            </a:pPr>
-            <a:r>
-              <a:rPr lang="en-US" sz="900" dirty="0">
+            <a:off x="3364992" y="2962656"/>
+            <a:ext cx="2423160" cy="402336"/>
+          </a:xfrm>
+          <a:prstGeom prst="rect">
+            <a:avLst/>
+          </a:prstGeom>
+          <a:noFill/>
+          <a:ln/>
+        </p:spPr>
+        <p:txBody>
+          <a:bodyPr wrap="square" rtlCol="0" anchor="ctr"/>
+          <a:lstStyle/>
+          <a:p>
+            <a:pPr indent="0" marL="0">
+              <a:buNone/>
+            </a:pPr>
+            <a:r>
+              <a:rPr lang="en-US" sz="850" dirty="0">
                 <a:solidFill>
                   <a:srgbClr val="7090A0"/>
                 </a:solidFill>
@@ -8683,7 +8594,7 @@
               </a:rPr>
               <a:t>• Instrument ARPU delta and 90-day churn outcomes</a:t>
             </a:r>
-            <a:endParaRPr lang="en-US" sz="900" dirty="0"/>
+            <a:endParaRPr lang="en-US" sz="850" dirty="0"/>
           </a:p>
         </p:txBody>
       </p:sp>
@@ -8695,12 +8606,12 @@
         </p:nvSpPr>
         <p:spPr>
           <a:xfrm>
-            <a:off x="6071616" y="1325880"/>
-            <a:ext cx="2697480" cy="3154680"/>
+            <a:off x="6089904" y="1005840"/>
+            <a:ext cx="2697480" cy="2670048"/>
           </a:xfrm>
           <a:prstGeom prst="roundRect">
             <a:avLst>
-              <a:gd name="adj" fmla="val 3390"/>
+              <a:gd name="adj" fmla="val 3425"/>
             </a:avLst>
           </a:prstGeom>
           <a:solidFill>
@@ -8724,17 +8635,17 @@
         </p:nvSpPr>
         <p:spPr>
           <a:xfrm>
-            <a:off x="6071616" y="1325880"/>
-            <a:ext cx="2697480" cy="566928"/>
+            <a:off x="6089904" y="1005840"/>
+            <a:ext cx="2697480" cy="475488"/>
           </a:xfrm>
           <a:prstGeom prst="roundRect">
             <a:avLst>
-              <a:gd name="adj" fmla="val 16129"/>
+              <a:gd name="adj" fmla="val 19231"/>
             </a:avLst>
           </a:prstGeom>
           <a:solidFill>
             <a:srgbClr val="22C55E">
-              <a:alpha val="20000"/>
+              <a:alpha val="18000"/>
             </a:srgbClr>
           </a:solidFill>
           <a:ln w="6350">
@@ -8755,8 +8666,8 @@
         </p:nvSpPr>
         <p:spPr>
           <a:xfrm>
-            <a:off x="6071616" y="1371600"/>
-            <a:ext cx="2697480" cy="256032"/>
+            <a:off x="6089904" y="1042416"/>
+            <a:ext cx="2697480" cy="219456"/>
           </a:xfrm>
           <a:prstGeom prst="rect">
             <a:avLst/>
@@ -8772,14 +8683,14 @@
               <a:buNone/>
             </a:pPr>
             <a:r>
-              <a:rPr lang="en-US" sz="900" b="1" dirty="0">
+              <a:rPr lang="en-US" sz="800" b="1" dirty="0">
                 <a:solidFill>
                   <a:srgbClr val="22C55E"/>
                 </a:solidFill>
               </a:rPr>
               <a:t>Phase 3  ·  Month 5–6</a:t>
             </a:r>
-            <a:endParaRPr lang="en-US" sz="900" dirty="0"/>
+            <a:endParaRPr lang="en-US" sz="800" dirty="0"/>
           </a:p>
         </p:txBody>
       </p:sp>
@@ -8791,8 +8702,8 @@
         </p:nvSpPr>
         <p:spPr>
           <a:xfrm>
-            <a:off x="6071616" y="1627632"/>
-            <a:ext cx="2697480" cy="256032"/>
+            <a:off x="6089904" y="1261872"/>
+            <a:ext cx="2697480" cy="219456"/>
           </a:xfrm>
           <a:prstGeom prst="rect">
             <a:avLst/>
@@ -8808,7 +8719,7 @@
               <a:buNone/>
             </a:pPr>
             <a:r>
-              <a:rPr lang="en-US" sz="1100" b="1" dirty="0">
+              <a:rPr lang="en-US" sz="1000" b="1" dirty="0">
                 <a:solidFill>
                   <a:srgbClr val="FFFFFF"/>
                 </a:solidFill>
@@ -8818,7 +8729,7 @@
               </a:rPr>
               <a:t>Full Rollout</a:t>
             </a:r>
-            <a:endParaRPr lang="en-US" sz="1100" dirty="0"/>
+            <a:endParaRPr lang="en-US" sz="1000" dirty="0"/>
           </a:p>
         </p:txBody>
       </p:sp>
@@ -8830,24 +8741,24 @@
         </p:nvSpPr>
         <p:spPr>
           <a:xfrm>
-            <a:off x="6208776" y="2011680"/>
-            <a:ext cx="2423160" cy="457200"/>
-          </a:xfrm>
-          <a:prstGeom prst="rect">
-            <a:avLst/>
-          </a:prstGeom>
-          <a:noFill/>
-          <a:ln/>
-        </p:spPr>
-        <p:txBody>
-          <a:bodyPr wrap="square" rtlCol="0" anchor="ctr"/>
-          <a:lstStyle/>
-          <a:p>
-            <a:pPr indent="0" marL="0">
-              <a:buNone/>
-            </a:pPr>
-            <a:r>
-              <a:rPr lang="en-US" sz="900" dirty="0">
+            <a:off x="6217920" y="1591056"/>
+            <a:ext cx="2423160" cy="402336"/>
+          </a:xfrm>
+          <a:prstGeom prst="rect">
+            <a:avLst/>
+          </a:prstGeom>
+          <a:noFill/>
+          <a:ln/>
+        </p:spPr>
+        <p:txBody>
+          <a:bodyPr wrap="square" rtlCol="0" anchor="ctr"/>
+          <a:lstStyle/>
+          <a:p>
+            <a:pPr indent="0" marL="0">
+              <a:buNone/>
+            </a:pPr>
+            <a:r>
+              <a:rPr lang="en-US" sz="850" dirty="0">
                 <a:solidFill>
                   <a:srgbClr val="7090A0"/>
                 </a:solidFill>
@@ -8855,9 +8766,9 @@
                 <a:ea typeface="Arial" pitchFamily="34" charset="-122"/>
                 <a:cs typeface="Arial" pitchFamily="34" charset="-120"/>
               </a:rPr>
-              <a:t>• Deploy to full MENA subscriber base with winning nudge variant</a:t>
-            </a:r>
-            <a:endParaRPr lang="en-US" sz="900" dirty="0"/>
+              <a:t>• Deploy to full MENA base with winning nudge variant</a:t>
+            </a:r>
+            <a:endParaRPr lang="en-US" sz="850" dirty="0"/>
           </a:p>
         </p:txBody>
       </p:sp>
@@ -8869,24 +8780,24 @@
         </p:nvSpPr>
         <p:spPr>
           <a:xfrm>
-            <a:off x="6208776" y="2542032"/>
-            <a:ext cx="2423160" cy="457200"/>
-          </a:xfrm>
-          <a:prstGeom prst="rect">
-            <a:avLst/>
-          </a:prstGeom>
-          <a:noFill/>
-          <a:ln/>
-        </p:spPr>
-        <p:txBody>
-          <a:bodyPr wrap="square" rtlCol="0" anchor="ctr"/>
-          <a:lstStyle/>
-          <a:p>
-            <a:pPr indent="0" marL="0">
-              <a:buNone/>
-            </a:pPr>
-            <a:r>
-              <a:rPr lang="en-US" sz="900" dirty="0">
+            <a:off x="6217920" y="2048256"/>
+            <a:ext cx="2423160" cy="402336"/>
+          </a:xfrm>
+          <a:prstGeom prst="rect">
+            <a:avLst/>
+          </a:prstGeom>
+          <a:noFill/>
+          <a:ln/>
+        </p:spPr>
+        <p:txBody>
+          <a:bodyPr wrap="square" rtlCol="0" anchor="ctr"/>
+          <a:lstStyle/>
+          <a:p>
+            <a:pPr indent="0" marL="0">
+              <a:buNone/>
+            </a:pPr>
+            <a:r>
+              <a:rPr lang="en-US" sz="850" dirty="0">
                 <a:solidFill>
                   <a:srgbClr val="7090A0"/>
                 </a:solidFill>
@@ -8894,9 +8805,9 @@
                 <a:ea typeface="Arial" pitchFamily="34" charset="-122"/>
                 <a:cs typeface="Arial" pitchFamily="34" charset="-120"/>
               </a:rPr>
-              <a:t>• Integrate Plan Fit Score into onboarding flow for new subscribers</a:t>
-            </a:r>
-            <a:endParaRPr lang="en-US" sz="900" dirty="0"/>
+              <a:t>• Integrate Plan Fit Score into new subscriber onboarding</a:t>
+            </a:r>
+            <a:endParaRPr lang="en-US" sz="850" dirty="0"/>
           </a:p>
         </p:txBody>
       </p:sp>
@@ -8908,24 +8819,24 @@
         </p:nvSpPr>
         <p:spPr>
           <a:xfrm>
-            <a:off x="6208776" y="3072384"/>
-            <a:ext cx="2423160" cy="457200"/>
-          </a:xfrm>
-          <a:prstGeom prst="rect">
-            <a:avLst/>
-          </a:prstGeom>
-          <a:noFill/>
-          <a:ln/>
-        </p:spPr>
-        <p:txBody>
-          <a:bodyPr wrap="square" rtlCol="0" anchor="ctr"/>
-          <a:lstStyle/>
-          <a:p>
-            <a:pPr indent="0" marL="0">
-              <a:buNone/>
-            </a:pPr>
-            <a:r>
-              <a:rPr lang="en-US" sz="900" dirty="0">
+            <a:off x="6217920" y="2505456"/>
+            <a:ext cx="2423160" cy="402336"/>
+          </a:xfrm>
+          <a:prstGeom prst="rect">
+            <a:avLst/>
+          </a:prstGeom>
+          <a:noFill/>
+          <a:ln/>
+        </p:spPr>
+        <p:txBody>
+          <a:bodyPr wrap="square" rtlCol="0" anchor="ctr"/>
+          <a:lstStyle/>
+          <a:p>
+            <a:pPr indent="0" marL="0">
+              <a:buNone/>
+            </a:pPr>
+            <a:r>
+              <a:rPr lang="en-US" sz="850" dirty="0">
                 <a:solidFill>
                   <a:srgbClr val="7090A0"/>
                 </a:solidFill>
@@ -8933,9 +8844,9 @@
                 <a:ea typeface="Arial" pitchFamily="34" charset="-122"/>
                 <a:cs typeface="Arial" pitchFamily="34" charset="-120"/>
               </a:rPr>
-              <a:t>• Launch upsell module: SmartPlan as premium plan migration path</a:t>
-            </a:r>
-            <a:endParaRPr lang="en-US" sz="900" dirty="0"/>
+              <a:t>• Launch upsell module as SmartPlan premium migration path</a:t>
+            </a:r>
+            <a:endParaRPr lang="en-US" sz="850" dirty="0"/>
           </a:p>
         </p:txBody>
       </p:sp>
@@ -8947,24 +8858,24 @@
         </p:nvSpPr>
         <p:spPr>
           <a:xfrm>
-            <a:off x="6208776" y="3602736"/>
-            <a:ext cx="2423160" cy="457200"/>
-          </a:xfrm>
-          <a:prstGeom prst="rect">
-            <a:avLst/>
-          </a:prstGeom>
-          <a:noFill/>
-          <a:ln/>
-        </p:spPr>
-        <p:txBody>
-          <a:bodyPr wrap="square" rtlCol="0" anchor="ctr"/>
-          <a:lstStyle/>
-          <a:p>
-            <a:pPr indent="0" marL="0">
-              <a:buNone/>
-            </a:pPr>
-            <a:r>
-              <a:rPr lang="en-US" sz="900" dirty="0">
+            <a:off x="6217920" y="2962656"/>
+            <a:ext cx="2423160" cy="402336"/>
+          </a:xfrm>
+          <a:prstGeom prst="rect">
+            <a:avLst/>
+          </a:prstGeom>
+          <a:noFill/>
+          <a:ln/>
+        </p:spPr>
+        <p:txBody>
+          <a:bodyPr wrap="square" rtlCol="0" anchor="ctr"/>
+          <a:lstStyle/>
+          <a:p>
+            <a:pPr indent="0" marL="0">
+              <a:buNone/>
+            </a:pPr>
+            <a:r>
+              <a:rPr lang="en-US" sz="850" dirty="0">
                 <a:solidFill>
                   <a:srgbClr val="7090A0"/>
                 </a:solidFill>
@@ -8972,9 +8883,9 @@
                 <a:ea typeface="Arial" pitchFamily="34" charset="-122"/>
                 <a:cs typeface="Arial" pitchFamily="34" charset="-120"/>
               </a:rPr>
-              <a:t>• Publish ARPU and churn impact report for board/investors</a:t>
-            </a:r>
-            <a:endParaRPr lang="en-US" sz="900" dirty="0"/>
+              <a:t>• Publish ARPU and churn impact report for investors</a:t>
+            </a:r>
+            <a:endParaRPr lang="en-US" sz="850" dirty="0"/>
           </a:p>
         </p:txBody>
       </p:sp>
@@ -8986,12 +8897,12 @@
         </p:nvSpPr>
         <p:spPr>
           <a:xfrm>
-            <a:off x="365760" y="4663440"/>
-            <a:ext cx="5760720" cy="1005840"/>
+            <a:off x="384048" y="3840480"/>
+            <a:ext cx="5943600" cy="868680"/>
           </a:xfrm>
           <a:prstGeom prst="roundRect">
             <a:avLst>
-              <a:gd name="adj" fmla="val 7273"/>
+              <a:gd name="adj" fmla="val 8421"/>
             </a:avLst>
           </a:prstGeom>
           <a:solidFill>
@@ -9015,24 +8926,24 @@
         </p:nvSpPr>
         <p:spPr>
           <a:xfrm>
-            <a:off x="548640" y="4718304"/>
-            <a:ext cx="5577840" cy="256032"/>
-          </a:xfrm>
-          <a:prstGeom prst="rect">
-            <a:avLst/>
-          </a:prstGeom>
-          <a:noFill/>
-          <a:ln/>
-        </p:spPr>
-        <p:txBody>
-          <a:bodyPr wrap="square" rtlCol="0" anchor="ctr"/>
-          <a:lstStyle/>
-          <a:p>
-            <a:pPr indent="0" marL="0">
-              <a:buNone/>
-            </a:pPr>
-            <a:r>
-              <a:rPr lang="en-US" sz="1000" b="1" dirty="0">
+            <a:off x="566928" y="3913632"/>
+            <a:ext cx="5760720" cy="237744"/>
+          </a:xfrm>
+          <a:prstGeom prst="rect">
+            <a:avLst/>
+          </a:prstGeom>
+          <a:noFill/>
+          <a:ln/>
+        </p:spPr>
+        <p:txBody>
+          <a:bodyPr wrap="square" rtlCol="0" anchor="ctr"/>
+          <a:lstStyle/>
+          <a:p>
+            <a:pPr indent="0" marL="0">
+              <a:buNone/>
+            </a:pPr>
+            <a:r>
+              <a:rPr lang="en-US" sz="950" b="1" dirty="0">
                 <a:solidFill>
                   <a:srgbClr val="00C6FF"/>
                 </a:solidFill>
@@ -9042,7 +8953,7 @@
               </a:rPr>
               <a:t>What I need to build this:</a:t>
             </a:r>
-            <a:endParaRPr lang="en-US" sz="1000" dirty="0"/>
+            <a:endParaRPr lang="en-US" sz="950" dirty="0"/>
           </a:p>
         </p:txBody>
       </p:sp>
@@ -9054,24 +8965,24 @@
         </p:nvSpPr>
         <p:spPr>
           <a:xfrm>
-            <a:off x="548640" y="4992624"/>
-            <a:ext cx="5577840" cy="548640"/>
-          </a:xfrm>
-          <a:prstGeom prst="rect">
-            <a:avLst/>
-          </a:prstGeom>
-          <a:noFill/>
-          <a:ln/>
-        </p:spPr>
-        <p:txBody>
-          <a:bodyPr wrap="square" rtlCol="0" anchor="ctr"/>
-          <a:lstStyle/>
-          <a:p>
-            <a:pPr indent="0" marL="0">
-              <a:buNone/>
-            </a:pPr>
-            <a:r>
-              <a:rPr lang="en-US" sz="950" dirty="0">
+            <a:off x="566928" y="4169664"/>
+            <a:ext cx="5760720" cy="420624"/>
+          </a:xfrm>
+          <a:prstGeom prst="rect">
+            <a:avLst/>
+          </a:prstGeom>
+          <a:noFill/>
+          <a:ln/>
+        </p:spPr>
+        <p:txBody>
+          <a:bodyPr wrap="square" rtlCol="0" anchor="ctr"/>
+          <a:lstStyle/>
+          <a:p>
+            <a:pPr indent="0" marL="0">
+              <a:buNone/>
+            </a:pPr>
+            <a:r>
+              <a:rPr lang="en-US" sz="900" dirty="0">
                 <a:solidFill>
                   <a:srgbClr val="90B0C0"/>
                 </a:solidFill>
@@ -9079,9 +8990,9 @@
                 <a:ea typeface="Arial" pitchFamily="34" charset="-122"/>
                 <a:cs typeface="Arial" pitchFamily="34" charset="-120"/>
               </a:rPr>
-              <a:t>Access to subscriber usage data  ·  Alignment with commercial/plan team  ·  1 ML engineer  ·  iOS/Android feature slot</a:t>
-            </a:r>
-            <a:endParaRPr lang="en-US" sz="950" dirty="0"/>
+              <a:t>Subscriber usage data access  ·  Commercial/plan team alignment  ·  1 ML engineer  ·  iOS/Android feature slot</a:t>
+            </a:r>
+            <a:endParaRPr lang="en-US" sz="900" dirty="0"/>
           </a:p>
         </p:txBody>
       </p:sp>
@@ -9093,8 +9004,8 @@
         </p:nvSpPr>
         <p:spPr>
           <a:xfrm>
-            <a:off x="365760" y="6217920"/>
-            <a:ext cx="8412480" cy="320040"/>
+            <a:off x="365760" y="4846320"/>
+            <a:ext cx="8412480" cy="228600"/>
           </a:xfrm>
           <a:prstGeom prst="rect">
             <a:avLst/>
@@ -9110,7 +9021,7 @@
               <a:buNone/>
             </a:pPr>
             <a:r>
-              <a:rPr lang="en-US" sz="900" dirty="0">
+              <a:rPr lang="en-US" sz="850" dirty="0">
                 <a:solidFill>
                   <a:srgbClr val="405060"/>
                 </a:solidFill>
@@ -9120,7 +9031,7 @@
               </a:rPr>
               <a:t>Ajay Avaghade  ·  avaghadeajay009@gmail.com  ·  +91 9561558439  ·  linkedin.com/in/ajay-avaghade</a:t>
             </a:r>
-            <a:endParaRPr lang="en-US" sz="900" dirty="0"/>
+            <a:endParaRPr lang="en-US" sz="850" dirty="0"/>
           </a:p>
         </p:txBody>
       </p:sp>
